--- a/docs/deck/Landshield-Deck.pptx
+++ b/docs/deck/Landshield-Deck.pptx
@@ -2,7 +2,7 @@
 <file path=ppt/presentation.xml><?xml version="1.0" encoding="utf-8"?>
 <p:presentation xmlns:a="http://schemas.openxmlformats.org/drawingml/2006/main" xmlns:r="http://schemas.openxmlformats.org/officeDocument/2006/relationships" xmlns:p="http://schemas.openxmlformats.org/presentationml/2006/main" saveSubsetFonts="1">
   <p:sldMasterIdLst>
-    <p:sldMasterId id="2147483648" r:id="rId1"/>
+    <p:sldMasterId id="2147483661" r:id="rId1"/>
   </p:sldMasterIdLst>
   <p:sldIdLst>
     <p:sldId id="256" r:id="rId2"/>
@@ -24,7 +24,7 @@
     <a:defPPr>
       <a:defRPr lang="en-US"/>
     </a:defPPr>
-    <a:lvl1pPr marL="0" algn="l" defTabSz="914400" rtl="0" eaLnBrk="1" latinLnBrk="0" hangingPunct="1">
+    <a:lvl1pPr marL="0" algn="l" defTabSz="457200" rtl="0" eaLnBrk="1" latinLnBrk="0" hangingPunct="1">
       <a:defRPr sz="1800" kern="1200">
         <a:solidFill>
           <a:schemeClr val="tx1"/>
@@ -34,7 +34,7 @@
         <a:cs typeface="+mn-cs"/>
       </a:defRPr>
     </a:lvl1pPr>
-    <a:lvl2pPr marL="457200" algn="l" defTabSz="914400" rtl="0" eaLnBrk="1" latinLnBrk="0" hangingPunct="1">
+    <a:lvl2pPr marL="457200" algn="l" defTabSz="457200" rtl="0" eaLnBrk="1" latinLnBrk="0" hangingPunct="1">
       <a:defRPr sz="1800" kern="1200">
         <a:solidFill>
           <a:schemeClr val="tx1"/>
@@ -44,7 +44,7 @@
         <a:cs typeface="+mn-cs"/>
       </a:defRPr>
     </a:lvl2pPr>
-    <a:lvl3pPr marL="914400" algn="l" defTabSz="914400" rtl="0" eaLnBrk="1" latinLnBrk="0" hangingPunct="1">
+    <a:lvl3pPr marL="914400" algn="l" defTabSz="457200" rtl="0" eaLnBrk="1" latinLnBrk="0" hangingPunct="1">
       <a:defRPr sz="1800" kern="1200">
         <a:solidFill>
           <a:schemeClr val="tx1"/>
@@ -54,7 +54,7 @@
         <a:cs typeface="+mn-cs"/>
       </a:defRPr>
     </a:lvl3pPr>
-    <a:lvl4pPr marL="1371600" algn="l" defTabSz="914400" rtl="0" eaLnBrk="1" latinLnBrk="0" hangingPunct="1">
+    <a:lvl4pPr marL="1371600" algn="l" defTabSz="457200" rtl="0" eaLnBrk="1" latinLnBrk="0" hangingPunct="1">
       <a:defRPr sz="1800" kern="1200">
         <a:solidFill>
           <a:schemeClr val="tx1"/>
@@ -64,7 +64,7 @@
         <a:cs typeface="+mn-cs"/>
       </a:defRPr>
     </a:lvl4pPr>
-    <a:lvl5pPr marL="1828800" algn="l" defTabSz="914400" rtl="0" eaLnBrk="1" latinLnBrk="0" hangingPunct="1">
+    <a:lvl5pPr marL="1828800" algn="l" defTabSz="457200" rtl="0" eaLnBrk="1" latinLnBrk="0" hangingPunct="1">
       <a:defRPr sz="1800" kern="1200">
         <a:solidFill>
           <a:schemeClr val="tx1"/>
@@ -74,7 +74,7 @@
         <a:cs typeface="+mn-cs"/>
       </a:defRPr>
     </a:lvl5pPr>
-    <a:lvl6pPr marL="2286000" algn="l" defTabSz="914400" rtl="0" eaLnBrk="1" latinLnBrk="0" hangingPunct="1">
+    <a:lvl6pPr marL="2286000" algn="l" defTabSz="457200" rtl="0" eaLnBrk="1" latinLnBrk="0" hangingPunct="1">
       <a:defRPr sz="1800" kern="1200">
         <a:solidFill>
           <a:schemeClr val="tx1"/>
@@ -84,7 +84,7 @@
         <a:cs typeface="+mn-cs"/>
       </a:defRPr>
     </a:lvl6pPr>
-    <a:lvl7pPr marL="2743200" algn="l" defTabSz="914400" rtl="0" eaLnBrk="1" latinLnBrk="0" hangingPunct="1">
+    <a:lvl7pPr marL="2743200" algn="l" defTabSz="457200" rtl="0" eaLnBrk="1" latinLnBrk="0" hangingPunct="1">
       <a:defRPr sz="1800" kern="1200">
         <a:solidFill>
           <a:schemeClr val="tx1"/>
@@ -94,7 +94,7 @@
         <a:cs typeface="+mn-cs"/>
       </a:defRPr>
     </a:lvl7pPr>
-    <a:lvl8pPr marL="3200400" algn="l" defTabSz="914400" rtl="0" eaLnBrk="1" latinLnBrk="0" hangingPunct="1">
+    <a:lvl8pPr marL="3200400" algn="l" defTabSz="457200" rtl="0" eaLnBrk="1" latinLnBrk="0" hangingPunct="1">
       <a:defRPr sz="1800" kern="1200">
         <a:solidFill>
           <a:schemeClr val="tx1"/>
@@ -104,7 +104,7 @@
         <a:cs typeface="+mn-cs"/>
       </a:defRPr>
     </a:lvl8pPr>
-    <a:lvl9pPr marL="3657600" algn="l" defTabSz="914400" rtl="0" eaLnBrk="1" latinLnBrk="0" hangingPunct="1">
+    <a:lvl9pPr marL="3657600" algn="l" defTabSz="457200" rtl="0" eaLnBrk="1" latinLnBrk="0" hangingPunct="1">
       <a:defRPr sz="1800" kern="1200">
         <a:solidFill>
           <a:schemeClr val="tx1"/>
@@ -137,13 +137,7 @@
       </p:grpSpPr>
       <p:sp>
         <p:nvSpPr>
-          <p:cNvPr id="2" name="Title 1">
-            <a:extLst>
-              <a:ext uri="{FF2B5EF4-FFF2-40B4-BE49-F238E27FC236}">
-                <a16:creationId xmlns:a16="http://schemas.microsoft.com/office/drawing/2014/main" id="{64B0A47B-DF7D-E9DC-BE56-1AA18073F04C}"/>
-              </a:ext>
-            </a:extLst>
-          </p:cNvPr>
+          <p:cNvPr id="2" name="Title 1"/>
           <p:cNvSpPr>
             <a:spLocks noGrp="1"/>
           </p:cNvSpPr>
@@ -153,15 +147,17 @@
         </p:nvSpPr>
         <p:spPr>
           <a:xfrm>
-            <a:off x="1524000" y="1122363"/>
-            <a:ext cx="9144000" cy="2387600"/>
+            <a:off x="2417779" y="802298"/>
+            <a:ext cx="8637073" cy="2541431"/>
           </a:xfrm>
         </p:spPr>
         <p:txBody>
-          <a:bodyPr anchor="b"/>
+          <a:bodyPr bIns="0" anchor="b">
+            <a:normAutofit/>
+          </a:bodyPr>
           <a:lstStyle>
-            <a:lvl1pPr algn="ctr">
-              <a:defRPr sz="6000"/>
+            <a:lvl1pPr algn="l">
+              <a:defRPr sz="6600"/>
             </a:lvl1pPr>
           </a:lstStyle>
           <a:p>
@@ -169,18 +165,13 @@
               <a:rPr lang="en-US"/>
               <a:t>Click to edit Master title style</a:t>
             </a:r>
-          </a:p>
-        </p:txBody>
-      </p:sp>
-      <p:sp>
-        <p:nvSpPr>
-          <p:cNvPr id="3" name="Subtitle 2">
-            <a:extLst>
-              <a:ext uri="{FF2B5EF4-FFF2-40B4-BE49-F238E27FC236}">
-                <a16:creationId xmlns:a16="http://schemas.microsoft.com/office/drawing/2014/main" id="{A86212DF-AB6D-7670-AD62-CC9A1519F67F}"/>
-              </a:ext>
-            </a:extLst>
-          </p:cNvPr>
+            <a:endParaRPr lang="en-US" dirty="0"/>
+          </a:p>
+        </p:txBody>
+      </p:sp>
+      <p:sp>
+        <p:nvSpPr>
+          <p:cNvPr id="3" name="Subtitle 2"/>
           <p:cNvSpPr>
             <a:spLocks noGrp="1"/>
           </p:cNvSpPr>
@@ -190,20 +181,26 @@
         </p:nvSpPr>
         <p:spPr>
           <a:xfrm>
-            <a:off x="1524000" y="3602038"/>
-            <a:ext cx="9144000" cy="1655762"/>
+            <a:off x="2417780" y="3531204"/>
+            <a:ext cx="8637072" cy="977621"/>
           </a:xfrm>
         </p:spPr>
         <p:txBody>
-          <a:bodyPr/>
+          <a:bodyPr tIns="91440" bIns="91440">
+            <a:normAutofit/>
+          </a:bodyPr>
           <a:lstStyle>
-            <a:lvl1pPr marL="0" indent="0" algn="ctr">
+            <a:lvl1pPr marL="0" indent="0" algn="l">
               <a:buNone/>
-              <a:defRPr sz="2400"/>
+              <a:defRPr sz="1800" b="0" cap="all" baseline="0">
+                <a:solidFill>
+                  <a:schemeClr val="tx1"/>
+                </a:solidFill>
+              </a:defRPr>
             </a:lvl1pPr>
             <a:lvl2pPr marL="457200" indent="0" algn="ctr">
               <a:buNone/>
-              <a:defRPr sz="2000"/>
+              <a:defRPr sz="1800"/>
             </a:lvl2pPr>
             <a:lvl3pPr marL="914400" indent="0" algn="ctr">
               <a:buNone/>
@@ -239,18 +236,13 @@
               <a:rPr lang="en-US"/>
               <a:t>Click to edit Master subtitle style</a:t>
             </a:r>
-          </a:p>
-        </p:txBody>
-      </p:sp>
-      <p:sp>
-        <p:nvSpPr>
-          <p:cNvPr id="4" name="Date Placeholder 3">
-            <a:extLst>
-              <a:ext uri="{FF2B5EF4-FFF2-40B4-BE49-F238E27FC236}">
-                <a16:creationId xmlns:a16="http://schemas.microsoft.com/office/drawing/2014/main" id="{61D07322-0247-A0A4-291E-066839E1372C}"/>
-              </a:ext>
-            </a:extLst>
-          </p:cNvPr>
+            <a:endParaRPr lang="en-US" dirty="0"/>
+          </a:p>
+        </p:txBody>
+      </p:sp>
+      <p:sp>
+        <p:nvSpPr>
+          <p:cNvPr id="4" name="Date Placeholder 3"/>
           <p:cNvSpPr>
             <a:spLocks noGrp="1"/>
           </p:cNvSpPr>
@@ -263,7 +255,7 @@
           <a:bodyPr/>
           <a:lstStyle/>
           <a:p>
-            <a:fld id="{DE210632-9A01-4467-ACBB-4774DF0A0BAE}" type="datetimeFigureOut">
+            <a:fld id="{C823E295-28DF-4E71-9F53-D45207DE2860}" type="datetimeFigureOut">
               <a:rPr lang="en-US" smtClean="0"/>
               <a:t>5/20/2026</a:t>
             </a:fld>
@@ -273,13 +265,7 @@
       </p:sp>
       <p:sp>
         <p:nvSpPr>
-          <p:cNvPr id="5" name="Footer Placeholder 4">
-            <a:extLst>
-              <a:ext uri="{FF2B5EF4-FFF2-40B4-BE49-F238E27FC236}">
-                <a16:creationId xmlns:a16="http://schemas.microsoft.com/office/drawing/2014/main" id="{5A3245DC-D2BF-7D55-E2AB-07D9E6FB4F02}"/>
-              </a:ext>
-            </a:extLst>
-          </p:cNvPr>
+          <p:cNvPr id="5" name="Footer Placeholder 4"/>
           <p:cNvSpPr>
             <a:spLocks noGrp="1"/>
           </p:cNvSpPr>
@@ -287,7 +273,12 @@
             <p:ph type="ftr" sz="quarter" idx="11"/>
           </p:nvPr>
         </p:nvSpPr>
-        <p:spPr/>
+        <p:spPr>
+          <a:xfrm>
+            <a:off x="2416500" y="329307"/>
+            <a:ext cx="4973915" cy="309201"/>
+          </a:xfrm>
+        </p:spPr>
         <p:txBody>
           <a:bodyPr/>
           <a:lstStyle/>
@@ -298,13 +289,7 @@
       </p:sp>
       <p:sp>
         <p:nvSpPr>
-          <p:cNvPr id="6" name="Slide Number Placeholder 5">
-            <a:extLst>
-              <a:ext uri="{FF2B5EF4-FFF2-40B4-BE49-F238E27FC236}">
-                <a16:creationId xmlns:a16="http://schemas.microsoft.com/office/drawing/2014/main" id="{57F0A7A9-CC6B-4470-7D3F-DA7C4AD5D3A4}"/>
-              </a:ext>
-            </a:extLst>
-          </p:cNvPr>
+          <p:cNvPr id="6" name="Slide Number Placeholder 5"/>
           <p:cNvSpPr>
             <a:spLocks noGrp="1"/>
           </p:cNvSpPr>
@@ -312,12 +297,17 @@
             <p:ph type="sldNum" sz="quarter" idx="12"/>
           </p:nvPr>
         </p:nvSpPr>
-        <p:spPr/>
+        <p:spPr>
+          <a:xfrm>
+            <a:off x="1437664" y="798973"/>
+            <a:ext cx="811019" cy="503578"/>
+          </a:xfrm>
+        </p:spPr>
         <p:txBody>
           <a:bodyPr/>
           <a:lstStyle/>
           <a:p>
-            <a:fld id="{BA1408D6-A18F-4DEF-8108-D3F1A5E4F663}" type="slidenum">
+            <a:fld id="{41970ED4-46CD-4B2B-B2B3-745DA35D2A58}" type="slidenum">
               <a:rPr lang="en-US" smtClean="0"/>
               <a:t>‹#›</a:t>
             </a:fld>
@@ -325,10 +315,41 @@
           </a:p>
         </p:txBody>
       </p:sp>
+      <p:cxnSp>
+        <p:nvCxnSpPr>
+          <p:cNvPr id="15" name="Straight Connector 14"/>
+          <p:cNvCxnSpPr/>
+          <p:nvPr/>
+        </p:nvCxnSpPr>
+        <p:spPr>
+          <a:xfrm>
+            <a:off x="2417780" y="3528542"/>
+            <a:ext cx="8637072" cy="0"/>
+          </a:xfrm>
+          <a:prstGeom prst="line">
+            <a:avLst/>
+          </a:prstGeom>
+          <a:ln w="31750"/>
+        </p:spPr>
+        <p:style>
+          <a:lnRef idx="3">
+            <a:schemeClr val="accent1"/>
+          </a:lnRef>
+          <a:fillRef idx="0">
+            <a:schemeClr val="accent1"/>
+          </a:fillRef>
+          <a:effectRef idx="2">
+            <a:schemeClr val="accent1"/>
+          </a:effectRef>
+          <a:fontRef idx="minor">
+            <a:schemeClr val="tx1"/>
+          </a:fontRef>
+        </p:style>
+      </p:cxnSp>
     </p:spTree>
     <p:extLst>
       <p:ext uri="{BB962C8B-B14F-4D97-AF65-F5344CB8AC3E}">
-        <p14:creationId xmlns:p14="http://schemas.microsoft.com/office/powerpoint/2010/main" val="1148096937"/>
+        <p14:creationId xmlns:p14="http://schemas.microsoft.com/office/powerpoint/2010/main" val="1155698506"/>
       </p:ext>
     </p:extLst>
   </p:cSld>
@@ -357,13 +378,7 @@
       </p:grpSpPr>
       <p:sp>
         <p:nvSpPr>
-          <p:cNvPr id="2" name="Title 1">
-            <a:extLst>
-              <a:ext uri="{FF2B5EF4-FFF2-40B4-BE49-F238E27FC236}">
-                <a16:creationId xmlns:a16="http://schemas.microsoft.com/office/drawing/2014/main" id="{4CB35836-CB8F-5D7B-FFE4-0833BC9FBA60}"/>
-              </a:ext>
-            </a:extLst>
-          </p:cNvPr>
+          <p:cNvPr id="2" name="Title 1"/>
           <p:cNvSpPr>
             <a:spLocks noGrp="1"/>
           </p:cNvSpPr>
@@ -380,18 +395,13 @@
               <a:rPr lang="en-US"/>
               <a:t>Click to edit Master title style</a:t>
             </a:r>
-          </a:p>
-        </p:txBody>
-      </p:sp>
-      <p:sp>
-        <p:nvSpPr>
-          <p:cNvPr id="3" name="Vertical Text Placeholder 2">
-            <a:extLst>
-              <a:ext uri="{FF2B5EF4-FFF2-40B4-BE49-F238E27FC236}">
-                <a16:creationId xmlns:a16="http://schemas.microsoft.com/office/drawing/2014/main" id="{E6EAE8D1-762F-A0F2-0625-7F5FB70C6212}"/>
-              </a:ext>
-            </a:extLst>
-          </p:cNvPr>
+            <a:endParaRPr lang="en-US" dirty="0"/>
+          </a:p>
+        </p:txBody>
+      </p:sp>
+      <p:sp>
+        <p:nvSpPr>
+          <p:cNvPr id="3" name="Vertical Text Placeholder 2"/>
           <p:cNvSpPr>
             <a:spLocks noGrp="1"/>
           </p:cNvSpPr>
@@ -437,18 +447,13 @@
               <a:rPr lang="en-US"/>
               <a:t>Fifth level</a:t>
             </a:r>
-          </a:p>
-        </p:txBody>
-      </p:sp>
-      <p:sp>
-        <p:nvSpPr>
-          <p:cNvPr id="4" name="Date Placeholder 3">
-            <a:extLst>
-              <a:ext uri="{FF2B5EF4-FFF2-40B4-BE49-F238E27FC236}">
-                <a16:creationId xmlns:a16="http://schemas.microsoft.com/office/drawing/2014/main" id="{5DAAC82A-9ECB-4D72-DECA-E84072BA22B4}"/>
-              </a:ext>
-            </a:extLst>
-          </p:cNvPr>
+            <a:endParaRPr lang="en-US" dirty="0"/>
+          </a:p>
+        </p:txBody>
+      </p:sp>
+      <p:sp>
+        <p:nvSpPr>
+          <p:cNvPr id="4" name="Date Placeholder 3"/>
           <p:cNvSpPr>
             <a:spLocks noGrp="1"/>
           </p:cNvSpPr>
@@ -461,7 +466,7 @@
           <a:bodyPr/>
           <a:lstStyle/>
           <a:p>
-            <a:fld id="{DE210632-9A01-4467-ACBB-4774DF0A0BAE}" type="datetimeFigureOut">
+            <a:fld id="{C823E295-28DF-4E71-9F53-D45207DE2860}" type="datetimeFigureOut">
               <a:rPr lang="en-US" smtClean="0"/>
               <a:t>5/20/2026</a:t>
             </a:fld>
@@ -471,13 +476,7 @@
       </p:sp>
       <p:sp>
         <p:nvSpPr>
-          <p:cNvPr id="5" name="Footer Placeholder 4">
-            <a:extLst>
-              <a:ext uri="{FF2B5EF4-FFF2-40B4-BE49-F238E27FC236}">
-                <a16:creationId xmlns:a16="http://schemas.microsoft.com/office/drawing/2014/main" id="{09F8DF57-3472-23E3-323A-0CCC37847C5F}"/>
-              </a:ext>
-            </a:extLst>
-          </p:cNvPr>
+          <p:cNvPr id="5" name="Footer Placeholder 4"/>
           <p:cNvSpPr>
             <a:spLocks noGrp="1"/>
           </p:cNvSpPr>
@@ -496,13 +495,7 @@
       </p:sp>
       <p:sp>
         <p:nvSpPr>
-          <p:cNvPr id="6" name="Slide Number Placeholder 5">
-            <a:extLst>
-              <a:ext uri="{FF2B5EF4-FFF2-40B4-BE49-F238E27FC236}">
-                <a16:creationId xmlns:a16="http://schemas.microsoft.com/office/drawing/2014/main" id="{873E61DE-436E-4E6C-819C-E24CA9B6B0F0}"/>
-              </a:ext>
-            </a:extLst>
-          </p:cNvPr>
+          <p:cNvPr id="6" name="Slide Number Placeholder 5"/>
           <p:cNvSpPr>
             <a:spLocks noGrp="1"/>
           </p:cNvSpPr>
@@ -515,7 +508,7 @@
           <a:bodyPr/>
           <a:lstStyle/>
           <a:p>
-            <a:fld id="{BA1408D6-A18F-4DEF-8108-D3F1A5E4F663}" type="slidenum">
+            <a:fld id="{41970ED4-46CD-4B2B-B2B3-745DA35D2A58}" type="slidenum">
               <a:rPr lang="en-US" smtClean="0"/>
               <a:t>‹#›</a:t>
             </a:fld>
@@ -523,10 +516,41 @@
           </a:p>
         </p:txBody>
       </p:sp>
+      <p:cxnSp>
+        <p:nvCxnSpPr>
+          <p:cNvPr id="26" name="Straight Connector 25"/>
+          <p:cNvCxnSpPr/>
+          <p:nvPr/>
+        </p:nvCxnSpPr>
+        <p:spPr>
+          <a:xfrm>
+            <a:off x="1453896" y="1847088"/>
+            <a:ext cx="9607522" cy="0"/>
+          </a:xfrm>
+          <a:prstGeom prst="line">
+            <a:avLst/>
+          </a:prstGeom>
+          <a:ln w="31750"/>
+        </p:spPr>
+        <p:style>
+          <a:lnRef idx="3">
+            <a:schemeClr val="accent1"/>
+          </a:lnRef>
+          <a:fillRef idx="0">
+            <a:schemeClr val="accent1"/>
+          </a:fillRef>
+          <a:effectRef idx="2">
+            <a:schemeClr val="accent1"/>
+          </a:effectRef>
+          <a:fontRef idx="minor">
+            <a:schemeClr val="tx1"/>
+          </a:fontRef>
+        </p:style>
+      </p:cxnSp>
     </p:spTree>
     <p:extLst>
       <p:ext uri="{BB962C8B-B14F-4D97-AF65-F5344CB8AC3E}">
-        <p14:creationId xmlns:p14="http://schemas.microsoft.com/office/powerpoint/2010/main" val="1024015226"/>
+        <p14:creationId xmlns:p14="http://schemas.microsoft.com/office/powerpoint/2010/main" val="1684051850"/>
       </p:ext>
     </p:extLst>
   </p:cSld>
@@ -555,13 +579,7 @@
       </p:grpSpPr>
       <p:sp>
         <p:nvSpPr>
-          <p:cNvPr id="2" name="Vertical Title 1">
-            <a:extLst>
-              <a:ext uri="{FF2B5EF4-FFF2-40B4-BE49-F238E27FC236}">
-                <a16:creationId xmlns:a16="http://schemas.microsoft.com/office/drawing/2014/main" id="{CEB733AF-EA82-C37B-59F2-301962AC2C2E}"/>
-              </a:ext>
-            </a:extLst>
-          </p:cNvPr>
+          <p:cNvPr id="2" name="Vertical Title 1"/>
           <p:cNvSpPr>
             <a:spLocks noGrp="1"/>
           </p:cNvSpPr>
@@ -571,30 +589,29 @@
         </p:nvSpPr>
         <p:spPr>
           <a:xfrm>
-            <a:off x="8724900" y="365125"/>
-            <a:ext cx="2628900" cy="5811838"/>
+            <a:off x="9439111" y="798973"/>
+            <a:ext cx="1615742" cy="4659889"/>
           </a:xfrm>
         </p:spPr>
         <p:txBody>
           <a:bodyPr vert="eaVert"/>
-          <a:lstStyle/>
+          <a:lstStyle>
+            <a:lvl1pPr algn="l">
+              <a:defRPr/>
+            </a:lvl1pPr>
+          </a:lstStyle>
           <a:p>
             <a:r>
               <a:rPr lang="en-US"/>
               <a:t>Click to edit Master title style</a:t>
             </a:r>
-          </a:p>
-        </p:txBody>
-      </p:sp>
-      <p:sp>
-        <p:nvSpPr>
-          <p:cNvPr id="3" name="Vertical Text Placeholder 2">
-            <a:extLst>
-              <a:ext uri="{FF2B5EF4-FFF2-40B4-BE49-F238E27FC236}">
-                <a16:creationId xmlns:a16="http://schemas.microsoft.com/office/drawing/2014/main" id="{505E8E32-4C1D-F7B0-2CD7-D51C088BC28D}"/>
-              </a:ext>
-            </a:extLst>
-          </p:cNvPr>
+            <a:endParaRPr lang="en-US" dirty="0"/>
+          </a:p>
+        </p:txBody>
+      </p:sp>
+      <p:sp>
+        <p:nvSpPr>
+          <p:cNvPr id="3" name="Vertical Text Placeholder 2"/>
           <p:cNvSpPr>
             <a:spLocks noGrp="1"/>
           </p:cNvSpPr>
@@ -604,8 +621,8 @@
         </p:nvSpPr>
         <p:spPr>
           <a:xfrm>
-            <a:off x="838200" y="365125"/>
-            <a:ext cx="7734300" cy="5811838"/>
+            <a:off x="1444672" y="798973"/>
+            <a:ext cx="7828830" cy="4659889"/>
           </a:xfrm>
         </p:spPr>
         <p:txBody>
@@ -645,18 +662,13 @@
               <a:rPr lang="en-US"/>
               <a:t>Fifth level</a:t>
             </a:r>
-          </a:p>
-        </p:txBody>
-      </p:sp>
-      <p:sp>
-        <p:nvSpPr>
-          <p:cNvPr id="4" name="Date Placeholder 3">
-            <a:extLst>
-              <a:ext uri="{FF2B5EF4-FFF2-40B4-BE49-F238E27FC236}">
-                <a16:creationId xmlns:a16="http://schemas.microsoft.com/office/drawing/2014/main" id="{FD5BEDA3-ECCF-54CF-2680-69779B0098BE}"/>
-              </a:ext>
-            </a:extLst>
-          </p:cNvPr>
+            <a:endParaRPr lang="en-US" dirty="0"/>
+          </a:p>
+        </p:txBody>
+      </p:sp>
+      <p:sp>
+        <p:nvSpPr>
+          <p:cNvPr id="4" name="Date Placeholder 3"/>
           <p:cNvSpPr>
             <a:spLocks noGrp="1"/>
           </p:cNvSpPr>
@@ -669,7 +681,7 @@
           <a:bodyPr/>
           <a:lstStyle/>
           <a:p>
-            <a:fld id="{DE210632-9A01-4467-ACBB-4774DF0A0BAE}" type="datetimeFigureOut">
+            <a:fld id="{C823E295-28DF-4E71-9F53-D45207DE2860}" type="datetimeFigureOut">
               <a:rPr lang="en-US" smtClean="0"/>
               <a:t>5/20/2026</a:t>
             </a:fld>
@@ -679,13 +691,7 @@
       </p:sp>
       <p:sp>
         <p:nvSpPr>
-          <p:cNvPr id="5" name="Footer Placeholder 4">
-            <a:extLst>
-              <a:ext uri="{FF2B5EF4-FFF2-40B4-BE49-F238E27FC236}">
-                <a16:creationId xmlns:a16="http://schemas.microsoft.com/office/drawing/2014/main" id="{D62DD451-70B1-AD72-B2D2-09005847078F}"/>
-              </a:ext>
-            </a:extLst>
-          </p:cNvPr>
+          <p:cNvPr id="5" name="Footer Placeholder 4"/>
           <p:cNvSpPr>
             <a:spLocks noGrp="1"/>
           </p:cNvSpPr>
@@ -704,13 +710,7 @@
       </p:sp>
       <p:sp>
         <p:nvSpPr>
-          <p:cNvPr id="6" name="Slide Number Placeholder 5">
-            <a:extLst>
-              <a:ext uri="{FF2B5EF4-FFF2-40B4-BE49-F238E27FC236}">
-                <a16:creationId xmlns:a16="http://schemas.microsoft.com/office/drawing/2014/main" id="{5203ABAD-970D-0A83-E289-AD86279B16E2}"/>
-              </a:ext>
-            </a:extLst>
-          </p:cNvPr>
+          <p:cNvPr id="6" name="Slide Number Placeholder 5"/>
           <p:cNvSpPr>
             <a:spLocks noGrp="1"/>
           </p:cNvSpPr>
@@ -723,7 +723,7 @@
           <a:bodyPr/>
           <a:lstStyle/>
           <a:p>
-            <a:fld id="{BA1408D6-A18F-4DEF-8108-D3F1A5E4F663}" type="slidenum">
+            <a:fld id="{41970ED4-46CD-4B2B-B2B3-745DA35D2A58}" type="slidenum">
               <a:rPr lang="en-US" smtClean="0"/>
               <a:t>‹#›</a:t>
             </a:fld>
@@ -731,10 +731,41 @@
           </a:p>
         </p:txBody>
       </p:sp>
+      <p:cxnSp>
+        <p:nvCxnSpPr>
+          <p:cNvPr id="15" name="Straight Connector 14"/>
+          <p:cNvCxnSpPr/>
+          <p:nvPr/>
+        </p:nvCxnSpPr>
+        <p:spPr>
+          <a:xfrm>
+            <a:off x="9439111" y="798973"/>
+            <a:ext cx="0" cy="4659889"/>
+          </a:xfrm>
+          <a:prstGeom prst="line">
+            <a:avLst/>
+          </a:prstGeom>
+          <a:ln w="31750"/>
+        </p:spPr>
+        <p:style>
+          <a:lnRef idx="3">
+            <a:schemeClr val="accent1"/>
+          </a:lnRef>
+          <a:fillRef idx="0">
+            <a:schemeClr val="accent1"/>
+          </a:fillRef>
+          <a:effectRef idx="2">
+            <a:schemeClr val="accent1"/>
+          </a:effectRef>
+          <a:fontRef idx="minor">
+            <a:schemeClr val="tx1"/>
+          </a:fontRef>
+        </p:style>
+      </p:cxnSp>
     </p:spTree>
     <p:extLst>
       <p:ext uri="{BB962C8B-B14F-4D97-AF65-F5344CB8AC3E}">
-        <p14:creationId xmlns:p14="http://schemas.microsoft.com/office/powerpoint/2010/main" val="1068496805"/>
+        <p14:creationId xmlns:p14="http://schemas.microsoft.com/office/powerpoint/2010/main" val="4181230017"/>
       </p:ext>
     </p:extLst>
   </p:cSld>
@@ -745,7 +776,7 @@
 </file>
 
 <file path=ppt/slideLayouts/slideLayout12.xml><?xml version="1.0" encoding="utf-8"?>
-<p:sldLayout xmlns:a="http://schemas.openxmlformats.org/drawingml/2006/main" xmlns:r="http://schemas.openxmlformats.org/officeDocument/2006/relationships" xmlns:p="http://schemas.openxmlformats.org/presentationml/2006/main" type="tx" preserve="1">
+<p:sldLayout xmlns:a="http://schemas.openxmlformats.org/drawingml/2006/main" xmlns:r="http://schemas.openxmlformats.org/officeDocument/2006/relationships" xmlns:p="http://schemas.openxmlformats.org/presentationml/2006/main" type="tx">
   <p:cSld name="Title and Text">
     <p:spTree>
       <p:nvGrpSpPr>
@@ -766,7 +797,7 @@
           <p:cNvPr id="2" name="Title 1">
             <a:extLst>
               <a:ext uri="{FF2B5EF4-FFF2-40B4-BE49-F238E27FC236}">
-                <a16:creationId xmlns:a16="http://schemas.microsoft.com/office/drawing/2014/main" id="{237D3AFC-3BB3-0A45-5E62-3AEC25589137}"/>
+                <a16:creationId xmlns:a16="http://schemas.microsoft.com/office/drawing/2014/main" id="{D646E1F5-79C2-1397-5AC3-9CA0DC2E35BF}"/>
               </a:ext>
             </a:extLst>
           </p:cNvPr>
@@ -794,7 +825,7 @@
           <p:cNvPr id="3" name="Text Placeholder 2">
             <a:extLst>
               <a:ext uri="{FF2B5EF4-FFF2-40B4-BE49-F238E27FC236}">
-                <a16:creationId xmlns:a16="http://schemas.microsoft.com/office/drawing/2014/main" id="{D7F9EF71-D0FE-0409-5780-662EA7F7BF71}"/>
+                <a16:creationId xmlns:a16="http://schemas.microsoft.com/office/drawing/2014/main" id="{8DD004FB-1EC6-CCAB-5BA5-4E6DE2ED634C}"/>
               </a:ext>
             </a:extLst>
           </p:cNvPr>
@@ -851,7 +882,7 @@
           <p:cNvPr id="4" name="Date Placeholder 3">
             <a:extLst>
               <a:ext uri="{FF2B5EF4-FFF2-40B4-BE49-F238E27FC236}">
-                <a16:creationId xmlns:a16="http://schemas.microsoft.com/office/drawing/2014/main" id="{A993EFD3-0959-7804-9C38-8BBE899E65B9}"/>
+                <a16:creationId xmlns:a16="http://schemas.microsoft.com/office/drawing/2014/main" id="{695EF50D-7F40-AD55-33CB-22CCFD12872E}"/>
               </a:ext>
             </a:extLst>
           </p:cNvPr>
@@ -867,7 +898,7 @@
           <a:bodyPr/>
           <a:lstStyle/>
           <a:p>
-            <a:fld id="{DE210632-9A01-4467-ACBB-4774DF0A0BAE}" type="datetimeFigureOut">
+            <a:fld id="{C823E295-28DF-4E71-9F53-D45207DE2860}" type="datetimeFigureOut">
               <a:rPr lang="en-US" smtClean="0"/>
               <a:t>5/20/2026</a:t>
             </a:fld>
@@ -880,7 +911,7 @@
           <p:cNvPr id="5" name="Footer Placeholder 4">
             <a:extLst>
               <a:ext uri="{FF2B5EF4-FFF2-40B4-BE49-F238E27FC236}">
-                <a16:creationId xmlns:a16="http://schemas.microsoft.com/office/drawing/2014/main" id="{BA09FAD9-B459-9A70-F0B3-68BF79412C18}"/>
+                <a16:creationId xmlns:a16="http://schemas.microsoft.com/office/drawing/2014/main" id="{FA4BC1E9-62CB-4DC0-86AE-749DC3196E81}"/>
               </a:ext>
             </a:extLst>
           </p:cNvPr>
@@ -905,7 +936,7 @@
           <p:cNvPr id="6" name="Slide Number Placeholder 5">
             <a:extLst>
               <a:ext uri="{FF2B5EF4-FFF2-40B4-BE49-F238E27FC236}">
-                <a16:creationId xmlns:a16="http://schemas.microsoft.com/office/drawing/2014/main" id="{41BE94B9-3D53-0E03-8E4E-FD0857AC2CD4}"/>
+                <a16:creationId xmlns:a16="http://schemas.microsoft.com/office/drawing/2014/main" id="{9A5B9062-3D47-5E9D-549A-54AFC2E9C4E0}"/>
               </a:ext>
             </a:extLst>
           </p:cNvPr>
@@ -921,7 +952,7 @@
           <a:bodyPr/>
           <a:lstStyle/>
           <a:p>
-            <a:fld id="{BA1408D6-A18F-4DEF-8108-D3F1A5E4F663}" type="slidenum">
+            <a:fld id="{41970ED4-46CD-4B2B-B2B3-745DA35D2A58}" type="slidenum">
               <a:rPr lang="en-US" smtClean="0"/>
               <a:t>‹#›</a:t>
             </a:fld>
@@ -932,7 +963,7 @@
     </p:spTree>
     <p:extLst>
       <p:ext uri="{BB962C8B-B14F-4D97-AF65-F5344CB8AC3E}">
-        <p14:creationId xmlns:p14="http://schemas.microsoft.com/office/powerpoint/2010/main" val="2618174750"/>
+        <p14:creationId xmlns:p14="http://schemas.microsoft.com/office/powerpoint/2010/main" val="1771616902"/>
       </p:ext>
     </p:extLst>
   </p:cSld>
@@ -961,13 +992,7 @@
       </p:grpSpPr>
       <p:sp>
         <p:nvSpPr>
-          <p:cNvPr id="2" name="Title 1">
-            <a:extLst>
-              <a:ext uri="{FF2B5EF4-FFF2-40B4-BE49-F238E27FC236}">
-                <a16:creationId xmlns:a16="http://schemas.microsoft.com/office/drawing/2014/main" id="{89796CA6-41F0-55D9-C5F4-8730F30C65FA}"/>
-              </a:ext>
-            </a:extLst>
-          </p:cNvPr>
+          <p:cNvPr id="2" name="Title 1"/>
           <p:cNvSpPr>
             <a:spLocks noGrp="1"/>
           </p:cNvSpPr>
@@ -984,18 +1009,13 @@
               <a:rPr lang="en-US"/>
               <a:t>Click to edit Master title style</a:t>
             </a:r>
-          </a:p>
-        </p:txBody>
-      </p:sp>
-      <p:sp>
-        <p:nvSpPr>
-          <p:cNvPr id="3" name="Content Placeholder 2">
-            <a:extLst>
-              <a:ext uri="{FF2B5EF4-FFF2-40B4-BE49-F238E27FC236}">
-                <a16:creationId xmlns:a16="http://schemas.microsoft.com/office/drawing/2014/main" id="{B1DBC767-4A44-17C3-9B26-6D3AC654B8D1}"/>
-              </a:ext>
-            </a:extLst>
-          </p:cNvPr>
+            <a:endParaRPr lang="en-US" dirty="0"/>
+          </a:p>
+        </p:txBody>
+      </p:sp>
+      <p:sp>
+        <p:nvSpPr>
+          <p:cNvPr id="3" name="Content Placeholder 2"/>
           <p:cNvSpPr>
             <a:spLocks noGrp="1"/>
           </p:cNvSpPr>
@@ -1005,7 +1025,7 @@
         </p:nvSpPr>
         <p:spPr/>
         <p:txBody>
-          <a:bodyPr/>
+          <a:bodyPr anchor="t"/>
           <a:lstStyle/>
           <a:p>
             <a:pPr lvl="0"/>
@@ -1041,18 +1061,13 @@
               <a:rPr lang="en-US"/>
               <a:t>Fifth level</a:t>
             </a:r>
-          </a:p>
-        </p:txBody>
-      </p:sp>
-      <p:sp>
-        <p:nvSpPr>
-          <p:cNvPr id="4" name="Date Placeholder 3">
-            <a:extLst>
-              <a:ext uri="{FF2B5EF4-FFF2-40B4-BE49-F238E27FC236}">
-                <a16:creationId xmlns:a16="http://schemas.microsoft.com/office/drawing/2014/main" id="{0F10CA87-AA7B-5BB5-A622-B3744BEF8EB8}"/>
-              </a:ext>
-            </a:extLst>
-          </p:cNvPr>
+            <a:endParaRPr lang="en-US" dirty="0"/>
+          </a:p>
+        </p:txBody>
+      </p:sp>
+      <p:sp>
+        <p:nvSpPr>
+          <p:cNvPr id="4" name="Date Placeholder 3"/>
           <p:cNvSpPr>
             <a:spLocks noGrp="1"/>
           </p:cNvSpPr>
@@ -1065,7 +1080,7 @@
           <a:bodyPr/>
           <a:lstStyle/>
           <a:p>
-            <a:fld id="{DE210632-9A01-4467-ACBB-4774DF0A0BAE}" type="datetimeFigureOut">
+            <a:fld id="{C823E295-28DF-4E71-9F53-D45207DE2860}" type="datetimeFigureOut">
               <a:rPr lang="en-US" smtClean="0"/>
               <a:t>5/20/2026</a:t>
             </a:fld>
@@ -1075,13 +1090,7 @@
       </p:sp>
       <p:sp>
         <p:nvSpPr>
-          <p:cNvPr id="5" name="Footer Placeholder 4">
-            <a:extLst>
-              <a:ext uri="{FF2B5EF4-FFF2-40B4-BE49-F238E27FC236}">
-                <a16:creationId xmlns:a16="http://schemas.microsoft.com/office/drawing/2014/main" id="{55426443-6266-3E90-0C8D-8A073752C5B7}"/>
-              </a:ext>
-            </a:extLst>
-          </p:cNvPr>
+          <p:cNvPr id="5" name="Footer Placeholder 4"/>
           <p:cNvSpPr>
             <a:spLocks noGrp="1"/>
           </p:cNvSpPr>
@@ -1100,13 +1109,7 @@
       </p:sp>
       <p:sp>
         <p:nvSpPr>
-          <p:cNvPr id="6" name="Slide Number Placeholder 5">
-            <a:extLst>
-              <a:ext uri="{FF2B5EF4-FFF2-40B4-BE49-F238E27FC236}">
-                <a16:creationId xmlns:a16="http://schemas.microsoft.com/office/drawing/2014/main" id="{B99B5794-4816-8AD9-BC77-AA9E254189A3}"/>
-              </a:ext>
-            </a:extLst>
-          </p:cNvPr>
+          <p:cNvPr id="6" name="Slide Number Placeholder 5"/>
           <p:cNvSpPr>
             <a:spLocks noGrp="1"/>
           </p:cNvSpPr>
@@ -1119,7 +1122,7 @@
           <a:bodyPr/>
           <a:lstStyle/>
           <a:p>
-            <a:fld id="{BA1408D6-A18F-4DEF-8108-D3F1A5E4F663}" type="slidenum">
+            <a:fld id="{41970ED4-46CD-4B2B-B2B3-745DA35D2A58}" type="slidenum">
               <a:rPr lang="en-US" smtClean="0"/>
               <a:t>‹#›</a:t>
             </a:fld>
@@ -1127,10 +1130,41 @@
           </a:p>
         </p:txBody>
       </p:sp>
+      <p:cxnSp>
+        <p:nvCxnSpPr>
+          <p:cNvPr id="33" name="Straight Connector 32"/>
+          <p:cNvCxnSpPr/>
+          <p:nvPr/>
+        </p:nvCxnSpPr>
+        <p:spPr>
+          <a:xfrm>
+            <a:off x="1453896" y="1847088"/>
+            <a:ext cx="9607522" cy="0"/>
+          </a:xfrm>
+          <a:prstGeom prst="line">
+            <a:avLst/>
+          </a:prstGeom>
+          <a:ln w="31750"/>
+        </p:spPr>
+        <p:style>
+          <a:lnRef idx="3">
+            <a:schemeClr val="accent1"/>
+          </a:lnRef>
+          <a:fillRef idx="0">
+            <a:schemeClr val="accent1"/>
+          </a:fillRef>
+          <a:effectRef idx="2">
+            <a:schemeClr val="accent1"/>
+          </a:effectRef>
+          <a:fontRef idx="minor">
+            <a:schemeClr val="tx1"/>
+          </a:fontRef>
+        </p:style>
+      </p:cxnSp>
     </p:spTree>
     <p:extLst>
       <p:ext uri="{BB962C8B-B14F-4D97-AF65-F5344CB8AC3E}">
-        <p14:creationId xmlns:p14="http://schemas.microsoft.com/office/powerpoint/2010/main" val="1859989733"/>
+        <p14:creationId xmlns:p14="http://schemas.microsoft.com/office/powerpoint/2010/main" val="652335682"/>
       </p:ext>
     </p:extLst>
   </p:cSld>
@@ -1159,13 +1193,7 @@
       </p:grpSpPr>
       <p:sp>
         <p:nvSpPr>
-          <p:cNvPr id="2" name="Title 1">
-            <a:extLst>
-              <a:ext uri="{FF2B5EF4-FFF2-40B4-BE49-F238E27FC236}">
-                <a16:creationId xmlns:a16="http://schemas.microsoft.com/office/drawing/2014/main" id="{9CFCFB9F-9423-7A27-8A73-1DC8631EAC58}"/>
-              </a:ext>
-            </a:extLst>
-          </p:cNvPr>
+          <p:cNvPr id="2" name="Title 1"/>
           <p:cNvSpPr>
             <a:spLocks noGrp="1"/>
           </p:cNvSpPr>
@@ -1175,15 +1203,17 @@
         </p:nvSpPr>
         <p:spPr>
           <a:xfrm>
-            <a:off x="831850" y="1709738"/>
-            <a:ext cx="10515600" cy="2852737"/>
+            <a:off x="1454239" y="1756130"/>
+            <a:ext cx="8643154" cy="1887950"/>
           </a:xfrm>
         </p:spPr>
         <p:txBody>
-          <a:bodyPr anchor="b"/>
+          <a:bodyPr anchor="b">
+            <a:normAutofit/>
+          </a:bodyPr>
           <a:lstStyle>
-            <a:lvl1pPr>
-              <a:defRPr sz="6000"/>
+            <a:lvl1pPr algn="l">
+              <a:defRPr sz="3600"/>
             </a:lvl1pPr>
           </a:lstStyle>
           <a:p>
@@ -1191,18 +1221,13 @@
               <a:rPr lang="en-US"/>
               <a:t>Click to edit Master title style</a:t>
             </a:r>
-          </a:p>
-        </p:txBody>
-      </p:sp>
-      <p:sp>
-        <p:nvSpPr>
-          <p:cNvPr id="3" name="Text Placeholder 2">
-            <a:extLst>
-              <a:ext uri="{FF2B5EF4-FFF2-40B4-BE49-F238E27FC236}">
-                <a16:creationId xmlns:a16="http://schemas.microsoft.com/office/drawing/2014/main" id="{1D73789F-5C68-4586-788A-7F4AB6AF0F6C}"/>
-              </a:ext>
-            </a:extLst>
-          </p:cNvPr>
+            <a:endParaRPr lang="en-US" dirty="0"/>
+          </a:p>
+        </p:txBody>
+      </p:sp>
+      <p:sp>
+        <p:nvSpPr>
+          <p:cNvPr id="3" name="Text Placeholder 2"/>
           <p:cNvSpPr>
             <a:spLocks noGrp="1"/>
           </p:cNvSpPr>
@@ -1212,29 +1237,29 @@
         </p:nvSpPr>
         <p:spPr>
           <a:xfrm>
-            <a:off x="831850" y="4589463"/>
-            <a:ext cx="10515600" cy="1500187"/>
+            <a:off x="1454239" y="3806195"/>
+            <a:ext cx="8630446" cy="1012929"/>
           </a:xfrm>
         </p:spPr>
         <p:txBody>
-          <a:bodyPr/>
+          <a:bodyPr tIns="91440">
+            <a:normAutofit/>
+          </a:bodyPr>
           <a:lstStyle>
-            <a:lvl1pPr marL="0" indent="0">
+            <a:lvl1pPr marL="0" indent="0" algn="l">
               <a:buNone/>
-              <a:defRPr sz="2400">
+              <a:defRPr sz="1800">
                 <a:solidFill>
-                  <a:schemeClr val="tx1">
-                    <a:tint val="82000"/>
-                  </a:schemeClr>
+                  <a:schemeClr val="tx1"/>
                 </a:solidFill>
               </a:defRPr>
             </a:lvl1pPr>
             <a:lvl2pPr marL="457200" indent="0">
               <a:buNone/>
-              <a:defRPr sz="2000">
+              <a:defRPr sz="1800">
                 <a:solidFill>
                   <a:schemeClr val="tx1">
-                    <a:tint val="82000"/>
+                    <a:tint val="75000"/>
                   </a:schemeClr>
                 </a:solidFill>
               </a:defRPr>
@@ -1244,7 +1269,7 @@
               <a:defRPr sz="1800">
                 <a:solidFill>
                   <a:schemeClr val="tx1">
-                    <a:tint val="82000"/>
+                    <a:tint val="75000"/>
                   </a:schemeClr>
                 </a:solidFill>
               </a:defRPr>
@@ -1254,7 +1279,7 @@
               <a:defRPr sz="1600">
                 <a:solidFill>
                   <a:schemeClr val="tx1">
-                    <a:tint val="82000"/>
+                    <a:tint val="75000"/>
                   </a:schemeClr>
                 </a:solidFill>
               </a:defRPr>
@@ -1264,7 +1289,7 @@
               <a:defRPr sz="1600">
                 <a:solidFill>
                   <a:schemeClr val="tx1">
-                    <a:tint val="82000"/>
+                    <a:tint val="75000"/>
                   </a:schemeClr>
                 </a:solidFill>
               </a:defRPr>
@@ -1274,7 +1299,7 @@
               <a:defRPr sz="1600">
                 <a:solidFill>
                   <a:schemeClr val="tx1">
-                    <a:tint val="82000"/>
+                    <a:tint val="75000"/>
                   </a:schemeClr>
                 </a:solidFill>
               </a:defRPr>
@@ -1284,7 +1309,7 @@
               <a:defRPr sz="1600">
                 <a:solidFill>
                   <a:schemeClr val="tx1">
-                    <a:tint val="82000"/>
+                    <a:tint val="75000"/>
                   </a:schemeClr>
                 </a:solidFill>
               </a:defRPr>
@@ -1294,7 +1319,7 @@
               <a:defRPr sz="1600">
                 <a:solidFill>
                   <a:schemeClr val="tx1">
-                    <a:tint val="82000"/>
+                    <a:tint val="75000"/>
                   </a:schemeClr>
                 </a:solidFill>
               </a:defRPr>
@@ -1304,7 +1329,7 @@
               <a:defRPr sz="1600">
                 <a:solidFill>
                   <a:schemeClr val="tx1">
-                    <a:tint val="82000"/>
+                    <a:tint val="75000"/>
                   </a:schemeClr>
                 </a:solidFill>
               </a:defRPr>
@@ -1321,13 +1346,7 @@
       </p:sp>
       <p:sp>
         <p:nvSpPr>
-          <p:cNvPr id="4" name="Date Placeholder 3">
-            <a:extLst>
-              <a:ext uri="{FF2B5EF4-FFF2-40B4-BE49-F238E27FC236}">
-                <a16:creationId xmlns:a16="http://schemas.microsoft.com/office/drawing/2014/main" id="{068A5602-C53F-D7A7-2BC4-F817BBDE3CD1}"/>
-              </a:ext>
-            </a:extLst>
-          </p:cNvPr>
+          <p:cNvPr id="4" name="Date Placeholder 3"/>
           <p:cNvSpPr>
             <a:spLocks noGrp="1"/>
           </p:cNvSpPr>
@@ -1340,7 +1359,7 @@
           <a:bodyPr/>
           <a:lstStyle/>
           <a:p>
-            <a:fld id="{DE210632-9A01-4467-ACBB-4774DF0A0BAE}" type="datetimeFigureOut">
+            <a:fld id="{C823E295-28DF-4E71-9F53-D45207DE2860}" type="datetimeFigureOut">
               <a:rPr lang="en-US" smtClean="0"/>
               <a:t>5/20/2026</a:t>
             </a:fld>
@@ -1350,13 +1369,7 @@
       </p:sp>
       <p:sp>
         <p:nvSpPr>
-          <p:cNvPr id="5" name="Footer Placeholder 4">
-            <a:extLst>
-              <a:ext uri="{FF2B5EF4-FFF2-40B4-BE49-F238E27FC236}">
-                <a16:creationId xmlns:a16="http://schemas.microsoft.com/office/drawing/2014/main" id="{D535731F-A6E7-E74E-3A39-8E4B8DEFBF52}"/>
-              </a:ext>
-            </a:extLst>
-          </p:cNvPr>
+          <p:cNvPr id="5" name="Footer Placeholder 4"/>
           <p:cNvSpPr>
             <a:spLocks noGrp="1"/>
           </p:cNvSpPr>
@@ -1375,13 +1388,7 @@
       </p:sp>
       <p:sp>
         <p:nvSpPr>
-          <p:cNvPr id="6" name="Slide Number Placeholder 5">
-            <a:extLst>
-              <a:ext uri="{FF2B5EF4-FFF2-40B4-BE49-F238E27FC236}">
-                <a16:creationId xmlns:a16="http://schemas.microsoft.com/office/drawing/2014/main" id="{BEB5B282-B7B5-73F1-70DD-06D99EE4E696}"/>
-              </a:ext>
-            </a:extLst>
-          </p:cNvPr>
+          <p:cNvPr id="6" name="Slide Number Placeholder 5"/>
           <p:cNvSpPr>
             <a:spLocks noGrp="1"/>
           </p:cNvSpPr>
@@ -1394,7 +1401,7 @@
           <a:bodyPr/>
           <a:lstStyle/>
           <a:p>
-            <a:fld id="{BA1408D6-A18F-4DEF-8108-D3F1A5E4F663}" type="slidenum">
+            <a:fld id="{41970ED4-46CD-4B2B-B2B3-745DA35D2A58}" type="slidenum">
               <a:rPr lang="en-US" smtClean="0"/>
               <a:t>‹#›</a:t>
             </a:fld>
@@ -1402,10 +1409,41 @@
           </a:p>
         </p:txBody>
       </p:sp>
+      <p:cxnSp>
+        <p:nvCxnSpPr>
+          <p:cNvPr id="15" name="Straight Connector 14"/>
+          <p:cNvCxnSpPr/>
+          <p:nvPr/>
+        </p:nvCxnSpPr>
+        <p:spPr>
+          <a:xfrm>
+            <a:off x="1454239" y="3804985"/>
+            <a:ext cx="8630446" cy="0"/>
+          </a:xfrm>
+          <a:prstGeom prst="line">
+            <a:avLst/>
+          </a:prstGeom>
+          <a:ln w="31750"/>
+        </p:spPr>
+        <p:style>
+          <a:lnRef idx="3">
+            <a:schemeClr val="accent1"/>
+          </a:lnRef>
+          <a:fillRef idx="0">
+            <a:schemeClr val="accent1"/>
+          </a:fillRef>
+          <a:effectRef idx="2">
+            <a:schemeClr val="accent1"/>
+          </a:effectRef>
+          <a:fontRef idx="minor">
+            <a:schemeClr val="tx1"/>
+          </a:fontRef>
+        </p:style>
+      </p:cxnSp>
     </p:spTree>
     <p:extLst>
       <p:ext uri="{BB962C8B-B14F-4D97-AF65-F5344CB8AC3E}">
-        <p14:creationId xmlns:p14="http://schemas.microsoft.com/office/powerpoint/2010/main" val="1653431957"/>
+        <p14:creationId xmlns:p14="http://schemas.microsoft.com/office/powerpoint/2010/main" val="4238145174"/>
       </p:ext>
     </p:extLst>
   </p:cSld>
@@ -1434,13 +1472,7 @@
       </p:grpSpPr>
       <p:sp>
         <p:nvSpPr>
-          <p:cNvPr id="2" name="Title 1">
-            <a:extLst>
-              <a:ext uri="{FF2B5EF4-FFF2-40B4-BE49-F238E27FC236}">
-                <a16:creationId xmlns:a16="http://schemas.microsoft.com/office/drawing/2014/main" id="{E03F9052-F53C-7889-DA0B-2481F2A02ED7}"/>
-              </a:ext>
-            </a:extLst>
-          </p:cNvPr>
+          <p:cNvPr id="2" name="Title 1"/>
           <p:cNvSpPr>
             <a:spLocks noGrp="1"/>
           </p:cNvSpPr>
@@ -1448,7 +1480,12 @@
             <p:ph type="title"/>
           </p:nvPr>
         </p:nvSpPr>
-        <p:spPr/>
+        <p:spPr>
+          <a:xfrm>
+            <a:off x="1449217" y="804889"/>
+            <a:ext cx="9605635" cy="1059305"/>
+          </a:xfrm>
+        </p:spPr>
         <p:txBody>
           <a:bodyPr/>
           <a:lstStyle/>
@@ -1457,18 +1494,13 @@
               <a:rPr lang="en-US"/>
               <a:t>Click to edit Master title style</a:t>
             </a:r>
-          </a:p>
-        </p:txBody>
-      </p:sp>
-      <p:sp>
-        <p:nvSpPr>
-          <p:cNvPr id="3" name="Content Placeholder 2">
-            <a:extLst>
-              <a:ext uri="{FF2B5EF4-FFF2-40B4-BE49-F238E27FC236}">
-                <a16:creationId xmlns:a16="http://schemas.microsoft.com/office/drawing/2014/main" id="{3D400276-D16F-A274-A96F-F0AFBDAE16AE}"/>
-              </a:ext>
-            </a:extLst>
-          </p:cNvPr>
+            <a:endParaRPr lang="en-US" dirty="0"/>
+          </a:p>
+        </p:txBody>
+      </p:sp>
+      <p:sp>
+        <p:nvSpPr>
+          <p:cNvPr id="3" name="Content Placeholder 2"/>
           <p:cNvSpPr>
             <a:spLocks noGrp="1"/>
           </p:cNvSpPr>
@@ -1478,8 +1510,8 @@
         </p:nvSpPr>
         <p:spPr>
           <a:xfrm>
-            <a:off x="838200" y="1825625"/>
-            <a:ext cx="5181600" cy="4351338"/>
+            <a:off x="1447331" y="2010878"/>
+            <a:ext cx="4645152" cy="3448595"/>
           </a:xfrm>
         </p:spPr>
         <p:txBody>
@@ -1519,18 +1551,13 @@
               <a:rPr lang="en-US"/>
               <a:t>Fifth level</a:t>
             </a:r>
-          </a:p>
-        </p:txBody>
-      </p:sp>
-      <p:sp>
-        <p:nvSpPr>
-          <p:cNvPr id="4" name="Content Placeholder 3">
-            <a:extLst>
-              <a:ext uri="{FF2B5EF4-FFF2-40B4-BE49-F238E27FC236}">
-                <a16:creationId xmlns:a16="http://schemas.microsoft.com/office/drawing/2014/main" id="{836E390D-49AE-DAC2-FDF5-2772506CC2A5}"/>
-              </a:ext>
-            </a:extLst>
-          </p:cNvPr>
+            <a:endParaRPr lang="en-US" dirty="0"/>
+          </a:p>
+        </p:txBody>
+      </p:sp>
+      <p:sp>
+        <p:nvSpPr>
+          <p:cNvPr id="4" name="Content Placeholder 3"/>
           <p:cNvSpPr>
             <a:spLocks noGrp="1"/>
           </p:cNvSpPr>
@@ -1540,8 +1567,8 @@
         </p:nvSpPr>
         <p:spPr>
           <a:xfrm>
-            <a:off x="6172200" y="1825625"/>
-            <a:ext cx="5181600" cy="4351338"/>
+            <a:off x="6413771" y="2017343"/>
+            <a:ext cx="4645152" cy="3441520"/>
           </a:xfrm>
         </p:spPr>
         <p:txBody>
@@ -1581,18 +1608,13 @@
               <a:rPr lang="en-US"/>
               <a:t>Fifth level</a:t>
             </a:r>
-          </a:p>
-        </p:txBody>
-      </p:sp>
-      <p:sp>
-        <p:nvSpPr>
-          <p:cNvPr id="5" name="Date Placeholder 4">
-            <a:extLst>
-              <a:ext uri="{FF2B5EF4-FFF2-40B4-BE49-F238E27FC236}">
-                <a16:creationId xmlns:a16="http://schemas.microsoft.com/office/drawing/2014/main" id="{EC788E07-95D8-5B0B-68D5-500B704109DE}"/>
-              </a:ext>
-            </a:extLst>
-          </p:cNvPr>
+            <a:endParaRPr lang="en-US" dirty="0"/>
+          </a:p>
+        </p:txBody>
+      </p:sp>
+      <p:sp>
+        <p:nvSpPr>
+          <p:cNvPr id="5" name="Date Placeholder 4"/>
           <p:cNvSpPr>
             <a:spLocks noGrp="1"/>
           </p:cNvSpPr>
@@ -1605,7 +1627,7 @@
           <a:bodyPr/>
           <a:lstStyle/>
           <a:p>
-            <a:fld id="{DE210632-9A01-4467-ACBB-4774DF0A0BAE}" type="datetimeFigureOut">
+            <a:fld id="{C823E295-28DF-4E71-9F53-D45207DE2860}" type="datetimeFigureOut">
               <a:rPr lang="en-US" smtClean="0"/>
               <a:t>5/20/2026</a:t>
             </a:fld>
@@ -1615,13 +1637,7 @@
       </p:sp>
       <p:sp>
         <p:nvSpPr>
-          <p:cNvPr id="6" name="Footer Placeholder 5">
-            <a:extLst>
-              <a:ext uri="{FF2B5EF4-FFF2-40B4-BE49-F238E27FC236}">
-                <a16:creationId xmlns:a16="http://schemas.microsoft.com/office/drawing/2014/main" id="{EED7BD0C-FE67-977F-7325-4FE9EA44D457}"/>
-              </a:ext>
-            </a:extLst>
-          </p:cNvPr>
+          <p:cNvPr id="6" name="Footer Placeholder 5"/>
           <p:cNvSpPr>
             <a:spLocks noGrp="1"/>
           </p:cNvSpPr>
@@ -1640,13 +1656,7 @@
       </p:sp>
       <p:sp>
         <p:nvSpPr>
-          <p:cNvPr id="7" name="Slide Number Placeholder 6">
-            <a:extLst>
-              <a:ext uri="{FF2B5EF4-FFF2-40B4-BE49-F238E27FC236}">
-                <a16:creationId xmlns:a16="http://schemas.microsoft.com/office/drawing/2014/main" id="{B157E283-E78E-A7DD-EEB3-1C0CE905FCFA}"/>
-              </a:ext>
-            </a:extLst>
-          </p:cNvPr>
+          <p:cNvPr id="7" name="Slide Number Placeholder 6"/>
           <p:cNvSpPr>
             <a:spLocks noGrp="1"/>
           </p:cNvSpPr>
@@ -1659,7 +1669,7 @@
           <a:bodyPr/>
           <a:lstStyle/>
           <a:p>
-            <a:fld id="{BA1408D6-A18F-4DEF-8108-D3F1A5E4F663}" type="slidenum">
+            <a:fld id="{41970ED4-46CD-4B2B-B2B3-745DA35D2A58}" type="slidenum">
               <a:rPr lang="en-US" smtClean="0"/>
               <a:t>‹#›</a:t>
             </a:fld>
@@ -1667,10 +1677,41 @@
           </a:p>
         </p:txBody>
       </p:sp>
+      <p:cxnSp>
+        <p:nvCxnSpPr>
+          <p:cNvPr id="35" name="Straight Connector 34"/>
+          <p:cNvCxnSpPr/>
+          <p:nvPr/>
+        </p:nvCxnSpPr>
+        <p:spPr>
+          <a:xfrm>
+            <a:off x="1453896" y="1847088"/>
+            <a:ext cx="9607522" cy="0"/>
+          </a:xfrm>
+          <a:prstGeom prst="line">
+            <a:avLst/>
+          </a:prstGeom>
+          <a:ln w="31750"/>
+        </p:spPr>
+        <p:style>
+          <a:lnRef idx="3">
+            <a:schemeClr val="accent1"/>
+          </a:lnRef>
+          <a:fillRef idx="0">
+            <a:schemeClr val="accent1"/>
+          </a:fillRef>
+          <a:effectRef idx="2">
+            <a:schemeClr val="accent1"/>
+          </a:effectRef>
+          <a:fontRef idx="minor">
+            <a:schemeClr val="tx1"/>
+          </a:fontRef>
+        </p:style>
+      </p:cxnSp>
     </p:spTree>
     <p:extLst>
       <p:ext uri="{BB962C8B-B14F-4D97-AF65-F5344CB8AC3E}">
-        <p14:creationId xmlns:p14="http://schemas.microsoft.com/office/powerpoint/2010/main" val="120033610"/>
+        <p14:creationId xmlns:p14="http://schemas.microsoft.com/office/powerpoint/2010/main" val="2068119275"/>
       </p:ext>
     </p:extLst>
   </p:cSld>
@@ -1699,13 +1740,7 @@
       </p:grpSpPr>
       <p:sp>
         <p:nvSpPr>
-          <p:cNvPr id="2" name="Title 1">
-            <a:extLst>
-              <a:ext uri="{FF2B5EF4-FFF2-40B4-BE49-F238E27FC236}">
-                <a16:creationId xmlns:a16="http://schemas.microsoft.com/office/drawing/2014/main" id="{35E0C3CE-51FF-AE05-DDEF-E8F42015DFC0}"/>
-              </a:ext>
-            </a:extLst>
-          </p:cNvPr>
+          <p:cNvPr id="2" name="Title 1"/>
           <p:cNvSpPr>
             <a:spLocks noGrp="1"/>
           </p:cNvSpPr>
@@ -1715,8 +1750,8 @@
         </p:nvSpPr>
         <p:spPr>
           <a:xfrm>
-            <a:off x="839788" y="365125"/>
-            <a:ext cx="10515600" cy="1325563"/>
+            <a:off x="1447191" y="804163"/>
+            <a:ext cx="9607661" cy="1056319"/>
           </a:xfrm>
         </p:spPr>
         <p:txBody>
@@ -1727,18 +1762,13 @@
               <a:rPr lang="en-US"/>
               <a:t>Click to edit Master title style</a:t>
             </a:r>
-          </a:p>
-        </p:txBody>
-      </p:sp>
-      <p:sp>
-        <p:nvSpPr>
-          <p:cNvPr id="3" name="Text Placeholder 2">
-            <a:extLst>
-              <a:ext uri="{FF2B5EF4-FFF2-40B4-BE49-F238E27FC236}">
-                <a16:creationId xmlns:a16="http://schemas.microsoft.com/office/drawing/2014/main" id="{07B7696F-74B4-6DB2-64AE-5726F6978398}"/>
-              </a:ext>
-            </a:extLst>
-          </p:cNvPr>
+            <a:endParaRPr lang="en-US" dirty="0"/>
+          </a:p>
+        </p:txBody>
+      </p:sp>
+      <p:sp>
+        <p:nvSpPr>
+          <p:cNvPr id="3" name="Text Placeholder 2"/>
           <p:cNvSpPr>
             <a:spLocks noGrp="1"/>
           </p:cNvSpPr>
@@ -1748,16 +1778,25 @@
         </p:nvSpPr>
         <p:spPr>
           <a:xfrm>
-            <a:off x="839788" y="1681163"/>
-            <a:ext cx="5157787" cy="823912"/>
+            <a:off x="1447191" y="2019549"/>
+            <a:ext cx="4645152" cy="801943"/>
           </a:xfrm>
         </p:spPr>
         <p:txBody>
-          <a:bodyPr anchor="b"/>
+          <a:bodyPr anchor="b">
+            <a:normAutofit/>
+          </a:bodyPr>
           <a:lstStyle>
             <a:lvl1pPr marL="0" indent="0">
+              <a:lnSpc>
+                <a:spcPct val="100000"/>
+              </a:lnSpc>
               <a:buNone/>
-              <a:defRPr sz="2400" b="1"/>
+              <a:defRPr sz="2200" b="0" cap="all" baseline="0">
+                <a:solidFill>
+                  <a:schemeClr val="accent1"/>
+                </a:solidFill>
+              </a:defRPr>
             </a:lvl1pPr>
             <a:lvl2pPr marL="457200" indent="0">
               <a:buNone/>
@@ -1803,13 +1842,7 @@
       </p:sp>
       <p:sp>
         <p:nvSpPr>
-          <p:cNvPr id="4" name="Content Placeholder 3">
-            <a:extLst>
-              <a:ext uri="{FF2B5EF4-FFF2-40B4-BE49-F238E27FC236}">
-                <a16:creationId xmlns:a16="http://schemas.microsoft.com/office/drawing/2014/main" id="{0451848C-615E-046C-8266-07715430AD60}"/>
-              </a:ext>
-            </a:extLst>
-          </p:cNvPr>
+          <p:cNvPr id="4" name="Content Placeholder 3"/>
           <p:cNvSpPr>
             <a:spLocks noGrp="1"/>
           </p:cNvSpPr>
@@ -1819,8 +1852,8 @@
         </p:nvSpPr>
         <p:spPr>
           <a:xfrm>
-            <a:off x="839788" y="2505075"/>
-            <a:ext cx="5157787" cy="3684588"/>
+            <a:off x="1447191" y="2824269"/>
+            <a:ext cx="4645152" cy="2644457"/>
           </a:xfrm>
         </p:spPr>
         <p:txBody>
@@ -1860,18 +1893,13 @@
               <a:rPr lang="en-US"/>
               <a:t>Fifth level</a:t>
             </a:r>
-          </a:p>
-        </p:txBody>
-      </p:sp>
-      <p:sp>
-        <p:nvSpPr>
-          <p:cNvPr id="5" name="Text Placeholder 4">
-            <a:extLst>
-              <a:ext uri="{FF2B5EF4-FFF2-40B4-BE49-F238E27FC236}">
-                <a16:creationId xmlns:a16="http://schemas.microsoft.com/office/drawing/2014/main" id="{807CAA35-B17F-3BDD-65BE-00B19100F105}"/>
-              </a:ext>
-            </a:extLst>
-          </p:cNvPr>
+            <a:endParaRPr lang="en-US" dirty="0"/>
+          </a:p>
+        </p:txBody>
+      </p:sp>
+      <p:sp>
+        <p:nvSpPr>
+          <p:cNvPr id="5" name="Text Placeholder 4"/>
           <p:cNvSpPr>
             <a:spLocks noGrp="1"/>
           </p:cNvSpPr>
@@ -1881,16 +1909,25 @@
         </p:nvSpPr>
         <p:spPr>
           <a:xfrm>
-            <a:off x="6172200" y="1681163"/>
-            <a:ext cx="5183188" cy="823912"/>
+            <a:off x="6412362" y="2023003"/>
+            <a:ext cx="4645152" cy="802237"/>
           </a:xfrm>
         </p:spPr>
         <p:txBody>
-          <a:bodyPr anchor="b"/>
+          <a:bodyPr anchor="b">
+            <a:normAutofit/>
+          </a:bodyPr>
           <a:lstStyle>
             <a:lvl1pPr marL="0" indent="0">
+              <a:lnSpc>
+                <a:spcPct val="100000"/>
+              </a:lnSpc>
               <a:buNone/>
-              <a:defRPr sz="2400" b="1"/>
+              <a:defRPr sz="2200" b="0" cap="all" baseline="0">
+                <a:solidFill>
+                  <a:schemeClr val="accent1"/>
+                </a:solidFill>
+              </a:defRPr>
             </a:lvl1pPr>
             <a:lvl2pPr marL="457200" indent="0">
               <a:buNone/>
@@ -1936,13 +1973,7 @@
       </p:sp>
       <p:sp>
         <p:nvSpPr>
-          <p:cNvPr id="6" name="Content Placeholder 5">
-            <a:extLst>
-              <a:ext uri="{FF2B5EF4-FFF2-40B4-BE49-F238E27FC236}">
-                <a16:creationId xmlns:a16="http://schemas.microsoft.com/office/drawing/2014/main" id="{B6E24479-2B7C-097D-166A-DC52F6213497}"/>
-              </a:ext>
-            </a:extLst>
-          </p:cNvPr>
+          <p:cNvPr id="6" name="Content Placeholder 5"/>
           <p:cNvSpPr>
             <a:spLocks noGrp="1"/>
           </p:cNvSpPr>
@@ -1952,8 +1983,8 @@
         </p:nvSpPr>
         <p:spPr>
           <a:xfrm>
-            <a:off x="6172200" y="2505075"/>
-            <a:ext cx="5183188" cy="3684588"/>
+            <a:off x="6412362" y="2821491"/>
+            <a:ext cx="4645152" cy="2637371"/>
           </a:xfrm>
         </p:spPr>
         <p:txBody>
@@ -1993,18 +2024,13 @@
               <a:rPr lang="en-US"/>
               <a:t>Fifth level</a:t>
             </a:r>
-          </a:p>
-        </p:txBody>
-      </p:sp>
-      <p:sp>
-        <p:nvSpPr>
-          <p:cNvPr id="7" name="Date Placeholder 6">
-            <a:extLst>
-              <a:ext uri="{FF2B5EF4-FFF2-40B4-BE49-F238E27FC236}">
-                <a16:creationId xmlns:a16="http://schemas.microsoft.com/office/drawing/2014/main" id="{E1D7B130-CB00-6968-63D8-6B07FB2F2E66}"/>
-              </a:ext>
-            </a:extLst>
-          </p:cNvPr>
+            <a:endParaRPr lang="en-US" dirty="0"/>
+          </a:p>
+        </p:txBody>
+      </p:sp>
+      <p:sp>
+        <p:nvSpPr>
+          <p:cNvPr id="7" name="Date Placeholder 6"/>
           <p:cNvSpPr>
             <a:spLocks noGrp="1"/>
           </p:cNvSpPr>
@@ -2017,7 +2043,7 @@
           <a:bodyPr/>
           <a:lstStyle/>
           <a:p>
-            <a:fld id="{DE210632-9A01-4467-ACBB-4774DF0A0BAE}" type="datetimeFigureOut">
+            <a:fld id="{C823E295-28DF-4E71-9F53-D45207DE2860}" type="datetimeFigureOut">
               <a:rPr lang="en-US" smtClean="0"/>
               <a:t>5/20/2026</a:t>
             </a:fld>
@@ -2027,13 +2053,7 @@
       </p:sp>
       <p:sp>
         <p:nvSpPr>
-          <p:cNvPr id="8" name="Footer Placeholder 7">
-            <a:extLst>
-              <a:ext uri="{FF2B5EF4-FFF2-40B4-BE49-F238E27FC236}">
-                <a16:creationId xmlns:a16="http://schemas.microsoft.com/office/drawing/2014/main" id="{CBFCC561-F409-A54F-D1E6-A4B93F098C2C}"/>
-              </a:ext>
-            </a:extLst>
-          </p:cNvPr>
+          <p:cNvPr id="8" name="Footer Placeholder 7"/>
           <p:cNvSpPr>
             <a:spLocks noGrp="1"/>
           </p:cNvSpPr>
@@ -2052,13 +2072,7 @@
       </p:sp>
       <p:sp>
         <p:nvSpPr>
-          <p:cNvPr id="9" name="Slide Number Placeholder 8">
-            <a:extLst>
-              <a:ext uri="{FF2B5EF4-FFF2-40B4-BE49-F238E27FC236}">
-                <a16:creationId xmlns:a16="http://schemas.microsoft.com/office/drawing/2014/main" id="{5CA92300-3C93-6D8E-896B-372DD802D1CC}"/>
-              </a:ext>
-            </a:extLst>
-          </p:cNvPr>
+          <p:cNvPr id="9" name="Slide Number Placeholder 8"/>
           <p:cNvSpPr>
             <a:spLocks noGrp="1"/>
           </p:cNvSpPr>
@@ -2071,7 +2085,7 @@
           <a:bodyPr/>
           <a:lstStyle/>
           <a:p>
-            <a:fld id="{BA1408D6-A18F-4DEF-8108-D3F1A5E4F663}" type="slidenum">
+            <a:fld id="{41970ED4-46CD-4B2B-B2B3-745DA35D2A58}" type="slidenum">
               <a:rPr lang="en-US" smtClean="0"/>
               <a:t>‹#›</a:t>
             </a:fld>
@@ -2079,10 +2093,41 @@
           </a:p>
         </p:txBody>
       </p:sp>
+      <p:cxnSp>
+        <p:nvCxnSpPr>
+          <p:cNvPr id="29" name="Straight Connector 28"/>
+          <p:cNvCxnSpPr/>
+          <p:nvPr/>
+        </p:nvCxnSpPr>
+        <p:spPr>
+          <a:xfrm>
+            <a:off x="1453896" y="1847088"/>
+            <a:ext cx="9607522" cy="0"/>
+          </a:xfrm>
+          <a:prstGeom prst="line">
+            <a:avLst/>
+          </a:prstGeom>
+          <a:ln w="31750"/>
+        </p:spPr>
+        <p:style>
+          <a:lnRef idx="3">
+            <a:schemeClr val="accent1"/>
+          </a:lnRef>
+          <a:fillRef idx="0">
+            <a:schemeClr val="accent1"/>
+          </a:fillRef>
+          <a:effectRef idx="2">
+            <a:schemeClr val="accent1"/>
+          </a:effectRef>
+          <a:fontRef idx="minor">
+            <a:schemeClr val="tx1"/>
+          </a:fontRef>
+        </p:style>
+      </p:cxnSp>
     </p:spTree>
     <p:extLst>
       <p:ext uri="{BB962C8B-B14F-4D97-AF65-F5344CB8AC3E}">
-        <p14:creationId xmlns:p14="http://schemas.microsoft.com/office/powerpoint/2010/main" val="4097482820"/>
+        <p14:creationId xmlns:p14="http://schemas.microsoft.com/office/powerpoint/2010/main" val="2245088258"/>
       </p:ext>
     </p:extLst>
   </p:cSld>
@@ -2111,13 +2156,7 @@
       </p:grpSpPr>
       <p:sp>
         <p:nvSpPr>
-          <p:cNvPr id="2" name="Title 1">
-            <a:extLst>
-              <a:ext uri="{FF2B5EF4-FFF2-40B4-BE49-F238E27FC236}">
-                <a16:creationId xmlns:a16="http://schemas.microsoft.com/office/drawing/2014/main" id="{91545A1F-597F-4E96-FF2E-6FAE7CA78972}"/>
-              </a:ext>
-            </a:extLst>
-          </p:cNvPr>
+          <p:cNvPr id="2" name="Title 1"/>
           <p:cNvSpPr>
             <a:spLocks noGrp="1"/>
           </p:cNvSpPr>
@@ -2134,18 +2173,13 @@
               <a:rPr lang="en-US"/>
               <a:t>Click to edit Master title style</a:t>
             </a:r>
-          </a:p>
-        </p:txBody>
-      </p:sp>
-      <p:sp>
-        <p:nvSpPr>
-          <p:cNvPr id="3" name="Date Placeholder 2">
-            <a:extLst>
-              <a:ext uri="{FF2B5EF4-FFF2-40B4-BE49-F238E27FC236}">
-                <a16:creationId xmlns:a16="http://schemas.microsoft.com/office/drawing/2014/main" id="{1DC42043-30CB-D362-087A-FAD9AE6F1DC8}"/>
-              </a:ext>
-            </a:extLst>
-          </p:cNvPr>
+            <a:endParaRPr lang="en-US" dirty="0"/>
+          </a:p>
+        </p:txBody>
+      </p:sp>
+      <p:sp>
+        <p:nvSpPr>
+          <p:cNvPr id="3" name="Date Placeholder 2"/>
           <p:cNvSpPr>
             <a:spLocks noGrp="1"/>
           </p:cNvSpPr>
@@ -2158,7 +2192,7 @@
           <a:bodyPr/>
           <a:lstStyle/>
           <a:p>
-            <a:fld id="{DE210632-9A01-4467-ACBB-4774DF0A0BAE}" type="datetimeFigureOut">
+            <a:fld id="{C823E295-28DF-4E71-9F53-D45207DE2860}" type="datetimeFigureOut">
               <a:rPr lang="en-US" smtClean="0"/>
               <a:t>5/20/2026</a:t>
             </a:fld>
@@ -2168,13 +2202,7 @@
       </p:sp>
       <p:sp>
         <p:nvSpPr>
-          <p:cNvPr id="4" name="Footer Placeholder 3">
-            <a:extLst>
-              <a:ext uri="{FF2B5EF4-FFF2-40B4-BE49-F238E27FC236}">
-                <a16:creationId xmlns:a16="http://schemas.microsoft.com/office/drawing/2014/main" id="{2D5881A7-42C7-46A6-CD9F-4C0460B5848C}"/>
-              </a:ext>
-            </a:extLst>
-          </p:cNvPr>
+          <p:cNvPr id="4" name="Footer Placeholder 3"/>
           <p:cNvSpPr>
             <a:spLocks noGrp="1"/>
           </p:cNvSpPr>
@@ -2193,13 +2221,7 @@
       </p:sp>
       <p:sp>
         <p:nvSpPr>
-          <p:cNvPr id="5" name="Slide Number Placeholder 4">
-            <a:extLst>
-              <a:ext uri="{FF2B5EF4-FFF2-40B4-BE49-F238E27FC236}">
-                <a16:creationId xmlns:a16="http://schemas.microsoft.com/office/drawing/2014/main" id="{FBA2D19A-E454-09E9-BF0D-9711443506B0}"/>
-              </a:ext>
-            </a:extLst>
-          </p:cNvPr>
+          <p:cNvPr id="5" name="Slide Number Placeholder 4"/>
           <p:cNvSpPr>
             <a:spLocks noGrp="1"/>
           </p:cNvSpPr>
@@ -2212,7 +2234,7 @@
           <a:bodyPr/>
           <a:lstStyle/>
           <a:p>
-            <a:fld id="{BA1408D6-A18F-4DEF-8108-D3F1A5E4F663}" type="slidenum">
+            <a:fld id="{41970ED4-46CD-4B2B-B2B3-745DA35D2A58}" type="slidenum">
               <a:rPr lang="en-US" smtClean="0"/>
               <a:t>‹#›</a:t>
             </a:fld>
@@ -2220,10 +2242,41 @@
           </a:p>
         </p:txBody>
       </p:sp>
+      <p:cxnSp>
+        <p:nvCxnSpPr>
+          <p:cNvPr id="25" name="Straight Connector 24"/>
+          <p:cNvCxnSpPr/>
+          <p:nvPr/>
+        </p:nvCxnSpPr>
+        <p:spPr>
+          <a:xfrm>
+            <a:off x="1453896" y="1847088"/>
+            <a:ext cx="9607522" cy="0"/>
+          </a:xfrm>
+          <a:prstGeom prst="line">
+            <a:avLst/>
+          </a:prstGeom>
+          <a:ln w="31750"/>
+        </p:spPr>
+        <p:style>
+          <a:lnRef idx="3">
+            <a:schemeClr val="accent1"/>
+          </a:lnRef>
+          <a:fillRef idx="0">
+            <a:schemeClr val="accent1"/>
+          </a:fillRef>
+          <a:effectRef idx="2">
+            <a:schemeClr val="accent1"/>
+          </a:effectRef>
+          <a:fontRef idx="minor">
+            <a:schemeClr val="tx1"/>
+          </a:fontRef>
+        </p:style>
+      </p:cxnSp>
     </p:spTree>
     <p:extLst>
       <p:ext uri="{BB962C8B-B14F-4D97-AF65-F5344CB8AC3E}">
-        <p14:creationId xmlns:p14="http://schemas.microsoft.com/office/powerpoint/2010/main" val="259727628"/>
+        <p14:creationId xmlns:p14="http://schemas.microsoft.com/office/powerpoint/2010/main" val="1601169459"/>
       </p:ext>
     </p:extLst>
   </p:cSld>
@@ -2252,13 +2305,7 @@
       </p:grpSpPr>
       <p:sp>
         <p:nvSpPr>
-          <p:cNvPr id="2" name="Date Placeholder 1">
-            <a:extLst>
-              <a:ext uri="{FF2B5EF4-FFF2-40B4-BE49-F238E27FC236}">
-                <a16:creationId xmlns:a16="http://schemas.microsoft.com/office/drawing/2014/main" id="{0173C142-AA4D-13B4-1240-D9092F5FC9FE}"/>
-              </a:ext>
-            </a:extLst>
-          </p:cNvPr>
+          <p:cNvPr id="2" name="Date Placeholder 1"/>
           <p:cNvSpPr>
             <a:spLocks noGrp="1"/>
           </p:cNvSpPr>
@@ -2271,7 +2318,7 @@
           <a:bodyPr/>
           <a:lstStyle/>
           <a:p>
-            <a:fld id="{DE210632-9A01-4467-ACBB-4774DF0A0BAE}" type="datetimeFigureOut">
+            <a:fld id="{C823E295-28DF-4E71-9F53-D45207DE2860}" type="datetimeFigureOut">
               <a:rPr lang="en-US" smtClean="0"/>
               <a:t>5/20/2026</a:t>
             </a:fld>
@@ -2281,13 +2328,7 @@
       </p:sp>
       <p:sp>
         <p:nvSpPr>
-          <p:cNvPr id="3" name="Footer Placeholder 2">
-            <a:extLst>
-              <a:ext uri="{FF2B5EF4-FFF2-40B4-BE49-F238E27FC236}">
-                <a16:creationId xmlns:a16="http://schemas.microsoft.com/office/drawing/2014/main" id="{A90F776A-BFCA-7114-EA47-1E45D3A5FAC6}"/>
-              </a:ext>
-            </a:extLst>
-          </p:cNvPr>
+          <p:cNvPr id="3" name="Footer Placeholder 2"/>
           <p:cNvSpPr>
             <a:spLocks noGrp="1"/>
           </p:cNvSpPr>
@@ -2306,13 +2347,7 @@
       </p:sp>
       <p:sp>
         <p:nvSpPr>
-          <p:cNvPr id="4" name="Slide Number Placeholder 3">
-            <a:extLst>
-              <a:ext uri="{FF2B5EF4-FFF2-40B4-BE49-F238E27FC236}">
-                <a16:creationId xmlns:a16="http://schemas.microsoft.com/office/drawing/2014/main" id="{48FED7D4-3CDE-71B2-A09B-15F86DFE5046}"/>
-              </a:ext>
-            </a:extLst>
-          </p:cNvPr>
+          <p:cNvPr id="4" name="Slide Number Placeholder 3"/>
           <p:cNvSpPr>
             <a:spLocks noGrp="1"/>
           </p:cNvSpPr>
@@ -2325,7 +2360,7 @@
           <a:bodyPr/>
           <a:lstStyle/>
           <a:p>
-            <a:fld id="{BA1408D6-A18F-4DEF-8108-D3F1A5E4F663}" type="slidenum">
+            <a:fld id="{41970ED4-46CD-4B2B-B2B3-745DA35D2A58}" type="slidenum">
               <a:rPr lang="en-US" smtClean="0"/>
               <a:t>‹#›</a:t>
             </a:fld>
@@ -2336,7 +2371,7 @@
     </p:spTree>
     <p:extLst>
       <p:ext uri="{BB962C8B-B14F-4D97-AF65-F5344CB8AC3E}">
-        <p14:creationId xmlns:p14="http://schemas.microsoft.com/office/powerpoint/2010/main" val="3717256121"/>
+        <p14:creationId xmlns:p14="http://schemas.microsoft.com/office/powerpoint/2010/main" val="1890152302"/>
       </p:ext>
     </p:extLst>
   </p:cSld>
@@ -2365,13 +2400,7 @@
       </p:grpSpPr>
       <p:sp>
         <p:nvSpPr>
-          <p:cNvPr id="2" name="Title 1">
-            <a:extLst>
-              <a:ext uri="{FF2B5EF4-FFF2-40B4-BE49-F238E27FC236}">
-                <a16:creationId xmlns:a16="http://schemas.microsoft.com/office/drawing/2014/main" id="{10EAFD8F-24EC-785D-D6F4-3DCF0AA96548}"/>
-              </a:ext>
-            </a:extLst>
-          </p:cNvPr>
+          <p:cNvPr id="2" name="Title 1"/>
           <p:cNvSpPr>
             <a:spLocks noGrp="1"/>
           </p:cNvSpPr>
@@ -2381,15 +2410,17 @@
         </p:nvSpPr>
         <p:spPr>
           <a:xfrm>
-            <a:off x="839788" y="457200"/>
-            <a:ext cx="3932237" cy="1600200"/>
+            <a:off x="1444671" y="798973"/>
+            <a:ext cx="3273099" cy="2247117"/>
           </a:xfrm>
         </p:spPr>
         <p:txBody>
-          <a:bodyPr anchor="b"/>
+          <a:bodyPr anchor="b">
+            <a:normAutofit/>
+          </a:bodyPr>
           <a:lstStyle>
-            <a:lvl1pPr>
-              <a:defRPr sz="3200"/>
+            <a:lvl1pPr algn="l">
+              <a:defRPr sz="2400"/>
             </a:lvl1pPr>
           </a:lstStyle>
           <a:p>
@@ -2397,18 +2428,13 @@
               <a:rPr lang="en-US"/>
               <a:t>Click to edit Master title style</a:t>
             </a:r>
-          </a:p>
-        </p:txBody>
-      </p:sp>
-      <p:sp>
-        <p:nvSpPr>
-          <p:cNvPr id="3" name="Content Placeholder 2">
-            <a:extLst>
-              <a:ext uri="{FF2B5EF4-FFF2-40B4-BE49-F238E27FC236}">
-                <a16:creationId xmlns:a16="http://schemas.microsoft.com/office/drawing/2014/main" id="{FC5E5AB8-9492-4540-5017-580BEC6FD11E}"/>
-              </a:ext>
-            </a:extLst>
-          </p:cNvPr>
+            <a:endParaRPr lang="en-US" dirty="0"/>
+          </a:p>
+        </p:txBody>
+      </p:sp>
+      <p:sp>
+        <p:nvSpPr>
+          <p:cNvPr id="3" name="Content Placeholder 2"/>
           <p:cNvSpPr>
             <a:spLocks noGrp="1"/>
           </p:cNvSpPr>
@@ -2418,104 +2444,71 @@
         </p:nvSpPr>
         <p:spPr>
           <a:xfrm>
-            <a:off x="5183188" y="987425"/>
-            <a:ext cx="6172200" cy="4873625"/>
+            <a:off x="5043714" y="798974"/>
+            <a:ext cx="6012470" cy="4658826"/>
           </a:xfrm>
         </p:spPr>
         <p:txBody>
+          <a:bodyPr anchor="ctr"/>
+          <a:lstStyle/>
+          <a:p>
+            <a:pPr lvl="0"/>
+            <a:r>
+              <a:rPr lang="en-US"/>
+              <a:t>Click to edit Master text styles</a:t>
+            </a:r>
+          </a:p>
+          <a:p>
+            <a:pPr lvl="1"/>
+            <a:r>
+              <a:rPr lang="en-US"/>
+              <a:t>Second level</a:t>
+            </a:r>
+          </a:p>
+          <a:p>
+            <a:pPr lvl="2"/>
+            <a:r>
+              <a:rPr lang="en-US"/>
+              <a:t>Third level</a:t>
+            </a:r>
+          </a:p>
+          <a:p>
+            <a:pPr lvl="3"/>
+            <a:r>
+              <a:rPr lang="en-US"/>
+              <a:t>Fourth level</a:t>
+            </a:r>
+          </a:p>
+          <a:p>
+            <a:pPr lvl="4"/>
+            <a:r>
+              <a:rPr lang="en-US"/>
+              <a:t>Fifth level</a:t>
+            </a:r>
+            <a:endParaRPr lang="en-US" dirty="0"/>
+          </a:p>
+        </p:txBody>
+      </p:sp>
+      <p:sp>
+        <p:nvSpPr>
+          <p:cNvPr id="4" name="Text Placeholder 3"/>
+          <p:cNvSpPr>
+            <a:spLocks noGrp="1"/>
+          </p:cNvSpPr>
+          <p:nvPr>
+            <p:ph type="body" sz="half" idx="2"/>
+          </p:nvPr>
+        </p:nvSpPr>
+        <p:spPr>
+          <a:xfrm>
+            <a:off x="1444671" y="3205491"/>
+            <a:ext cx="3275013" cy="2248181"/>
+          </a:xfrm>
+        </p:spPr>
+        <p:txBody>
           <a:bodyPr/>
           <a:lstStyle>
-            <a:lvl1pPr>
-              <a:defRPr sz="3200"/>
-            </a:lvl1pPr>
-            <a:lvl2pPr>
-              <a:defRPr sz="2800"/>
-            </a:lvl2pPr>
-            <a:lvl3pPr>
-              <a:defRPr sz="2400"/>
-            </a:lvl3pPr>
-            <a:lvl4pPr>
-              <a:defRPr sz="2000"/>
-            </a:lvl4pPr>
-            <a:lvl5pPr>
-              <a:defRPr sz="2000"/>
-            </a:lvl5pPr>
-            <a:lvl6pPr>
-              <a:defRPr sz="2000"/>
-            </a:lvl6pPr>
-            <a:lvl7pPr>
-              <a:defRPr sz="2000"/>
-            </a:lvl7pPr>
-            <a:lvl8pPr>
-              <a:defRPr sz="2000"/>
-            </a:lvl8pPr>
-            <a:lvl9pPr>
-              <a:defRPr sz="2000"/>
-            </a:lvl9pPr>
-          </a:lstStyle>
-          <a:p>
-            <a:pPr lvl="0"/>
-            <a:r>
-              <a:rPr lang="en-US"/>
-              <a:t>Click to edit Master text styles</a:t>
-            </a:r>
-          </a:p>
-          <a:p>
-            <a:pPr lvl="1"/>
-            <a:r>
-              <a:rPr lang="en-US"/>
-              <a:t>Second level</a:t>
-            </a:r>
-          </a:p>
-          <a:p>
-            <a:pPr lvl="2"/>
-            <a:r>
-              <a:rPr lang="en-US"/>
-              <a:t>Third level</a:t>
-            </a:r>
-          </a:p>
-          <a:p>
-            <a:pPr lvl="3"/>
-            <a:r>
-              <a:rPr lang="en-US"/>
-              <a:t>Fourth level</a:t>
-            </a:r>
-          </a:p>
-          <a:p>
-            <a:pPr lvl="4"/>
-            <a:r>
-              <a:rPr lang="en-US"/>
-              <a:t>Fifth level</a:t>
-            </a:r>
-          </a:p>
-        </p:txBody>
-      </p:sp>
-      <p:sp>
-        <p:nvSpPr>
-          <p:cNvPr id="4" name="Text Placeholder 3">
-            <a:extLst>
-              <a:ext uri="{FF2B5EF4-FFF2-40B4-BE49-F238E27FC236}">
-                <a16:creationId xmlns:a16="http://schemas.microsoft.com/office/drawing/2014/main" id="{C827A1E2-6A0D-B817-ABD5-F8A99C657375}"/>
-              </a:ext>
-            </a:extLst>
-          </p:cNvPr>
-          <p:cNvSpPr>
-            <a:spLocks noGrp="1"/>
-          </p:cNvSpPr>
-          <p:nvPr>
-            <p:ph type="body" sz="half" idx="2"/>
-          </p:nvPr>
-        </p:nvSpPr>
-        <p:spPr>
-          <a:xfrm>
-            <a:off x="839788" y="2057400"/>
-            <a:ext cx="3932237" cy="3811588"/>
-          </a:xfrm>
-        </p:spPr>
-        <p:txBody>
-          <a:bodyPr/>
-          <a:lstStyle>
-            <a:lvl1pPr marL="0" indent="0">
+            <a:lvl1pPr marL="0" indent="0" algn="l">
               <a:buNone/>
               <a:defRPr sz="1600"/>
             </a:lvl1pPr>
@@ -2563,13 +2556,7 @@
       </p:sp>
       <p:sp>
         <p:nvSpPr>
-          <p:cNvPr id="5" name="Date Placeholder 4">
-            <a:extLst>
-              <a:ext uri="{FF2B5EF4-FFF2-40B4-BE49-F238E27FC236}">
-                <a16:creationId xmlns:a16="http://schemas.microsoft.com/office/drawing/2014/main" id="{4BDF2115-F993-FBB6-C2F6-C5E251BE6A1A}"/>
-              </a:ext>
-            </a:extLst>
-          </p:cNvPr>
+          <p:cNvPr id="5" name="Date Placeholder 4"/>
           <p:cNvSpPr>
             <a:spLocks noGrp="1"/>
           </p:cNvSpPr>
@@ -2582,7 +2569,7 @@
           <a:bodyPr/>
           <a:lstStyle/>
           <a:p>
-            <a:fld id="{DE210632-9A01-4467-ACBB-4774DF0A0BAE}" type="datetimeFigureOut">
+            <a:fld id="{C823E295-28DF-4E71-9F53-D45207DE2860}" type="datetimeFigureOut">
               <a:rPr lang="en-US" smtClean="0"/>
               <a:t>5/20/2026</a:t>
             </a:fld>
@@ -2592,13 +2579,7 @@
       </p:sp>
       <p:sp>
         <p:nvSpPr>
-          <p:cNvPr id="6" name="Footer Placeholder 5">
-            <a:extLst>
-              <a:ext uri="{FF2B5EF4-FFF2-40B4-BE49-F238E27FC236}">
-                <a16:creationId xmlns:a16="http://schemas.microsoft.com/office/drawing/2014/main" id="{F2AAD9F7-5C66-34D3-6C27-D1B279B38FA8}"/>
-              </a:ext>
-            </a:extLst>
-          </p:cNvPr>
+          <p:cNvPr id="6" name="Footer Placeholder 5"/>
           <p:cNvSpPr>
             <a:spLocks noGrp="1"/>
           </p:cNvSpPr>
@@ -2617,13 +2598,7 @@
       </p:sp>
       <p:sp>
         <p:nvSpPr>
-          <p:cNvPr id="7" name="Slide Number Placeholder 6">
-            <a:extLst>
-              <a:ext uri="{FF2B5EF4-FFF2-40B4-BE49-F238E27FC236}">
-                <a16:creationId xmlns:a16="http://schemas.microsoft.com/office/drawing/2014/main" id="{77AA44A5-1734-EAE3-FEE8-0A0D6AC69FC7}"/>
-              </a:ext>
-            </a:extLst>
-          </p:cNvPr>
+          <p:cNvPr id="7" name="Slide Number Placeholder 6"/>
           <p:cNvSpPr>
             <a:spLocks noGrp="1"/>
           </p:cNvSpPr>
@@ -2636,7 +2611,7 @@
           <a:bodyPr/>
           <a:lstStyle/>
           <a:p>
-            <a:fld id="{BA1408D6-A18F-4DEF-8108-D3F1A5E4F663}" type="slidenum">
+            <a:fld id="{41970ED4-46CD-4B2B-B2B3-745DA35D2A58}" type="slidenum">
               <a:rPr lang="en-US" smtClean="0"/>
               <a:t>‹#›</a:t>
             </a:fld>
@@ -2644,10 +2619,41 @@
           </a:p>
         </p:txBody>
       </p:sp>
+      <p:cxnSp>
+        <p:nvCxnSpPr>
+          <p:cNvPr id="17" name="Straight Connector 16"/>
+          <p:cNvCxnSpPr/>
+          <p:nvPr/>
+        </p:nvCxnSpPr>
+        <p:spPr>
+          <a:xfrm>
+            <a:off x="1448280" y="3205491"/>
+            <a:ext cx="3269490" cy="0"/>
+          </a:xfrm>
+          <a:prstGeom prst="line">
+            <a:avLst/>
+          </a:prstGeom>
+          <a:ln w="31750"/>
+        </p:spPr>
+        <p:style>
+          <a:lnRef idx="3">
+            <a:schemeClr val="accent1"/>
+          </a:lnRef>
+          <a:fillRef idx="0">
+            <a:schemeClr val="accent1"/>
+          </a:fillRef>
+          <a:effectRef idx="2">
+            <a:schemeClr val="accent1"/>
+          </a:effectRef>
+          <a:fontRef idx="minor">
+            <a:schemeClr val="tx1"/>
+          </a:fontRef>
+        </p:style>
+      </p:cxnSp>
     </p:spTree>
     <p:extLst>
       <p:ext uri="{BB962C8B-B14F-4D97-AF65-F5344CB8AC3E}">
-        <p14:creationId xmlns:p14="http://schemas.microsoft.com/office/powerpoint/2010/main" val="1868038816"/>
+        <p14:creationId xmlns:p14="http://schemas.microsoft.com/office/powerpoint/2010/main" val="3011493387"/>
       </p:ext>
     </p:extLst>
   </p:cSld>
@@ -2674,15 +2680,143 @@
           <a:chExt cx="0" cy="0"/>
         </a:xfrm>
       </p:grpSpPr>
-      <p:sp>
-        <p:nvSpPr>
-          <p:cNvPr id="2" name="Title 1">
-            <a:extLst>
-              <a:ext uri="{FF2B5EF4-FFF2-40B4-BE49-F238E27FC236}">
-                <a16:creationId xmlns:a16="http://schemas.microsoft.com/office/drawing/2014/main" id="{59D85FC8-673F-C279-C579-01A9108AF236}"/>
-              </a:ext>
-            </a:extLst>
-          </p:cNvPr>
+      <p:grpSp>
+        <p:nvGrpSpPr>
+          <p:cNvPr id="8" name="Group 7"/>
+          <p:cNvGrpSpPr/>
+          <p:nvPr/>
+        </p:nvGrpSpPr>
+        <p:grpSpPr>
+          <a:xfrm>
+            <a:off x="7477387" y="482170"/>
+            <a:ext cx="4074533" cy="5149101"/>
+            <a:chOff x="7477387" y="482170"/>
+            <a:chExt cx="4074533" cy="5149101"/>
+          </a:xfrm>
+        </p:grpSpPr>
+        <p:sp>
+          <p:nvSpPr>
+            <p:cNvPr id="18" name="Rectangle 17"/>
+            <p:cNvSpPr/>
+            <p:nvPr/>
+          </p:nvSpPr>
+          <p:spPr bwMode="black">
+            <a:xfrm>
+              <a:off x="7477387" y="482170"/>
+              <a:ext cx="4074533" cy="5149101"/>
+            </a:xfrm>
+            <a:prstGeom prst="rect">
+              <a:avLst/>
+            </a:prstGeom>
+            <a:gradFill>
+              <a:gsLst>
+                <a:gs pos="0">
+                  <a:srgbClr val="000001"/>
+                </a:gs>
+                <a:gs pos="100000">
+                  <a:srgbClr val="191919"/>
+                </a:gs>
+              </a:gsLst>
+            </a:gradFill>
+            <a:ln w="76200" cmpd="sng">
+              <a:noFill/>
+              <a:miter lim="800000"/>
+            </a:ln>
+            <a:effectLst>
+              <a:outerShdw blurRad="127000" dist="228600" dir="4740000" sx="98000" sy="98000" algn="tl" rotWithShape="0">
+                <a:srgbClr val="000000">
+                  <a:alpha val="34000"/>
+                </a:srgbClr>
+              </a:outerShdw>
+            </a:effectLst>
+            <a:scene3d>
+              <a:camera prst="orthographicFront"/>
+              <a:lightRig rig="threePt" dir="t"/>
+            </a:scene3d>
+            <a:sp3d>
+              <a:bevelT w="152400" h="50800" prst="softRound"/>
+            </a:sp3d>
+          </p:spPr>
+          <p:style>
+            <a:lnRef idx="1">
+              <a:schemeClr val="accent1"/>
+            </a:lnRef>
+            <a:fillRef idx="3">
+              <a:schemeClr val="accent1"/>
+            </a:fillRef>
+            <a:effectRef idx="2">
+              <a:schemeClr val="accent1"/>
+            </a:effectRef>
+            <a:fontRef idx="minor">
+              <a:schemeClr val="lt1"/>
+            </a:fontRef>
+          </p:style>
+        </p:sp>
+        <p:sp>
+          <p:nvSpPr>
+            <p:cNvPr id="19" name="Rectangle 18"/>
+            <p:cNvSpPr/>
+            <p:nvPr/>
+          </p:nvSpPr>
+          <p:spPr bwMode="blackWhite">
+            <a:xfrm>
+              <a:off x="7790446" y="812506"/>
+              <a:ext cx="3450289" cy="4466452"/>
+            </a:xfrm>
+            <a:prstGeom prst="rect">
+              <a:avLst/>
+            </a:prstGeom>
+            <a:gradFill>
+              <a:gsLst>
+                <a:gs pos="0">
+                  <a:srgbClr val="DADADA"/>
+                </a:gs>
+                <a:gs pos="100000">
+                  <a:srgbClr val="FFFFFE"/>
+                </a:gs>
+              </a:gsLst>
+              <a:lin ang="16200000" scaled="0"/>
+            </a:gradFill>
+            <a:ln w="50800" cmpd="sng">
+              <a:solidFill>
+                <a:srgbClr val="191919"/>
+              </a:solidFill>
+              <a:miter lim="800000"/>
+            </a:ln>
+            <a:effectLst>
+              <a:innerShdw blurRad="63500" dist="88900" dir="14100000">
+                <a:srgbClr val="000000">
+                  <a:alpha val="30000"/>
+                </a:srgbClr>
+              </a:innerShdw>
+            </a:effectLst>
+            <a:scene3d>
+              <a:camera prst="orthographicFront"/>
+              <a:lightRig rig="threePt" dir="t"/>
+            </a:scene3d>
+            <a:sp3d>
+              <a:bevelT prst="relaxedInset"/>
+            </a:sp3d>
+          </p:spPr>
+          <p:style>
+            <a:lnRef idx="1">
+              <a:schemeClr val="accent1"/>
+            </a:lnRef>
+            <a:fillRef idx="3">
+              <a:schemeClr val="accent1"/>
+            </a:fillRef>
+            <a:effectRef idx="2">
+              <a:schemeClr val="accent1"/>
+            </a:effectRef>
+            <a:fontRef idx="minor">
+              <a:schemeClr val="lt1"/>
+            </a:fontRef>
+          </p:style>
+        </p:sp>
+      </p:grpSp>
+      <p:sp>
+        <p:nvSpPr>
+          <p:cNvPr id="2" name="Title 1"/>
           <p:cNvSpPr>
             <a:spLocks noGrp="1"/>
           </p:cNvSpPr>
@@ -2692,12 +2826,14 @@
         </p:nvSpPr>
         <p:spPr>
           <a:xfrm>
-            <a:off x="839788" y="457200"/>
-            <a:ext cx="3932237" cy="1600200"/>
+            <a:off x="1451206" y="1129513"/>
+            <a:ext cx="5532328" cy="1830584"/>
           </a:xfrm>
         </p:spPr>
         <p:txBody>
-          <a:bodyPr anchor="b"/>
+          <a:bodyPr anchor="b">
+            <a:normAutofit/>
+          </a:bodyPr>
           <a:lstStyle>
             <a:lvl1pPr>
               <a:defRPr sz="3200"/>
@@ -2708,20 +2844,15 @@
               <a:rPr lang="en-US"/>
               <a:t>Click to edit Master title style</a:t>
             </a:r>
-          </a:p>
-        </p:txBody>
-      </p:sp>
-      <p:sp>
-        <p:nvSpPr>
-          <p:cNvPr id="3" name="Picture Placeholder 2">
-            <a:extLst>
-              <a:ext uri="{FF2B5EF4-FFF2-40B4-BE49-F238E27FC236}">
-                <a16:creationId xmlns:a16="http://schemas.microsoft.com/office/drawing/2014/main" id="{89DDDF45-487E-0CAF-0F93-C4A0F013FA9A}"/>
-              </a:ext>
-            </a:extLst>
-          </p:cNvPr>
-          <p:cNvSpPr>
-            <a:spLocks noGrp="1"/>
+            <a:endParaRPr lang="en-US" dirty="0"/>
+          </a:p>
+        </p:txBody>
+      </p:sp>
+      <p:sp>
+        <p:nvSpPr>
+          <p:cNvPr id="3" name="Picture Placeholder 2"/>
+          <p:cNvSpPr>
+            <a:spLocks noGrp="1" noChangeAspect="1"/>
           </p:cNvSpPr>
           <p:nvPr>
             <p:ph type="pic" idx="1"/>
@@ -2729,14 +2860,24 @@
         </p:nvSpPr>
         <p:spPr>
           <a:xfrm>
-            <a:off x="5183188" y="987425"/>
-            <a:ext cx="6172200" cy="4873625"/>
+            <a:off x="8124389" y="1122542"/>
+            <a:ext cx="2791171" cy="3866327"/>
           </a:xfrm>
+          <a:solidFill>
+            <a:schemeClr val="bg1">
+              <a:lumMod val="85000"/>
+            </a:schemeClr>
+          </a:solidFill>
+          <a:ln w="9525" cap="sq">
+            <a:noFill/>
+            <a:miter lim="800000"/>
+          </a:ln>
+          <a:effectLst/>
         </p:spPr>
         <p:txBody>
-          <a:bodyPr/>
+          <a:bodyPr anchor="t"/>
           <a:lstStyle>
-            <a:lvl1pPr marL="0" indent="0">
+            <a:lvl1pPr marL="0" indent="0" algn="ctr">
               <a:buNone/>
               <a:defRPr sz="3200"/>
             </a:lvl1pPr>
@@ -2774,19 +2915,17 @@
             </a:lvl9pPr>
           </a:lstStyle>
           <a:p>
-            <a:endParaRPr lang="en-US"/>
-          </a:p>
-        </p:txBody>
-      </p:sp>
-      <p:sp>
-        <p:nvSpPr>
-          <p:cNvPr id="4" name="Text Placeholder 3">
-            <a:extLst>
-              <a:ext uri="{FF2B5EF4-FFF2-40B4-BE49-F238E27FC236}">
-                <a16:creationId xmlns:a16="http://schemas.microsoft.com/office/drawing/2014/main" id="{21EB93A7-F790-72AB-4CEE-FEC2DE14788B}"/>
-              </a:ext>
-            </a:extLst>
-          </p:cNvPr>
+            <a:r>
+              <a:rPr lang="en-US"/>
+              <a:t>Click icon to add picture</a:t>
+            </a:r>
+            <a:endParaRPr lang="en-US" dirty="0"/>
+          </a:p>
+        </p:txBody>
+      </p:sp>
+      <p:sp>
+        <p:nvSpPr>
+          <p:cNvPr id="4" name="Text Placeholder 3"/>
           <p:cNvSpPr>
             <a:spLocks noGrp="1"/>
           </p:cNvSpPr>
@@ -2796,16 +2935,18 @@
         </p:nvSpPr>
         <p:spPr>
           <a:xfrm>
-            <a:off x="839788" y="2057400"/>
-            <a:ext cx="3932237" cy="3811588"/>
+            <a:off x="1450329" y="3145992"/>
+            <a:ext cx="5524404" cy="2003742"/>
           </a:xfrm>
         </p:spPr>
         <p:txBody>
-          <a:bodyPr/>
+          <a:bodyPr>
+            <a:normAutofit/>
+          </a:bodyPr>
           <a:lstStyle>
-            <a:lvl1pPr marL="0" indent="0">
+            <a:lvl1pPr marL="0" indent="0" algn="l">
               <a:buNone/>
-              <a:defRPr sz="1600"/>
+              <a:defRPr sz="1800"/>
             </a:lvl1pPr>
             <a:lvl2pPr marL="457200" indent="0">
               <a:buNone/>
@@ -2851,13 +2992,7 @@
       </p:sp>
       <p:sp>
         <p:nvSpPr>
-          <p:cNvPr id="5" name="Date Placeholder 4">
-            <a:extLst>
-              <a:ext uri="{FF2B5EF4-FFF2-40B4-BE49-F238E27FC236}">
-                <a16:creationId xmlns:a16="http://schemas.microsoft.com/office/drawing/2014/main" id="{0779527B-1D48-C6B4-784C-37F313A83550}"/>
-              </a:ext>
-            </a:extLst>
-          </p:cNvPr>
+          <p:cNvPr id="5" name="Date Placeholder 4"/>
           <p:cNvSpPr>
             <a:spLocks noGrp="1"/>
           </p:cNvSpPr>
@@ -2865,12 +3000,21 @@
             <p:ph type="dt" sz="half" idx="10"/>
           </p:nvPr>
         </p:nvSpPr>
-        <p:spPr/>
+        <p:spPr>
+          <a:xfrm>
+            <a:off x="1447382" y="5469856"/>
+            <a:ext cx="5527351" cy="320123"/>
+          </a:xfrm>
+        </p:spPr>
         <p:txBody>
           <a:bodyPr/>
-          <a:lstStyle/>
-          <a:p>
-            <a:fld id="{DE210632-9A01-4467-ACBB-4774DF0A0BAE}" type="datetimeFigureOut">
+          <a:lstStyle>
+            <a:lvl1pPr algn="l">
+              <a:defRPr/>
+            </a:lvl1pPr>
+          </a:lstStyle>
+          <a:p>
+            <a:fld id="{C823E295-28DF-4E71-9F53-D45207DE2860}" type="datetimeFigureOut">
               <a:rPr lang="en-US" smtClean="0"/>
               <a:t>5/20/2026</a:t>
             </a:fld>
@@ -2880,13 +3024,7 @@
       </p:sp>
       <p:sp>
         <p:nvSpPr>
-          <p:cNvPr id="6" name="Footer Placeholder 5">
-            <a:extLst>
-              <a:ext uri="{FF2B5EF4-FFF2-40B4-BE49-F238E27FC236}">
-                <a16:creationId xmlns:a16="http://schemas.microsoft.com/office/drawing/2014/main" id="{C08086E3-7FE7-BD9A-E81C-6944DB4DB6E0}"/>
-              </a:ext>
-            </a:extLst>
-          </p:cNvPr>
+          <p:cNvPr id="6" name="Footer Placeholder 5"/>
           <p:cNvSpPr>
             <a:spLocks noGrp="1"/>
           </p:cNvSpPr>
@@ -2894,37 +3032,36 @@
             <p:ph type="ftr" sz="quarter" idx="11"/>
           </p:nvPr>
         </p:nvSpPr>
+        <p:spPr>
+          <a:xfrm>
+            <a:off x="1447382" y="318640"/>
+            <a:ext cx="5541004" cy="320931"/>
+          </a:xfrm>
+        </p:spPr>
+        <p:txBody>
+          <a:bodyPr/>
+          <a:lstStyle/>
+          <a:p>
+            <a:endParaRPr lang="en-US"/>
+          </a:p>
+        </p:txBody>
+      </p:sp>
+      <p:sp>
+        <p:nvSpPr>
+          <p:cNvPr id="7" name="Slide Number Placeholder 6"/>
+          <p:cNvSpPr>
+            <a:spLocks noGrp="1"/>
+          </p:cNvSpPr>
+          <p:nvPr>
+            <p:ph type="sldNum" sz="quarter" idx="12"/>
+          </p:nvPr>
+        </p:nvSpPr>
         <p:spPr/>
         <p:txBody>
           <a:bodyPr/>
           <a:lstStyle/>
           <a:p>
-            <a:endParaRPr lang="en-US"/>
-          </a:p>
-        </p:txBody>
-      </p:sp>
-      <p:sp>
-        <p:nvSpPr>
-          <p:cNvPr id="7" name="Slide Number Placeholder 6">
-            <a:extLst>
-              <a:ext uri="{FF2B5EF4-FFF2-40B4-BE49-F238E27FC236}">
-                <a16:creationId xmlns:a16="http://schemas.microsoft.com/office/drawing/2014/main" id="{C4F74A6E-EACD-0B90-C8E1-C0E1CEFD3FF8}"/>
-              </a:ext>
-            </a:extLst>
-          </p:cNvPr>
-          <p:cNvSpPr>
-            <a:spLocks noGrp="1"/>
-          </p:cNvSpPr>
-          <p:nvPr>
-            <p:ph type="sldNum" sz="quarter" idx="12"/>
-          </p:nvPr>
-        </p:nvSpPr>
-        <p:spPr/>
-        <p:txBody>
-          <a:bodyPr/>
-          <a:lstStyle/>
-          <a:p>
-            <a:fld id="{BA1408D6-A18F-4DEF-8108-D3F1A5E4F663}" type="slidenum">
+            <a:fld id="{41970ED4-46CD-4B2B-B2B3-745DA35D2A58}" type="slidenum">
               <a:rPr lang="en-US" smtClean="0"/>
               <a:t>‹#›</a:t>
             </a:fld>
@@ -2932,10 +3069,41 @@
           </a:p>
         </p:txBody>
       </p:sp>
+      <p:cxnSp>
+        <p:nvCxnSpPr>
+          <p:cNvPr id="31" name="Straight Connector 30"/>
+          <p:cNvCxnSpPr/>
+          <p:nvPr/>
+        </p:nvCxnSpPr>
+        <p:spPr>
+          <a:xfrm>
+            <a:off x="1447382" y="3143605"/>
+            <a:ext cx="5527351" cy="0"/>
+          </a:xfrm>
+          <a:prstGeom prst="line">
+            <a:avLst/>
+          </a:prstGeom>
+          <a:ln w="31750"/>
+        </p:spPr>
+        <p:style>
+          <a:lnRef idx="3">
+            <a:schemeClr val="accent1"/>
+          </a:lnRef>
+          <a:fillRef idx="0">
+            <a:schemeClr val="accent1"/>
+          </a:fillRef>
+          <a:effectRef idx="2">
+            <a:schemeClr val="accent1"/>
+          </a:effectRef>
+          <a:fontRef idx="minor">
+            <a:schemeClr val="tx1"/>
+          </a:fontRef>
+        </p:style>
+      </p:cxnSp>
     </p:spTree>
     <p:extLst>
       <p:ext uri="{BB962C8B-B14F-4D97-AF65-F5344CB8AC3E}">
-        <p14:creationId xmlns:p14="http://schemas.microsoft.com/office/powerpoint/2010/main" val="826574400"/>
+        <p14:creationId xmlns:p14="http://schemas.microsoft.com/office/powerpoint/2010/main" val="3991664244"/>
       </p:ext>
     </p:extLst>
   </p:cSld>
@@ -2949,8 +3117,8 @@
 <p:sldMaster xmlns:a="http://schemas.openxmlformats.org/drawingml/2006/main" xmlns:r="http://schemas.openxmlformats.org/officeDocument/2006/relationships" xmlns:p="http://schemas.openxmlformats.org/presentationml/2006/main">
   <p:cSld>
     <p:bg>
-      <p:bgRef idx="1001">
-        <a:schemeClr val="bg1"/>
+      <p:bgRef idx="1003">
+        <a:schemeClr val="bg2"/>
       </p:bgRef>
     </p:bg>
     <p:spTree>
@@ -2969,149 +3137,211 @@
       </p:grpSpPr>
       <p:sp>
         <p:nvSpPr>
-          <p:cNvPr id="2" name="Title Placeholder 1">
+          <p:cNvPr id="8" name="Rectangle 7"/>
+          <p:cNvSpPr/>
+          <p:nvPr/>
+        </p:nvSpPr>
+        <p:spPr>
+          <a:xfrm>
+            <a:off x="0" y="2019476"/>
+            <a:ext cx="12192000" cy="4105941"/>
+          </a:xfrm>
+          <a:prstGeom prst="rect">
+            <a:avLst/>
+          </a:prstGeom>
+          <a:gradFill flip="none" rotWithShape="1">
+            <a:gsLst>
+              <a:gs pos="0">
+                <a:schemeClr val="bg2">
+                  <a:alpha val="0"/>
+                </a:schemeClr>
+              </a:gs>
+              <a:gs pos="100000">
+                <a:schemeClr val="bg2"/>
+              </a:gs>
+            </a:gsLst>
+            <a:lin ang="5400000" scaled="0"/>
+            <a:tileRect/>
+          </a:gradFill>
+          <a:ln>
+            <a:noFill/>
+          </a:ln>
+        </p:spPr>
+        <p:style>
+          <a:lnRef idx="2">
+            <a:schemeClr val="accent1">
+              <a:shade val="50000"/>
+            </a:schemeClr>
+          </a:lnRef>
+          <a:fillRef idx="1">
+            <a:schemeClr val="accent1"/>
+          </a:fillRef>
+          <a:effectRef idx="0">
+            <a:schemeClr val="accent1"/>
+          </a:effectRef>
+          <a:fontRef idx="minor">
+            <a:schemeClr val="lt1"/>
+          </a:fontRef>
+        </p:style>
+      </p:sp>
+      <p:pic>
+        <p:nvPicPr>
+          <p:cNvPr id="7" name="Picture 6"/>
+          <p:cNvPicPr>
+            <a:picLocks noChangeAspect="1"/>
+          </p:cNvPicPr>
+          <p:nvPr/>
+        </p:nvPicPr>
+        <p:blipFill rotWithShape="1">
+          <a:blip r:embed="rId14">
             <a:extLst>
-              <a:ext uri="{FF2B5EF4-FFF2-40B4-BE49-F238E27FC236}">
-                <a16:creationId xmlns:a16="http://schemas.microsoft.com/office/drawing/2014/main" id="{2CFEF5E5-949B-B333-1E64-1A020E84700D}"/>
+              <a:ext uri="{28A0092B-C50C-407E-A947-70E740481C1C}">
+                <a14:useLocalDpi xmlns:a14="http://schemas.microsoft.com/office/drawing/2010/main" val="0"/>
               </a:ext>
             </a:extLst>
-          </p:cNvPr>
-          <p:cNvSpPr>
-            <a:spLocks noGrp="1"/>
-          </p:cNvSpPr>
-          <p:nvPr>
-            <p:ph type="title"/>
-          </p:nvPr>
-        </p:nvSpPr>
-        <p:spPr>
+          </a:blip>
+          <a:srcRect t="1538" b="-1538"/>
+          <a:stretch/>
+        </p:blipFill>
+        <p:spPr bwMode="black">
           <a:xfrm>
-            <a:off x="838200" y="365125"/>
-            <a:ext cx="10515600" cy="1325563"/>
+            <a:off x="0" y="6126480"/>
+            <a:ext cx="12192000" cy="742950"/>
           </a:xfrm>
           <a:prstGeom prst="rect">
             <a:avLst/>
           </a:prstGeom>
         </p:spPr>
-        <p:txBody>
-          <a:bodyPr vert="horz" lIns="91440" tIns="45720" rIns="91440" bIns="45720" rtlCol="0" anchor="ctr">
-            <a:normAutofit/>
-          </a:bodyPr>
-          <a:lstStyle/>
-          <a:p>
-            <a:r>
-              <a:rPr lang="en-US"/>
-              <a:t>Click to edit Master title style</a:t>
-            </a:r>
-          </a:p>
-        </p:txBody>
-      </p:sp>
-      <p:sp>
-        <p:nvSpPr>
-          <p:cNvPr id="3" name="Text Placeholder 2">
-            <a:extLst>
-              <a:ext uri="{FF2B5EF4-FFF2-40B4-BE49-F238E27FC236}">
-                <a16:creationId xmlns:a16="http://schemas.microsoft.com/office/drawing/2014/main" id="{D09DD7B6-D007-A326-A532-B634A4CB8BC9}"/>
-              </a:ext>
-            </a:extLst>
-          </p:cNvPr>
-          <p:cNvSpPr>
-            <a:spLocks noGrp="1"/>
-          </p:cNvSpPr>
-          <p:nvPr>
-            <p:ph type="body" idx="1"/>
+      </p:pic>
+      <p:sp>
+        <p:nvSpPr>
+          <p:cNvPr id="2" name="Title Placeholder 1"/>
+          <p:cNvSpPr>
+            <a:spLocks noGrp="1"/>
+          </p:cNvSpPr>
+          <p:nvPr>
+            <p:ph type="title"/>
           </p:nvPr>
         </p:nvSpPr>
         <p:spPr>
           <a:xfrm>
-            <a:off x="838200" y="1825625"/>
-            <a:ext cx="10515600" cy="4351338"/>
+            <a:off x="1451579" y="804519"/>
+            <a:ext cx="9603275" cy="1049235"/>
           </a:xfrm>
           <a:prstGeom prst="rect">
             <a:avLst/>
           </a:prstGeom>
         </p:spPr>
         <p:txBody>
-          <a:bodyPr vert="horz" lIns="91440" tIns="45720" rIns="91440" bIns="45720" rtlCol="0">
+          <a:bodyPr vert="horz" lIns="91440" tIns="45720" rIns="91440" bIns="45720" rtlCol="0" anchor="t">
             <a:normAutofit/>
           </a:bodyPr>
           <a:lstStyle/>
           <a:p>
-            <a:pPr lvl="0"/>
             <a:r>
               <a:rPr lang="en-US"/>
-              <a:t>Click to edit Master text styles</a:t>
-            </a:r>
-          </a:p>
-          <a:p>
-            <a:pPr lvl="1"/>
-            <a:r>
-              <a:rPr lang="en-US"/>
-              <a:t>Second level</a:t>
-            </a:r>
-          </a:p>
-          <a:p>
-            <a:pPr lvl="2"/>
-            <a:r>
-              <a:rPr lang="en-US"/>
-              <a:t>Third level</a:t>
-            </a:r>
-          </a:p>
-          <a:p>
-            <a:pPr lvl="3"/>
-            <a:r>
-              <a:rPr lang="en-US"/>
-              <a:t>Fourth level</a:t>
-            </a:r>
-          </a:p>
-          <a:p>
-            <a:pPr lvl="4"/>
-            <a:r>
-              <a:rPr lang="en-US"/>
-              <a:t>Fifth level</a:t>
-            </a:r>
-          </a:p>
-        </p:txBody>
-      </p:sp>
-      <p:sp>
-        <p:nvSpPr>
-          <p:cNvPr id="4" name="Date Placeholder 3">
-            <a:extLst>
-              <a:ext uri="{FF2B5EF4-FFF2-40B4-BE49-F238E27FC236}">
-                <a16:creationId xmlns:a16="http://schemas.microsoft.com/office/drawing/2014/main" id="{57033C3A-FEA4-B92B-3716-9BA11DE67E88}"/>
-              </a:ext>
-            </a:extLst>
-          </p:cNvPr>
-          <p:cNvSpPr>
-            <a:spLocks noGrp="1"/>
-          </p:cNvSpPr>
-          <p:nvPr>
-            <p:ph type="dt" sz="half" idx="2"/>
+              <a:t>Click to edit Master title style</a:t>
+            </a:r>
+            <a:endParaRPr lang="en-US" dirty="0"/>
+          </a:p>
+        </p:txBody>
+      </p:sp>
+      <p:sp>
+        <p:nvSpPr>
+          <p:cNvPr id="3" name="Text Placeholder 2"/>
+          <p:cNvSpPr>
+            <a:spLocks noGrp="1"/>
+          </p:cNvSpPr>
+          <p:nvPr>
+            <p:ph type="body" idx="1"/>
           </p:nvPr>
         </p:nvSpPr>
         <p:spPr>
           <a:xfrm>
-            <a:off x="838200" y="6356350"/>
-            <a:ext cx="2743200" cy="365125"/>
+            <a:off x="1451579" y="2015732"/>
+            <a:ext cx="9603275" cy="3450613"/>
           </a:xfrm>
           <a:prstGeom prst="rect">
             <a:avLst/>
           </a:prstGeom>
         </p:spPr>
         <p:txBody>
+          <a:bodyPr vert="horz" lIns="91440" tIns="45720" rIns="91440" bIns="45720" rtlCol="0">
+            <a:normAutofit/>
+          </a:bodyPr>
+          <a:lstStyle/>
+          <a:p>
+            <a:pPr lvl="0"/>
+            <a:r>
+              <a:rPr lang="en-US"/>
+              <a:t>Click to edit Master text styles</a:t>
+            </a:r>
+          </a:p>
+          <a:p>
+            <a:pPr lvl="1"/>
+            <a:r>
+              <a:rPr lang="en-US"/>
+              <a:t>Second level</a:t>
+            </a:r>
+          </a:p>
+          <a:p>
+            <a:pPr lvl="2"/>
+            <a:r>
+              <a:rPr lang="en-US"/>
+              <a:t>Third level</a:t>
+            </a:r>
+          </a:p>
+          <a:p>
+            <a:pPr lvl="3"/>
+            <a:r>
+              <a:rPr lang="en-US"/>
+              <a:t>Fourth level</a:t>
+            </a:r>
+          </a:p>
+          <a:p>
+            <a:pPr lvl="4"/>
+            <a:r>
+              <a:rPr lang="en-US"/>
+              <a:t>Fifth level</a:t>
+            </a:r>
+            <a:endParaRPr lang="en-US" dirty="0"/>
+          </a:p>
+        </p:txBody>
+      </p:sp>
+      <p:sp>
+        <p:nvSpPr>
+          <p:cNvPr id="4" name="Date Placeholder 3"/>
+          <p:cNvSpPr>
+            <a:spLocks noGrp="1"/>
+          </p:cNvSpPr>
+          <p:nvPr>
+            <p:ph type="dt" sz="half" idx="2"/>
+          </p:nvPr>
+        </p:nvSpPr>
+        <p:spPr>
+          <a:xfrm>
+            <a:off x="7554138" y="330370"/>
+            <a:ext cx="3500715" cy="309201"/>
+          </a:xfrm>
+          <a:prstGeom prst="rect">
+            <a:avLst/>
+          </a:prstGeom>
+        </p:spPr>
+        <p:txBody>
           <a:bodyPr vert="horz" lIns="91440" tIns="45720" rIns="91440" bIns="45720" rtlCol="0" anchor="ctr"/>
           <a:lstStyle>
-            <a:lvl1pPr algn="l">
-              <a:defRPr sz="1200">
+            <a:lvl1pPr algn="r">
+              <a:defRPr sz="1000">
                 <a:solidFill>
                   <a:schemeClr val="tx1">
-                    <a:tint val="82000"/>
+                    <a:tint val="75000"/>
                   </a:schemeClr>
                 </a:solidFill>
               </a:defRPr>
             </a:lvl1pPr>
           </a:lstStyle>
           <a:p>
-            <a:fld id="{DE210632-9A01-4467-ACBB-4774DF0A0BAE}" type="datetimeFigureOut">
+            <a:fld id="{C823E295-28DF-4E71-9F53-D45207DE2860}" type="datetimeFigureOut">
               <a:rPr lang="en-US" smtClean="0"/>
               <a:t>5/20/2026</a:t>
             </a:fld>
@@ -3121,13 +3351,7 @@
       </p:sp>
       <p:sp>
         <p:nvSpPr>
-          <p:cNvPr id="5" name="Footer Placeholder 4">
-            <a:extLst>
-              <a:ext uri="{FF2B5EF4-FFF2-40B4-BE49-F238E27FC236}">
-                <a16:creationId xmlns:a16="http://schemas.microsoft.com/office/drawing/2014/main" id="{46BA0E47-842D-AD03-2E59-69BE688263C7}"/>
-              </a:ext>
-            </a:extLst>
-          </p:cNvPr>
+          <p:cNvPr id="5" name="Footer Placeholder 4"/>
           <p:cNvSpPr>
             <a:spLocks noGrp="1"/>
           </p:cNvSpPr>
@@ -3137,8 +3361,8 @@
         </p:nvSpPr>
         <p:spPr>
           <a:xfrm>
-            <a:off x="4038600" y="6356350"/>
-            <a:ext cx="4114800" cy="365125"/>
+            <a:off x="1451579" y="329307"/>
+            <a:ext cx="5938836" cy="309201"/>
           </a:xfrm>
           <a:prstGeom prst="rect">
             <a:avLst/>
@@ -3147,11 +3371,11 @@
         <p:txBody>
           <a:bodyPr vert="horz" lIns="91440" tIns="45720" rIns="91440" bIns="45720" rtlCol="0" anchor="ctr"/>
           <a:lstStyle>
-            <a:lvl1pPr algn="ctr">
-              <a:defRPr sz="1200">
+            <a:lvl1pPr algn="l">
+              <a:defRPr sz="1000">
                 <a:solidFill>
                   <a:schemeClr val="tx1">
-                    <a:tint val="82000"/>
+                    <a:tint val="75000"/>
                   </a:schemeClr>
                 </a:solidFill>
               </a:defRPr>
@@ -3164,13 +3388,7 @@
       </p:sp>
       <p:sp>
         <p:nvSpPr>
-          <p:cNvPr id="6" name="Slide Number Placeholder 5">
-            <a:extLst>
-              <a:ext uri="{FF2B5EF4-FFF2-40B4-BE49-F238E27FC236}">
-                <a16:creationId xmlns:a16="http://schemas.microsoft.com/office/drawing/2014/main" id="{CC3D77C9-91A0-4EA9-7386-44DA1D870D70}"/>
-              </a:ext>
-            </a:extLst>
-          </p:cNvPr>
+          <p:cNvPr id="6" name="Slide Number Placeholder 5"/>
           <p:cNvSpPr>
             <a:spLocks noGrp="1"/>
           </p:cNvSpPr>
@@ -3180,28 +3398,26 @@
         </p:nvSpPr>
         <p:spPr>
           <a:xfrm>
-            <a:off x="8610600" y="6356350"/>
-            <a:ext cx="2743200" cy="365125"/>
+            <a:off x="480060" y="798973"/>
+            <a:ext cx="811019" cy="503578"/>
           </a:xfrm>
           <a:prstGeom prst="rect">
             <a:avLst/>
           </a:prstGeom>
         </p:spPr>
         <p:txBody>
-          <a:bodyPr vert="horz" lIns="91440" tIns="45720" rIns="91440" bIns="45720" rtlCol="0" anchor="ctr"/>
+          <a:bodyPr vert="horz" lIns="91440" tIns="45720" rIns="91440" bIns="45720" rtlCol="0" anchor="t"/>
           <a:lstStyle>
             <a:lvl1pPr algn="r">
-              <a:defRPr sz="1200">
+              <a:defRPr sz="2800">
                 <a:solidFill>
-                  <a:schemeClr val="tx1">
-                    <a:tint val="82000"/>
-                  </a:schemeClr>
+                  <a:schemeClr val="accent1"/>
                 </a:solidFill>
               </a:defRPr>
             </a:lvl1pPr>
           </a:lstStyle>
           <a:p>
-            <a:fld id="{BA1408D6-A18F-4DEF-8108-D3F1A5E4F663}" type="slidenum">
+            <a:fld id="{41970ED4-46CD-4B2B-B2B3-745DA35D2A58}" type="slidenum">
               <a:rPr lang="en-US" smtClean="0"/>
               <a:t>‹#›</a:t>
             </a:fld>
@@ -3209,27 +3425,64 @@
           </a:p>
         </p:txBody>
       </p:sp>
+      <p:cxnSp>
+        <p:nvCxnSpPr>
+          <p:cNvPr id="10" name="Straight Connector 9"/>
+          <p:cNvCxnSpPr/>
+          <p:nvPr/>
+        </p:nvCxnSpPr>
+        <p:spPr>
+          <a:xfrm>
+            <a:off x="0" y="6128413"/>
+            <a:ext cx="12192000" cy="0"/>
+          </a:xfrm>
+          <a:prstGeom prst="line">
+            <a:avLst/>
+          </a:prstGeom>
+          <a:ln w="12700">
+            <a:solidFill>
+              <a:srgbClr val="000001">
+                <a:alpha val="20000"/>
+              </a:srgbClr>
+            </a:solidFill>
+          </a:ln>
+        </p:spPr>
+        <p:style>
+          <a:lnRef idx="1">
+            <a:schemeClr val="accent1"/>
+          </a:lnRef>
+          <a:fillRef idx="0">
+            <a:schemeClr val="accent1"/>
+          </a:fillRef>
+          <a:effectRef idx="0">
+            <a:schemeClr val="accent1"/>
+          </a:effectRef>
+          <a:fontRef idx="minor">
+            <a:schemeClr val="tx1"/>
+          </a:fontRef>
+        </p:style>
+      </p:cxnSp>
     </p:spTree>
     <p:extLst>
       <p:ext uri="{BB962C8B-B14F-4D97-AF65-F5344CB8AC3E}">
-        <p14:creationId xmlns:p14="http://schemas.microsoft.com/office/powerpoint/2010/main" val="2571746924"/>
+        <p14:creationId xmlns:p14="http://schemas.microsoft.com/office/powerpoint/2010/main" val="3836137012"/>
       </p:ext>
     </p:extLst>
   </p:cSld>
   <p:clrMap bg1="lt1" tx1="dk1" bg2="lt2" tx2="dk2" accent1="accent1" accent2="accent2" accent3="accent3" accent4="accent4" accent5="accent5" accent6="accent6" hlink="hlink" folHlink="folHlink"/>
   <p:sldLayoutIdLst>
-    <p:sldLayoutId id="2147483649" r:id="rId1"/>
-    <p:sldLayoutId id="2147483650" r:id="rId2"/>
-    <p:sldLayoutId id="2147483651" r:id="rId3"/>
-    <p:sldLayoutId id="2147483652" r:id="rId4"/>
-    <p:sldLayoutId id="2147483653" r:id="rId5"/>
-    <p:sldLayoutId id="2147483654" r:id="rId6"/>
-    <p:sldLayoutId id="2147483655" r:id="rId7"/>
-    <p:sldLayoutId id="2147483656" r:id="rId8"/>
-    <p:sldLayoutId id="2147483657" r:id="rId9"/>
-    <p:sldLayoutId id="2147483658" r:id="rId10"/>
-    <p:sldLayoutId id="2147483659" r:id="rId11"/>
-    <p:sldLayoutId id="2147483660" r:id="rId12"/>
+    <p:sldLayoutId id="2147483662" r:id="rId1"/>
+    <p:sldLayoutId id="2147483663" r:id="rId2"/>
+    <p:sldLayoutId id="2147483664" r:id="rId3"/>
+    <p:sldLayoutId id="2147483665" r:id="rId4"/>
+    <p:sldLayoutId id="2147483666" r:id="rId5"/>
+    <p:sldLayoutId id="2147483667" r:id="rId6"/>
+    <p:sldLayoutId id="2147483668" r:id="rId7"/>
+    <p:sldLayoutId id="2147483669" r:id="rId8"/>
+    <p:sldLayoutId id="2147483670" r:id="rId9"/>
+    <p:sldLayoutId id="2147483671" r:id="rId10"/>
+    <p:sldLayoutId id="2147483672" r:id="rId11"/>
+    <p:sldLayoutId id="2147483673" r:id="rId12"/>
   </p:sldLayoutIdLst>
   <p:txStyles>
     <p:titleStyle>
@@ -3241,10 +3494,11 @@
           <a:spcPct val="0"/>
         </a:spcBef>
         <a:buNone/>
-        <a:defRPr sz="4400" kern="1200">
+        <a:defRPr sz="3200" b="0" i="0" kern="1200" cap="all">
           <a:solidFill>
             <a:schemeClr val="tx1"/>
           </a:solidFill>
+          <a:effectLst/>
           <a:latin typeface="+mj-lt"/>
           <a:ea typeface="+mj-ea"/>
           <a:cs typeface="+mj-cs"/>
@@ -3254,17 +3508,22 @@
     <p:bodyStyle>
       <a:lvl1pPr marL="228600" indent="-228600" algn="l" defTabSz="914400" rtl="0" eaLnBrk="1" latinLnBrk="0" hangingPunct="1">
         <a:lnSpc>
-          <a:spcPct val="90000"/>
+          <a:spcPct val="120000"/>
         </a:lnSpc>
         <a:spcBef>
           <a:spcPts val="1000"/>
         </a:spcBef>
+        <a:buClr>
+          <a:schemeClr val="accent1"/>
+        </a:buClr>
+        <a:buSzPct val="100000"/>
         <a:buFont typeface="Arial" panose="020B0604020202020204" pitchFamily="34" charset="0"/>
         <a:buChar char="•"/>
-        <a:defRPr sz="2800" kern="1200">
+        <a:defRPr sz="2000" kern="1200">
           <a:solidFill>
             <a:schemeClr val="tx1"/>
           </a:solidFill>
+          <a:effectLst/>
           <a:latin typeface="+mn-lt"/>
           <a:ea typeface="+mn-ea"/>
           <a:cs typeface="+mn-cs"/>
@@ -3272,17 +3531,22 @@
       </a:lvl1pPr>
       <a:lvl2pPr marL="685800" indent="-228600" algn="l" defTabSz="914400" rtl="0" eaLnBrk="1" latinLnBrk="0" hangingPunct="1">
         <a:lnSpc>
-          <a:spcPct val="90000"/>
+          <a:spcPct val="120000"/>
         </a:lnSpc>
         <a:spcBef>
           <a:spcPts val="500"/>
         </a:spcBef>
+        <a:buClr>
+          <a:schemeClr val="accent1"/>
+        </a:buClr>
+        <a:buSzPct val="100000"/>
         <a:buFont typeface="Arial" panose="020B0604020202020204" pitchFamily="34" charset="0"/>
         <a:buChar char="•"/>
-        <a:defRPr sz="2400" kern="1200">
+        <a:defRPr sz="1800" kern="1200" cap="none" baseline="0">
           <a:solidFill>
             <a:schemeClr val="tx1"/>
           </a:solidFill>
+          <a:effectLst/>
           <a:latin typeface="+mn-lt"/>
           <a:ea typeface="+mn-ea"/>
           <a:cs typeface="+mn-cs"/>
@@ -3290,17 +3554,22 @@
       </a:lvl2pPr>
       <a:lvl3pPr marL="1143000" indent="-228600" algn="l" defTabSz="914400" rtl="0" eaLnBrk="1" latinLnBrk="0" hangingPunct="1">
         <a:lnSpc>
-          <a:spcPct val="90000"/>
+          <a:spcPct val="120000"/>
         </a:lnSpc>
         <a:spcBef>
           <a:spcPts val="500"/>
         </a:spcBef>
+        <a:buClr>
+          <a:schemeClr val="accent1"/>
+        </a:buClr>
+        <a:buSzPct val="100000"/>
         <a:buFont typeface="Arial" panose="020B0604020202020204" pitchFamily="34" charset="0"/>
         <a:buChar char="•"/>
-        <a:defRPr sz="2000" kern="1200">
+        <a:defRPr sz="1600" kern="1200">
           <a:solidFill>
             <a:schemeClr val="tx1"/>
           </a:solidFill>
+          <a:effectLst/>
           <a:latin typeface="+mn-lt"/>
           <a:ea typeface="+mn-ea"/>
           <a:cs typeface="+mn-cs"/>
@@ -3308,17 +3577,22 @@
       </a:lvl3pPr>
       <a:lvl4pPr marL="1600200" indent="-228600" algn="l" defTabSz="914400" rtl="0" eaLnBrk="1" latinLnBrk="0" hangingPunct="1">
         <a:lnSpc>
-          <a:spcPct val="90000"/>
+          <a:spcPct val="120000"/>
         </a:lnSpc>
         <a:spcBef>
           <a:spcPts val="500"/>
         </a:spcBef>
+        <a:buClr>
+          <a:schemeClr val="accent1"/>
+        </a:buClr>
+        <a:buSzPct val="100000"/>
         <a:buFont typeface="Arial" panose="020B0604020202020204" pitchFamily="34" charset="0"/>
         <a:buChar char="•"/>
-        <a:defRPr sz="1800" kern="1200">
+        <a:defRPr sz="1400" kern="1200" cap="none" baseline="0">
           <a:solidFill>
             <a:schemeClr val="tx1"/>
           </a:solidFill>
+          <a:effectLst/>
           <a:latin typeface="+mn-lt"/>
           <a:ea typeface="+mn-ea"/>
           <a:cs typeface="+mn-cs"/>
@@ -3326,17 +3600,22 @@
       </a:lvl4pPr>
       <a:lvl5pPr marL="2057400" indent="-228600" algn="l" defTabSz="914400" rtl="0" eaLnBrk="1" latinLnBrk="0" hangingPunct="1">
         <a:lnSpc>
-          <a:spcPct val="90000"/>
+          <a:spcPct val="120000"/>
         </a:lnSpc>
         <a:spcBef>
           <a:spcPts val="500"/>
         </a:spcBef>
+        <a:buClr>
+          <a:schemeClr val="accent1"/>
+        </a:buClr>
+        <a:buSzPct val="100000"/>
         <a:buFont typeface="Arial" panose="020B0604020202020204" pitchFamily="34" charset="0"/>
         <a:buChar char="•"/>
-        <a:defRPr sz="1800" kern="1200">
+        <a:defRPr sz="1200" kern="1200">
           <a:solidFill>
             <a:schemeClr val="tx1"/>
           </a:solidFill>
+          <a:effectLst/>
           <a:latin typeface="+mn-lt"/>
           <a:ea typeface="+mn-ea"/>
           <a:cs typeface="+mn-cs"/>
@@ -3344,17 +3623,22 @@
       </a:lvl5pPr>
       <a:lvl6pPr marL="2514600" indent="-228600" algn="l" defTabSz="914400" rtl="0" eaLnBrk="1" latinLnBrk="0" hangingPunct="1">
         <a:lnSpc>
-          <a:spcPct val="90000"/>
+          <a:spcPct val="120000"/>
         </a:lnSpc>
         <a:spcBef>
           <a:spcPts val="500"/>
         </a:spcBef>
+        <a:buClr>
+          <a:schemeClr val="accent1"/>
+        </a:buClr>
+        <a:buSzPct val="100000"/>
         <a:buFont typeface="Arial" panose="020B0604020202020204" pitchFamily="34" charset="0"/>
         <a:buChar char="•"/>
-        <a:defRPr sz="1800" kern="1200">
+        <a:defRPr sz="1200" kern="1200">
           <a:solidFill>
             <a:schemeClr val="tx1"/>
           </a:solidFill>
+          <a:effectLst/>
           <a:latin typeface="+mn-lt"/>
           <a:ea typeface="+mn-ea"/>
           <a:cs typeface="+mn-cs"/>
@@ -3362,17 +3646,22 @@
       </a:lvl6pPr>
       <a:lvl7pPr marL="2971800" indent="-228600" algn="l" defTabSz="914400" rtl="0" eaLnBrk="1" latinLnBrk="0" hangingPunct="1">
         <a:lnSpc>
-          <a:spcPct val="90000"/>
+          <a:spcPct val="120000"/>
         </a:lnSpc>
         <a:spcBef>
           <a:spcPts val="500"/>
         </a:spcBef>
+        <a:buClr>
+          <a:schemeClr val="accent1"/>
+        </a:buClr>
+        <a:buSzPct val="100000"/>
         <a:buFont typeface="Arial" panose="020B0604020202020204" pitchFamily="34" charset="0"/>
         <a:buChar char="•"/>
-        <a:defRPr sz="1800" kern="1200">
+        <a:defRPr sz="1200" kern="1200">
           <a:solidFill>
             <a:schemeClr val="tx1"/>
           </a:solidFill>
+          <a:effectLst/>
           <a:latin typeface="+mn-lt"/>
           <a:ea typeface="+mn-ea"/>
           <a:cs typeface="+mn-cs"/>
@@ -3380,17 +3669,22 @@
       </a:lvl7pPr>
       <a:lvl8pPr marL="3429000" indent="-228600" algn="l" defTabSz="914400" rtl="0" eaLnBrk="1" latinLnBrk="0" hangingPunct="1">
         <a:lnSpc>
-          <a:spcPct val="90000"/>
+          <a:spcPct val="120000"/>
         </a:lnSpc>
         <a:spcBef>
           <a:spcPts val="500"/>
         </a:spcBef>
+        <a:buClr>
+          <a:schemeClr val="accent1"/>
+        </a:buClr>
+        <a:buSzPct val="100000"/>
         <a:buFont typeface="Arial" panose="020B0604020202020204" pitchFamily="34" charset="0"/>
         <a:buChar char="•"/>
-        <a:defRPr sz="1800" kern="1200">
+        <a:defRPr sz="1200" kern="1200" baseline="0">
           <a:solidFill>
             <a:schemeClr val="tx1"/>
           </a:solidFill>
+          <a:effectLst/>
           <a:latin typeface="+mn-lt"/>
           <a:ea typeface="+mn-ea"/>
           <a:cs typeface="+mn-cs"/>
@@ -3398,17 +3692,22 @@
       </a:lvl8pPr>
       <a:lvl9pPr marL="3886200" indent="-228600" algn="l" defTabSz="914400" rtl="0" eaLnBrk="1" latinLnBrk="0" hangingPunct="1">
         <a:lnSpc>
-          <a:spcPct val="90000"/>
+          <a:spcPct val="120000"/>
         </a:lnSpc>
         <a:spcBef>
           <a:spcPts val="500"/>
         </a:spcBef>
+        <a:buClr>
+          <a:schemeClr val="accent1"/>
+        </a:buClr>
+        <a:buSzPct val="100000"/>
         <a:buFont typeface="Arial" panose="020B0604020202020204" pitchFamily="34" charset="0"/>
         <a:buChar char="•"/>
-        <a:defRPr sz="1800" kern="1200">
+        <a:defRPr sz="1200" kern="1200" baseline="0">
           <a:solidFill>
             <a:schemeClr val="tx1"/>
           </a:solidFill>
+          <a:effectLst/>
           <a:latin typeface="+mn-lt"/>
           <a:ea typeface="+mn-ea"/>
           <a:cs typeface="+mn-cs"/>
@@ -3536,7 +3835,7 @@
           <p:cNvPr id="2" name="Title 1">
             <a:extLst>
               <a:ext uri="{FF2B5EF4-FFF2-40B4-BE49-F238E27FC236}">
-                <a16:creationId xmlns:a16="http://schemas.microsoft.com/office/drawing/2014/main" id="{170752CB-C5E9-9EB6-103A-AC725D5E4594}"/>
+                <a16:creationId xmlns:a16="http://schemas.microsoft.com/office/drawing/2014/main" id="{73280129-A7F3-4127-6A2D-84B3DF842B65}"/>
               </a:ext>
             </a:extLst>
           </p:cNvPr>
@@ -3566,7 +3865,7 @@
           <p:cNvPr id="3" name="Subtitle 2">
             <a:extLst>
               <a:ext uri="{FF2B5EF4-FFF2-40B4-BE49-F238E27FC236}">
-                <a16:creationId xmlns:a16="http://schemas.microsoft.com/office/drawing/2014/main" id="{52D41C07-A0E2-7324-3931-341FB42A25BA}"/>
+                <a16:creationId xmlns:a16="http://schemas.microsoft.com/office/drawing/2014/main" id="{B6E4CEC4-8417-3B34-D251-AE71F5713B63}"/>
               </a:ext>
             </a:extLst>
           </p:cNvPr>
@@ -3602,7 +3901,7 @@
     </p:spTree>
     <p:extLst>
       <p:ext uri="{BB962C8B-B14F-4D97-AF65-F5344CB8AC3E}">
-        <p14:creationId xmlns:p14="http://schemas.microsoft.com/office/powerpoint/2010/main" val="2725860384"/>
+        <p14:creationId xmlns:p14="http://schemas.microsoft.com/office/powerpoint/2010/main" val="168121721"/>
       </p:ext>
     </p:extLst>
   </p:cSld>
@@ -3634,7 +3933,7 @@
           <p:cNvPr id="2" name="Title 1">
             <a:extLst>
               <a:ext uri="{FF2B5EF4-FFF2-40B4-BE49-F238E27FC236}">
-                <a16:creationId xmlns:a16="http://schemas.microsoft.com/office/drawing/2014/main" id="{89BB83ED-3C5D-060D-4C63-61B0353DC4AC}"/>
+                <a16:creationId xmlns:a16="http://schemas.microsoft.com/office/drawing/2014/main" id="{88AC46CF-605A-5B1E-1405-717D207C4A81}"/>
               </a:ext>
             </a:extLst>
           </p:cNvPr>
@@ -3664,7 +3963,7 @@
           <p:cNvPr id="3" name="Text Placeholder 2">
             <a:extLst>
               <a:ext uri="{FF2B5EF4-FFF2-40B4-BE49-F238E27FC236}">
-                <a16:creationId xmlns:a16="http://schemas.microsoft.com/office/drawing/2014/main" id="{C339BF1C-AEEE-B8EB-9B89-372134725A51}"/>
+                <a16:creationId xmlns:a16="http://schemas.microsoft.com/office/drawing/2014/main" id="{F44AF5ED-8046-B8B5-E045-66F151B6D0FF}"/>
               </a:ext>
             </a:extLst>
           </p:cNvPr>
@@ -3766,7 +4065,7 @@
     </p:spTree>
     <p:extLst>
       <p:ext uri="{BB962C8B-B14F-4D97-AF65-F5344CB8AC3E}">
-        <p14:creationId xmlns:p14="http://schemas.microsoft.com/office/powerpoint/2010/main" val="409105712"/>
+        <p14:creationId xmlns:p14="http://schemas.microsoft.com/office/powerpoint/2010/main" val="2056414596"/>
       </p:ext>
     </p:extLst>
   </p:cSld>
@@ -3798,7 +4097,7 @@
           <p:cNvPr id="2" name="Title 1">
             <a:extLst>
               <a:ext uri="{FF2B5EF4-FFF2-40B4-BE49-F238E27FC236}">
-                <a16:creationId xmlns:a16="http://schemas.microsoft.com/office/drawing/2014/main" id="{B9A10B19-AA87-2698-6795-3AF60D7525B4}"/>
+                <a16:creationId xmlns:a16="http://schemas.microsoft.com/office/drawing/2014/main" id="{26B9160E-548B-9B03-C0F2-ED881EF1079C}"/>
               </a:ext>
             </a:extLst>
           </p:cNvPr>
@@ -3828,7 +4127,7 @@
           <p:cNvPr id="3" name="Text Placeholder 2">
             <a:extLst>
               <a:ext uri="{FF2B5EF4-FFF2-40B4-BE49-F238E27FC236}">
-                <a16:creationId xmlns:a16="http://schemas.microsoft.com/office/drawing/2014/main" id="{0A4A4574-0314-BC89-FDB1-8A5FFBD603E9}"/>
+                <a16:creationId xmlns:a16="http://schemas.microsoft.com/office/drawing/2014/main" id="{DB220687-932F-1C37-E6FF-90927195D4C1}"/>
               </a:ext>
             </a:extLst>
           </p:cNvPr>
@@ -3914,7 +4213,7 @@
     </p:spTree>
     <p:extLst>
       <p:ext uri="{BB962C8B-B14F-4D97-AF65-F5344CB8AC3E}">
-        <p14:creationId xmlns:p14="http://schemas.microsoft.com/office/powerpoint/2010/main" val="933712877"/>
+        <p14:creationId xmlns:p14="http://schemas.microsoft.com/office/powerpoint/2010/main" val="2951519474"/>
       </p:ext>
     </p:extLst>
   </p:cSld>
@@ -3946,7 +4245,7 @@
           <p:cNvPr id="2" name="Title 1">
             <a:extLst>
               <a:ext uri="{FF2B5EF4-FFF2-40B4-BE49-F238E27FC236}">
-                <a16:creationId xmlns:a16="http://schemas.microsoft.com/office/drawing/2014/main" id="{90D7A635-3B0B-5130-5972-2DA00E5A0CDB}"/>
+                <a16:creationId xmlns:a16="http://schemas.microsoft.com/office/drawing/2014/main" id="{A6620D0E-ED1D-DA09-5128-9FE6564C8F19}"/>
               </a:ext>
             </a:extLst>
           </p:cNvPr>
@@ -3976,7 +4275,7 @@
           <p:cNvPr id="3" name="Subtitle 2">
             <a:extLst>
               <a:ext uri="{FF2B5EF4-FFF2-40B4-BE49-F238E27FC236}">
-                <a16:creationId xmlns:a16="http://schemas.microsoft.com/office/drawing/2014/main" id="{D6FAB935-F211-7144-86B6-A5028D19A61E}"/>
+                <a16:creationId xmlns:a16="http://schemas.microsoft.com/office/drawing/2014/main" id="{BF06D22F-AB46-628C-4B6F-F4A8A601643C}"/>
               </a:ext>
             </a:extLst>
           </p:cNvPr>
@@ -4004,7 +4303,7 @@
     </p:spTree>
     <p:extLst>
       <p:ext uri="{BB962C8B-B14F-4D97-AF65-F5344CB8AC3E}">
-        <p14:creationId xmlns:p14="http://schemas.microsoft.com/office/powerpoint/2010/main" val="2967047040"/>
+        <p14:creationId xmlns:p14="http://schemas.microsoft.com/office/powerpoint/2010/main" val="800917708"/>
       </p:ext>
     </p:extLst>
   </p:cSld>
@@ -4036,7 +4335,7 @@
           <p:cNvPr id="2" name="Title 1">
             <a:extLst>
               <a:ext uri="{FF2B5EF4-FFF2-40B4-BE49-F238E27FC236}">
-                <a16:creationId xmlns:a16="http://schemas.microsoft.com/office/drawing/2014/main" id="{16597970-780D-474F-937B-3583186E2EC1}"/>
+                <a16:creationId xmlns:a16="http://schemas.microsoft.com/office/drawing/2014/main" id="{FD9167F9-C11D-515A-460E-8F2147221331}"/>
               </a:ext>
             </a:extLst>
           </p:cNvPr>
@@ -4066,7 +4365,7 @@
           <p:cNvPr id="3" name="Text Placeholder 2">
             <a:extLst>
               <a:ext uri="{FF2B5EF4-FFF2-40B4-BE49-F238E27FC236}">
-                <a16:creationId xmlns:a16="http://schemas.microsoft.com/office/drawing/2014/main" id="{45BE29A1-659F-1F08-E65A-D5D117DA31BB}"/>
+                <a16:creationId xmlns:a16="http://schemas.microsoft.com/office/drawing/2014/main" id="{DE7B7420-A57B-1A32-29CD-A44CA36B3D66}"/>
               </a:ext>
             </a:extLst>
           </p:cNvPr>
@@ -4080,7 +4379,7 @@
         <p:spPr/>
         <p:txBody>
           <a:bodyPr>
-            <a:normAutofit/>
+            <a:normAutofit lnSpcReduction="10000"/>
           </a:bodyPr>
           <a:lstStyle/>
           <a:p>
@@ -4128,7 +4427,7 @@
     </p:spTree>
     <p:extLst>
       <p:ext uri="{BB962C8B-B14F-4D97-AF65-F5344CB8AC3E}">
-        <p14:creationId xmlns:p14="http://schemas.microsoft.com/office/powerpoint/2010/main" val="356699857"/>
+        <p14:creationId xmlns:p14="http://schemas.microsoft.com/office/powerpoint/2010/main" val="3802166759"/>
       </p:ext>
     </p:extLst>
   </p:cSld>
@@ -4160,7 +4459,7 @@
           <p:cNvPr id="2" name="Title 1">
             <a:extLst>
               <a:ext uri="{FF2B5EF4-FFF2-40B4-BE49-F238E27FC236}">
-                <a16:creationId xmlns:a16="http://schemas.microsoft.com/office/drawing/2014/main" id="{2C476A41-68C3-62EC-AFAC-00F26B6CBDF1}"/>
+                <a16:creationId xmlns:a16="http://schemas.microsoft.com/office/drawing/2014/main" id="{22EA5A2B-DF2E-A2D5-74CB-D7A399C062B1}"/>
               </a:ext>
             </a:extLst>
           </p:cNvPr>
@@ -4190,7 +4489,7 @@
           <p:cNvPr id="3" name="Text Placeholder 2">
             <a:extLst>
               <a:ext uri="{FF2B5EF4-FFF2-40B4-BE49-F238E27FC236}">
-                <a16:creationId xmlns:a16="http://schemas.microsoft.com/office/drawing/2014/main" id="{7A05C3B3-5C08-4304-AA18-C7B3A30B82CB}"/>
+                <a16:creationId xmlns:a16="http://schemas.microsoft.com/office/drawing/2014/main" id="{D4E79055-AB7E-B5F9-5708-5318A398C894}"/>
               </a:ext>
             </a:extLst>
           </p:cNvPr>
@@ -4276,7 +4575,7 @@
     </p:spTree>
     <p:extLst>
       <p:ext uri="{BB962C8B-B14F-4D97-AF65-F5344CB8AC3E}">
-        <p14:creationId xmlns:p14="http://schemas.microsoft.com/office/powerpoint/2010/main" val="2694505230"/>
+        <p14:creationId xmlns:p14="http://schemas.microsoft.com/office/powerpoint/2010/main" val="1730191215"/>
       </p:ext>
     </p:extLst>
   </p:cSld>
@@ -4308,7 +4607,7 @@
           <p:cNvPr id="2" name="Title 1">
             <a:extLst>
               <a:ext uri="{FF2B5EF4-FFF2-40B4-BE49-F238E27FC236}">
-                <a16:creationId xmlns:a16="http://schemas.microsoft.com/office/drawing/2014/main" id="{D838BD56-881D-B1CD-4857-957B9343C4FB}"/>
+                <a16:creationId xmlns:a16="http://schemas.microsoft.com/office/drawing/2014/main" id="{5212977E-9183-30CE-987A-4555196586F7}"/>
               </a:ext>
             </a:extLst>
           </p:cNvPr>
@@ -4338,7 +4637,7 @@
           <p:cNvPr id="3" name="Rectangle: Rounded Corners 2">
             <a:extLst>
               <a:ext uri="{FF2B5EF4-FFF2-40B4-BE49-F238E27FC236}">
-                <a16:creationId xmlns:a16="http://schemas.microsoft.com/office/drawing/2014/main" id="{43B262EA-03AD-2908-5A58-33D164C98943}"/>
+                <a16:creationId xmlns:a16="http://schemas.microsoft.com/office/drawing/2014/main" id="{C0B1B94F-7591-FB51-EAEB-121FA56712FF}"/>
               </a:ext>
             </a:extLst>
           </p:cNvPr>
@@ -4354,11 +4653,11 @@
             <a:avLst/>
           </a:prstGeom>
           <a:solidFill>
-            <a:srgbClr val="EAE2FE"/>
+            <a:srgbClr val="EAF1F8"/>
           </a:solidFill>
           <a:ln w="9525">
             <a:solidFill>
-              <a:srgbClr val="C8C8FA"/>
+              <a:srgbClr val="C8D8E8"/>
             </a:solidFill>
           </a:ln>
         </p:spPr>
@@ -4385,7 +4684,7 @@
             <a:r>
               <a:rPr lang="en-US" sz="1100">
                 <a:solidFill>
-                  <a:srgbClr val="1765CC"/>
+                  <a:srgbClr val="102A43"/>
                 </a:solidFill>
                 <a:latin typeface="Calibri" panose="020F0502020204030204" pitchFamily="34" charset="0"/>
               </a:rPr>
@@ -4396,7 +4695,7 @@
             <a:r>
               <a:rPr lang="en-US" sz="1100">
                 <a:solidFill>
-                  <a:srgbClr val="1765CC"/>
+                  <a:srgbClr val="102A43"/>
                 </a:solidFill>
                 <a:latin typeface="Calibri" panose="020F0502020204030204" pitchFamily="34" charset="0"/>
               </a:rPr>
@@ -4410,7 +4709,7 @@
           <p:cNvPr id="4" name="Rectangle: Rounded Corners 3">
             <a:extLst>
               <a:ext uri="{FF2B5EF4-FFF2-40B4-BE49-F238E27FC236}">
-                <a16:creationId xmlns:a16="http://schemas.microsoft.com/office/drawing/2014/main" id="{5AE276D9-B72A-CDA4-DCF3-1D8AF5BDEE64}"/>
+                <a16:creationId xmlns:a16="http://schemas.microsoft.com/office/drawing/2014/main" id="{5191654B-A031-CF93-A274-42970767BACB}"/>
               </a:ext>
             </a:extLst>
           </p:cNvPr>
@@ -4426,11 +4725,11 @@
             <a:avLst/>
           </a:prstGeom>
           <a:solidFill>
-            <a:srgbClr val="EAE2FE"/>
+            <a:srgbClr val="EAF1F8"/>
           </a:solidFill>
           <a:ln w="9525">
             <a:solidFill>
-              <a:srgbClr val="C8C8FA"/>
+              <a:srgbClr val="C8D8E8"/>
             </a:solidFill>
           </a:ln>
         </p:spPr>
@@ -4457,7 +4756,7 @@
             <a:r>
               <a:rPr lang="en-US" sz="1100">
                 <a:solidFill>
-                  <a:srgbClr val="1765CC"/>
+                  <a:srgbClr val="102A43"/>
                 </a:solidFill>
                 <a:latin typeface="Calibri" panose="020F0502020204030204" pitchFamily="34" charset="0"/>
               </a:rPr>
@@ -4468,7 +4767,7 @@
             <a:r>
               <a:rPr lang="en-US" sz="1100">
                 <a:solidFill>
-                  <a:srgbClr val="1765CC"/>
+                  <a:srgbClr val="102A43"/>
                 </a:solidFill>
                 <a:latin typeface="Calibri" panose="020F0502020204030204" pitchFamily="34" charset="0"/>
               </a:rPr>
@@ -4482,7 +4781,7 @@
           <p:cNvPr id="5" name="Rectangle: Rounded Corners 4">
             <a:extLst>
               <a:ext uri="{FF2B5EF4-FFF2-40B4-BE49-F238E27FC236}">
-                <a16:creationId xmlns:a16="http://schemas.microsoft.com/office/drawing/2014/main" id="{B809D94A-5CE8-3BB7-FFA3-DA7098EE0C09}"/>
+                <a16:creationId xmlns:a16="http://schemas.microsoft.com/office/drawing/2014/main" id="{9BA010C3-84CE-59EA-A908-C26A8F0FC4C5}"/>
               </a:ext>
             </a:extLst>
           </p:cNvPr>
@@ -4498,11 +4797,11 @@
             <a:avLst/>
           </a:prstGeom>
           <a:solidFill>
-            <a:srgbClr val="E6F4EA"/>
+            <a:srgbClr val="FAF3DD"/>
           </a:solidFill>
           <a:ln w="9525">
             <a:solidFill>
-              <a:srgbClr val="BDE5C8"/>
+              <a:srgbClr val="DAB86F"/>
             </a:solidFill>
           </a:ln>
         </p:spPr>
@@ -4529,7 +4828,7 @@
             <a:r>
               <a:rPr lang="en-US" sz="1100" b="1">
                 <a:solidFill>
-                  <a:srgbClr val="1E8E3E"/>
+                  <a:srgbClr val="B8860B"/>
                 </a:solidFill>
                 <a:latin typeface="Calibri" panose="020F0502020204030204" pitchFamily="34" charset="0"/>
               </a:rPr>
@@ -4543,7 +4842,7 @@
           <p:cNvPr id="6" name="Rectangle: Rounded Corners 5">
             <a:extLst>
               <a:ext uri="{FF2B5EF4-FFF2-40B4-BE49-F238E27FC236}">
-                <a16:creationId xmlns:a16="http://schemas.microsoft.com/office/drawing/2014/main" id="{331161AC-B009-1BB8-FDAD-422FBFFB6645}"/>
+                <a16:creationId xmlns:a16="http://schemas.microsoft.com/office/drawing/2014/main" id="{44FFE5E5-A2C4-197F-5E4B-BDA1D1A2E5C8}"/>
               </a:ext>
             </a:extLst>
           </p:cNvPr>
@@ -4563,7 +4862,7 @@
           </a:solidFill>
           <a:ln w="9525">
             <a:solidFill>
-              <a:srgbClr val="BDE5C8"/>
+              <a:srgbClr val="DAB86F"/>
             </a:solidFill>
           </a:ln>
         </p:spPr>
@@ -4591,7 +4890,7 @@
             <a:r>
               <a:rPr lang="en-US" sz="1200" b="1">
                 <a:solidFill>
-                  <a:srgbClr val="1765CC"/>
+                  <a:srgbClr val="102A43"/>
                 </a:solidFill>
                 <a:latin typeface="Calibri" panose="020F0502020204030204" pitchFamily="34" charset="0"/>
               </a:rPr>
@@ -4603,7 +4902,7 @@
             <a:r>
               <a:rPr lang="en-US" sz="1200" b="1">
                 <a:solidFill>
-                  <a:srgbClr val="1765CC"/>
+                  <a:srgbClr val="102A43"/>
                 </a:solidFill>
                 <a:latin typeface="Calibri" panose="020F0502020204030204" pitchFamily="34" charset="0"/>
               </a:rPr>
@@ -4617,7 +4916,7 @@
           <p:cNvPr id="7" name="Rectangle: Rounded Corners 6">
             <a:extLst>
               <a:ext uri="{FF2B5EF4-FFF2-40B4-BE49-F238E27FC236}">
-                <a16:creationId xmlns:a16="http://schemas.microsoft.com/office/drawing/2014/main" id="{476DE2B3-0C1D-721B-A828-C78BFFA7B9E3}"/>
+                <a16:creationId xmlns:a16="http://schemas.microsoft.com/office/drawing/2014/main" id="{EF76CF58-B15F-B8BF-8DDC-C4EC812862E4}"/>
               </a:ext>
             </a:extLst>
           </p:cNvPr>
@@ -4637,7 +4936,7 @@
           </a:solidFill>
           <a:ln w="9525">
             <a:solidFill>
-              <a:srgbClr val="BDE5C8"/>
+              <a:srgbClr val="DAB86F"/>
             </a:solidFill>
           </a:ln>
         </p:spPr>
@@ -4665,7 +4964,7 @@
             <a:r>
               <a:rPr lang="en-US" sz="1200" b="1">
                 <a:solidFill>
-                  <a:srgbClr val="1765CC"/>
+                  <a:srgbClr val="102A43"/>
                 </a:solidFill>
                 <a:latin typeface="Calibri" panose="020F0502020204030204" pitchFamily="34" charset="0"/>
               </a:rPr>
@@ -4677,7 +4976,7 @@
             <a:r>
               <a:rPr lang="en-US" sz="1200" b="1">
                 <a:solidFill>
-                  <a:srgbClr val="1765CC"/>
+                  <a:srgbClr val="102A43"/>
                 </a:solidFill>
                 <a:latin typeface="Calibri" panose="020F0502020204030204" pitchFamily="34" charset="0"/>
               </a:rPr>
@@ -4691,7 +4990,7 @@
           <p:cNvPr id="8" name="Rectangle: Rounded Corners 7">
             <a:extLst>
               <a:ext uri="{FF2B5EF4-FFF2-40B4-BE49-F238E27FC236}">
-                <a16:creationId xmlns:a16="http://schemas.microsoft.com/office/drawing/2014/main" id="{B859766C-A204-B1D7-4BD5-65031A44454B}"/>
+                <a16:creationId xmlns:a16="http://schemas.microsoft.com/office/drawing/2014/main" id="{0331C2DA-28C1-882B-7BE1-6BD6E6E657FB}"/>
               </a:ext>
             </a:extLst>
           </p:cNvPr>
@@ -4711,7 +5010,7 @@
           </a:solidFill>
           <a:ln w="9525">
             <a:solidFill>
-              <a:srgbClr val="BDE5C8"/>
+              <a:srgbClr val="DAB86F"/>
             </a:solidFill>
           </a:ln>
         </p:spPr>
@@ -4739,7 +5038,7 @@
             <a:r>
               <a:rPr lang="en-US" sz="1200" b="1">
                 <a:solidFill>
-                  <a:srgbClr val="1765CC"/>
+                  <a:srgbClr val="102A43"/>
                 </a:solidFill>
                 <a:latin typeface="Calibri" panose="020F0502020204030204" pitchFamily="34" charset="0"/>
               </a:rPr>
@@ -4751,7 +5050,7 @@
             <a:r>
               <a:rPr lang="en-US" sz="1200" b="1">
                 <a:solidFill>
-                  <a:srgbClr val="1765CC"/>
+                  <a:srgbClr val="102A43"/>
                 </a:solidFill>
                 <a:latin typeface="Calibri" panose="020F0502020204030204" pitchFamily="34" charset="0"/>
               </a:rPr>
@@ -4765,7 +5064,7 @@
           <p:cNvPr id="9" name="Rectangle: Rounded Corners 8">
             <a:extLst>
               <a:ext uri="{FF2B5EF4-FFF2-40B4-BE49-F238E27FC236}">
-                <a16:creationId xmlns:a16="http://schemas.microsoft.com/office/drawing/2014/main" id="{7C2DB6B3-9673-C58A-BE02-94CFD8A65FF7}"/>
+                <a16:creationId xmlns:a16="http://schemas.microsoft.com/office/drawing/2014/main" id="{9DC632A2-D704-0F4A-1C30-46F0EE4A01E3}"/>
               </a:ext>
             </a:extLst>
           </p:cNvPr>
@@ -4785,7 +5084,7 @@
           </a:solidFill>
           <a:ln w="9525">
             <a:solidFill>
-              <a:srgbClr val="BDE5C8"/>
+              <a:srgbClr val="DAB86F"/>
             </a:solidFill>
           </a:ln>
         </p:spPr>
@@ -4813,7 +5112,7 @@
             <a:r>
               <a:rPr lang="en-US" sz="1200" b="1">
                 <a:solidFill>
-                  <a:srgbClr val="1765CC"/>
+                  <a:srgbClr val="102A43"/>
                 </a:solidFill>
                 <a:latin typeface="Calibri" panose="020F0502020204030204" pitchFamily="34" charset="0"/>
               </a:rPr>
@@ -4825,7 +5124,7 @@
             <a:r>
               <a:rPr lang="en-US" sz="1200" b="1">
                 <a:solidFill>
-                  <a:srgbClr val="1765CC"/>
+                  <a:srgbClr val="102A43"/>
                 </a:solidFill>
                 <a:latin typeface="Calibri" panose="020F0502020204030204" pitchFamily="34" charset="0"/>
               </a:rPr>
@@ -4839,7 +5138,7 @@
           <p:cNvPr id="10" name="Rectangle: Rounded Corners 9">
             <a:extLst>
               <a:ext uri="{FF2B5EF4-FFF2-40B4-BE49-F238E27FC236}">
-                <a16:creationId xmlns:a16="http://schemas.microsoft.com/office/drawing/2014/main" id="{FFFF9E7B-6585-4045-FDB8-F799B70CB400}"/>
+                <a16:creationId xmlns:a16="http://schemas.microsoft.com/office/drawing/2014/main" id="{08D1A91E-AC68-81DE-366F-3DDD81DB5F20}"/>
               </a:ext>
             </a:extLst>
           </p:cNvPr>
@@ -4855,11 +5154,11 @@
             <a:avLst/>
           </a:prstGeom>
           <a:solidFill>
-            <a:srgbClr val="FEF7E0"/>
+            <a:srgbClr val="F0F4F8"/>
           </a:solidFill>
           <a:ln w="9525">
             <a:solidFill>
-              <a:srgbClr val="FADD8B"/>
+              <a:srgbClr val="B8C8D4"/>
             </a:solidFill>
           </a:ln>
         </p:spPr>
@@ -4886,7 +5185,7 @@
             <a:r>
               <a:rPr lang="en-US" sz="1100">
                 <a:solidFill>
-                  <a:srgbClr val="1765CC"/>
+                  <a:srgbClr val="102A43"/>
                 </a:solidFill>
                 <a:latin typeface="Calibri" panose="020F0502020204030204" pitchFamily="34" charset="0"/>
               </a:rPr>
@@ -4897,7 +5196,7 @@
             <a:r>
               <a:rPr lang="en-US" sz="1100">
                 <a:solidFill>
-                  <a:srgbClr val="1765CC"/>
+                  <a:srgbClr val="102A43"/>
                 </a:solidFill>
                 <a:latin typeface="Calibri" panose="020F0502020204030204" pitchFamily="34" charset="0"/>
               </a:rPr>
@@ -4911,7 +5210,7 @@
           <p:cNvPr id="11" name="Rectangle: Rounded Corners 10">
             <a:extLst>
               <a:ext uri="{FF2B5EF4-FFF2-40B4-BE49-F238E27FC236}">
-                <a16:creationId xmlns:a16="http://schemas.microsoft.com/office/drawing/2014/main" id="{D60ECCCE-8AA8-86C4-AC10-5F588764F848}"/>
+                <a16:creationId xmlns:a16="http://schemas.microsoft.com/office/drawing/2014/main" id="{71B587ED-6818-D6C6-01A5-AA85C2229F76}"/>
               </a:ext>
             </a:extLst>
           </p:cNvPr>
@@ -4927,11 +5226,11 @@
             <a:avLst/>
           </a:prstGeom>
           <a:solidFill>
-            <a:srgbClr val="FCE8E6"/>
+            <a:srgbClr val="E6EDF3"/>
           </a:solidFill>
           <a:ln w="9525">
             <a:solidFill>
-              <a:srgbClr val="FAC7BD"/>
+              <a:srgbClr val="C8D5DE"/>
             </a:solidFill>
           </a:ln>
         </p:spPr>
@@ -4958,7 +5257,7 @@
             <a:r>
               <a:rPr lang="en-US" sz="1100">
                 <a:solidFill>
-                  <a:srgbClr val="1765CC"/>
+                  <a:srgbClr val="102A43"/>
                 </a:solidFill>
                 <a:latin typeface="Calibri" panose="020F0502020204030204" pitchFamily="34" charset="0"/>
               </a:rPr>
@@ -4969,7 +5268,7 @@
             <a:r>
               <a:rPr lang="en-US" sz="1100">
                 <a:solidFill>
-                  <a:srgbClr val="1765CC"/>
+                  <a:srgbClr val="102A43"/>
                 </a:solidFill>
                 <a:latin typeface="Calibri" panose="020F0502020204030204" pitchFamily="34" charset="0"/>
               </a:rPr>
@@ -4981,7 +5280,7 @@
     </p:spTree>
     <p:extLst>
       <p:ext uri="{BB962C8B-B14F-4D97-AF65-F5344CB8AC3E}">
-        <p14:creationId xmlns:p14="http://schemas.microsoft.com/office/powerpoint/2010/main" val="4189292018"/>
+        <p14:creationId xmlns:p14="http://schemas.microsoft.com/office/powerpoint/2010/main" val="3385334765"/>
       </p:ext>
     </p:extLst>
   </p:cSld>
@@ -5013,7 +5312,7 @@
           <p:cNvPr id="2" name="Title 1">
             <a:extLst>
               <a:ext uri="{FF2B5EF4-FFF2-40B4-BE49-F238E27FC236}">
-                <a16:creationId xmlns:a16="http://schemas.microsoft.com/office/drawing/2014/main" id="{E9013F4A-C048-FCE3-84B7-DE1A58E846BA}"/>
+                <a16:creationId xmlns:a16="http://schemas.microsoft.com/office/drawing/2014/main" id="{C46EF0DB-4810-CC5D-F50D-2D205C7210A2}"/>
               </a:ext>
             </a:extLst>
           </p:cNvPr>
@@ -5043,7 +5342,7 @@
           <p:cNvPr id="3" name="Text Placeholder 2">
             <a:extLst>
               <a:ext uri="{FF2B5EF4-FFF2-40B4-BE49-F238E27FC236}">
-                <a16:creationId xmlns:a16="http://schemas.microsoft.com/office/drawing/2014/main" id="{05817EF9-FBEE-4C9A-C155-1AFE9C90553A}"/>
+                <a16:creationId xmlns:a16="http://schemas.microsoft.com/office/drawing/2014/main" id="{F6E5D678-AAF4-B438-2301-939B4765BDC8}"/>
               </a:ext>
             </a:extLst>
           </p:cNvPr>
@@ -5057,7 +5356,7 @@
         <p:spPr/>
         <p:txBody>
           <a:bodyPr>
-            <a:normAutofit fontScale="70000" lnSpcReduction="20000"/>
+            <a:normAutofit fontScale="85000" lnSpcReduction="20000"/>
           </a:bodyPr>
           <a:lstStyle/>
           <a:p>
@@ -5137,7 +5436,7 @@
     </p:spTree>
     <p:extLst>
       <p:ext uri="{BB962C8B-B14F-4D97-AF65-F5344CB8AC3E}">
-        <p14:creationId xmlns:p14="http://schemas.microsoft.com/office/powerpoint/2010/main" val="2396708432"/>
+        <p14:creationId xmlns:p14="http://schemas.microsoft.com/office/powerpoint/2010/main" val="3059556973"/>
       </p:ext>
     </p:extLst>
   </p:cSld>
@@ -5169,7 +5468,7 @@
           <p:cNvPr id="2" name="Title 1">
             <a:extLst>
               <a:ext uri="{FF2B5EF4-FFF2-40B4-BE49-F238E27FC236}">
-                <a16:creationId xmlns:a16="http://schemas.microsoft.com/office/drawing/2014/main" id="{0E00F460-94BD-D2A8-EDA1-DD2454C5E972}"/>
+                <a16:creationId xmlns:a16="http://schemas.microsoft.com/office/drawing/2014/main" id="{A8F4907F-3C46-AF81-9FD8-291E7A77E9FC}"/>
               </a:ext>
             </a:extLst>
           </p:cNvPr>
@@ -5199,7 +5498,7 @@
           <p:cNvPr id="3" name="Rectangle: Rounded Corners 2">
             <a:extLst>
               <a:ext uri="{FF2B5EF4-FFF2-40B4-BE49-F238E27FC236}">
-                <a16:creationId xmlns:a16="http://schemas.microsoft.com/office/drawing/2014/main" id="{CF136DA8-C310-354F-F139-49677D7B1AA7}"/>
+                <a16:creationId xmlns:a16="http://schemas.microsoft.com/office/drawing/2014/main" id="{B89C9E20-4D07-3896-7A37-B2C847087538}"/>
               </a:ext>
             </a:extLst>
           </p:cNvPr>
@@ -5215,11 +5514,11 @@
             <a:avLst/>
           </a:prstGeom>
           <a:solidFill>
-            <a:srgbClr val="EAE2FE"/>
+            <a:srgbClr val="EAF1F8"/>
           </a:solidFill>
           <a:ln w="9525">
             <a:solidFill>
-              <a:srgbClr val="C8C8FA"/>
+              <a:srgbClr val="C8D8E8"/>
             </a:solidFill>
           </a:ln>
         </p:spPr>
@@ -5247,7 +5546,7 @@
             <a:r>
               <a:rPr lang="en-US" sz="1100" b="1">
                 <a:solidFill>
-                  <a:srgbClr val="1A73E8"/>
+                  <a:srgbClr val="1F3A5F"/>
                 </a:solidFill>
                 <a:latin typeface="Calibri" panose="020F0502020204030204" pitchFamily="34" charset="0"/>
               </a:rPr>
@@ -5258,7 +5557,7 @@
             <a:pPr algn="ctr"/>
             <a:endParaRPr lang="en-US" sz="1100" b="1">
               <a:solidFill>
-                <a:srgbClr val="1A73E8"/>
+                <a:srgbClr val="1F3A5F"/>
               </a:solidFill>
               <a:latin typeface="Calibri" panose="020F0502020204030204" pitchFamily="34" charset="0"/>
             </a:endParaRPr>
@@ -5270,7 +5569,7 @@
           <p:cNvPr id="4" name="Rectangle: Rounded Corners 3">
             <a:extLst>
               <a:ext uri="{FF2B5EF4-FFF2-40B4-BE49-F238E27FC236}">
-                <a16:creationId xmlns:a16="http://schemas.microsoft.com/office/drawing/2014/main" id="{DCA93944-E8DD-FCAB-9156-4119613BCB42}"/>
+                <a16:creationId xmlns:a16="http://schemas.microsoft.com/office/drawing/2014/main" id="{D65264C1-02B1-6125-DA54-4AB33E126A04}"/>
               </a:ext>
             </a:extLst>
           </p:cNvPr>
@@ -5286,11 +5585,11 @@
             <a:avLst/>
           </a:prstGeom>
           <a:solidFill>
-            <a:srgbClr val="EAE2FE"/>
+            <a:srgbClr val="EAF1F8"/>
           </a:solidFill>
           <a:ln w="9525">
             <a:solidFill>
-              <a:srgbClr val="C8C8FA"/>
+              <a:srgbClr val="C8D8E8"/>
             </a:solidFill>
           </a:ln>
         </p:spPr>
@@ -5318,7 +5617,7 @@
             <a:r>
               <a:rPr lang="en-US" sz="1100" b="1">
                 <a:solidFill>
-                  <a:srgbClr val="1A73E8"/>
+                  <a:srgbClr val="1F3A5F"/>
                 </a:solidFill>
                 <a:latin typeface="Calibri" panose="020F0502020204030204" pitchFamily="34" charset="0"/>
               </a:rPr>
@@ -5330,7 +5629,7 @@
             <a:r>
               <a:rPr lang="en-US" sz="1100" b="1">
                 <a:solidFill>
-                  <a:srgbClr val="1A73E8"/>
+                  <a:srgbClr val="1F3A5F"/>
                 </a:solidFill>
                 <a:latin typeface="Calibri" panose="020F0502020204030204" pitchFamily="34" charset="0"/>
               </a:rPr>
@@ -5344,7 +5643,7 @@
           <p:cNvPr id="5" name="Rectangle: Rounded Corners 4">
             <a:extLst>
               <a:ext uri="{FF2B5EF4-FFF2-40B4-BE49-F238E27FC236}">
-                <a16:creationId xmlns:a16="http://schemas.microsoft.com/office/drawing/2014/main" id="{EC5E085D-BF18-26CB-51D6-7220F91FD4DD}"/>
+                <a16:creationId xmlns:a16="http://schemas.microsoft.com/office/drawing/2014/main" id="{73F930C6-EE54-4E91-E136-2CCBD5A1BF06}"/>
               </a:ext>
             </a:extLst>
           </p:cNvPr>
@@ -5360,11 +5659,11 @@
             <a:avLst/>
           </a:prstGeom>
           <a:solidFill>
-            <a:srgbClr val="EAE2FE"/>
+            <a:srgbClr val="EAF1F8"/>
           </a:solidFill>
           <a:ln w="9525">
             <a:solidFill>
-              <a:srgbClr val="C8C8FA"/>
+              <a:srgbClr val="C8D8E8"/>
             </a:solidFill>
           </a:ln>
         </p:spPr>
@@ -5392,7 +5691,7 @@
             <a:r>
               <a:rPr lang="en-US" sz="1100" b="1">
                 <a:solidFill>
-                  <a:srgbClr val="1765CC"/>
+                  <a:srgbClr val="102A43"/>
                 </a:solidFill>
                 <a:latin typeface="Calibri" panose="020F0502020204030204" pitchFamily="34" charset="0"/>
               </a:rPr>
@@ -5404,7 +5703,7 @@
             <a:r>
               <a:rPr lang="en-US" sz="1100" b="1">
                 <a:solidFill>
-                  <a:srgbClr val="1765CC"/>
+                  <a:srgbClr val="102A43"/>
                 </a:solidFill>
                 <a:latin typeface="Calibri" panose="020F0502020204030204" pitchFamily="34" charset="0"/>
               </a:rPr>
@@ -5418,7 +5717,7 @@
           <p:cNvPr id="6" name="Rectangle: Rounded Corners 5">
             <a:extLst>
               <a:ext uri="{FF2B5EF4-FFF2-40B4-BE49-F238E27FC236}">
-                <a16:creationId xmlns:a16="http://schemas.microsoft.com/office/drawing/2014/main" id="{3E0742AB-A94D-DFAC-1003-50713B499626}"/>
+                <a16:creationId xmlns:a16="http://schemas.microsoft.com/office/drawing/2014/main" id="{503ACC94-1DAC-485A-DF6E-AAF53B6D7BF5}"/>
               </a:ext>
             </a:extLst>
           </p:cNvPr>
@@ -5434,11 +5733,11 @@
             <a:avLst/>
           </a:prstGeom>
           <a:solidFill>
-            <a:srgbClr val="FEF7E0"/>
+            <a:srgbClr val="F0F4F8"/>
           </a:solidFill>
           <a:ln w="9525">
             <a:solidFill>
-              <a:srgbClr val="FADD8B"/>
+              <a:srgbClr val="B8C8D4"/>
             </a:solidFill>
           </a:ln>
         </p:spPr>
@@ -5466,7 +5765,7 @@
             <a:r>
               <a:rPr lang="en-US" sz="1100" b="1">
                 <a:solidFill>
-                  <a:srgbClr val="1765CC"/>
+                  <a:srgbClr val="102A43"/>
                 </a:solidFill>
                 <a:latin typeface="Calibri" panose="020F0502020204030204" pitchFamily="34" charset="0"/>
               </a:rPr>
@@ -5478,7 +5777,7 @@
             <a:r>
               <a:rPr lang="en-US" sz="1100" b="1">
                 <a:solidFill>
-                  <a:srgbClr val="1765CC"/>
+                  <a:srgbClr val="102A43"/>
                 </a:solidFill>
                 <a:latin typeface="Calibri" panose="020F0502020204030204" pitchFamily="34" charset="0"/>
               </a:rPr>
@@ -5492,7 +5791,7 @@
           <p:cNvPr id="7" name="Rectangle: Rounded Corners 6">
             <a:extLst>
               <a:ext uri="{FF2B5EF4-FFF2-40B4-BE49-F238E27FC236}">
-                <a16:creationId xmlns:a16="http://schemas.microsoft.com/office/drawing/2014/main" id="{BE556407-3F03-3B42-0F85-3D6B73950DCD}"/>
+                <a16:creationId xmlns:a16="http://schemas.microsoft.com/office/drawing/2014/main" id="{C55725B8-A8CB-4A57-041D-71ED927CC504}"/>
               </a:ext>
             </a:extLst>
           </p:cNvPr>
@@ -5508,11 +5807,11 @@
             <a:avLst/>
           </a:prstGeom>
           <a:solidFill>
-            <a:srgbClr val="FEF7E0"/>
+            <a:srgbClr val="F0F4F8"/>
           </a:solidFill>
           <a:ln w="9525">
             <a:solidFill>
-              <a:srgbClr val="FADD8B"/>
+              <a:srgbClr val="B8C8D4"/>
             </a:solidFill>
           </a:ln>
         </p:spPr>
@@ -5540,7 +5839,7 @@
             <a:r>
               <a:rPr lang="en-US" sz="1100" b="1">
                 <a:solidFill>
-                  <a:srgbClr val="1765CC"/>
+                  <a:srgbClr val="102A43"/>
                 </a:solidFill>
                 <a:latin typeface="Calibri" panose="020F0502020204030204" pitchFamily="34" charset="0"/>
               </a:rPr>
@@ -5552,7 +5851,7 @@
             <a:r>
               <a:rPr lang="en-US" sz="1100" b="1">
                 <a:solidFill>
-                  <a:srgbClr val="1765CC"/>
+                  <a:srgbClr val="102A43"/>
                 </a:solidFill>
                 <a:latin typeface="Calibri" panose="020F0502020204030204" pitchFamily="34" charset="0"/>
               </a:rPr>
@@ -5566,7 +5865,7 @@
           <p:cNvPr id="8" name="Straight Arrow Connector 7">
             <a:extLst>
               <a:ext uri="{FF2B5EF4-FFF2-40B4-BE49-F238E27FC236}">
-                <a16:creationId xmlns:a16="http://schemas.microsoft.com/office/drawing/2014/main" id="{0F9DEC51-418F-7178-FD98-5D5DC7963410}"/>
+                <a16:creationId xmlns:a16="http://schemas.microsoft.com/office/drawing/2014/main" id="{F6BED2DC-2B89-05A2-6613-C5B4656817A1}"/>
               </a:ext>
             </a:extLst>
           </p:cNvPr>
@@ -5583,7 +5882,7 @@
           </a:prstGeom>
           <a:ln w="19050">
             <a:solidFill>
-              <a:srgbClr val="5F6368"/>
+              <a:srgbClr val="4A6480"/>
             </a:solidFill>
             <a:tailEnd type="triangle"/>
           </a:ln>
@@ -5608,7 +5907,7 @@
           <p:cNvPr id="9" name="Straight Arrow Connector 8">
             <a:extLst>
               <a:ext uri="{FF2B5EF4-FFF2-40B4-BE49-F238E27FC236}">
-                <a16:creationId xmlns:a16="http://schemas.microsoft.com/office/drawing/2014/main" id="{85D99B97-E7C1-DA31-C587-470213E3A280}"/>
+                <a16:creationId xmlns:a16="http://schemas.microsoft.com/office/drawing/2014/main" id="{9BD5118F-D376-28B7-27FF-73CC1F031350}"/>
               </a:ext>
             </a:extLst>
           </p:cNvPr>
@@ -5625,7 +5924,7 @@
           </a:prstGeom>
           <a:ln w="19050">
             <a:solidFill>
-              <a:srgbClr val="5F6368"/>
+              <a:srgbClr val="4A6480"/>
             </a:solidFill>
             <a:tailEnd type="triangle"/>
           </a:ln>
@@ -5650,7 +5949,7 @@
           <p:cNvPr id="10" name="Straight Arrow Connector 9">
             <a:extLst>
               <a:ext uri="{FF2B5EF4-FFF2-40B4-BE49-F238E27FC236}">
-                <a16:creationId xmlns:a16="http://schemas.microsoft.com/office/drawing/2014/main" id="{91A61B06-F4FF-CCE4-083F-1F9A51FBA09A}"/>
+                <a16:creationId xmlns:a16="http://schemas.microsoft.com/office/drawing/2014/main" id="{C2603237-C7E7-0BD3-ADBA-0A00EBB80199}"/>
               </a:ext>
             </a:extLst>
           </p:cNvPr>
@@ -5667,7 +5966,7 @@
           </a:prstGeom>
           <a:ln w="19050">
             <a:solidFill>
-              <a:srgbClr val="5F6368"/>
+              <a:srgbClr val="4A6480"/>
             </a:solidFill>
             <a:tailEnd type="triangle"/>
           </a:ln>
@@ -5692,7 +5991,7 @@
           <p:cNvPr id="11" name="Straight Arrow Connector 10">
             <a:extLst>
               <a:ext uri="{FF2B5EF4-FFF2-40B4-BE49-F238E27FC236}">
-                <a16:creationId xmlns:a16="http://schemas.microsoft.com/office/drawing/2014/main" id="{6FF4E336-5278-ADEF-6E8A-9DE96CDEC0C4}"/>
+                <a16:creationId xmlns:a16="http://schemas.microsoft.com/office/drawing/2014/main" id="{1C611FDD-5319-E823-F116-9B4E65133932}"/>
               </a:ext>
             </a:extLst>
           </p:cNvPr>
@@ -5709,7 +6008,7 @@
           </a:prstGeom>
           <a:ln w="19050">
             <a:solidFill>
-              <a:srgbClr val="5F6368"/>
+              <a:srgbClr val="4A6480"/>
             </a:solidFill>
             <a:tailEnd type="triangle"/>
           </a:ln>
@@ -5734,7 +6033,7 @@
           <p:cNvPr id="12" name="Straight Arrow Connector 11">
             <a:extLst>
               <a:ext uri="{FF2B5EF4-FFF2-40B4-BE49-F238E27FC236}">
-                <a16:creationId xmlns:a16="http://schemas.microsoft.com/office/drawing/2014/main" id="{0067F8E9-A310-4CCD-CA60-3D99A9774F25}"/>
+                <a16:creationId xmlns:a16="http://schemas.microsoft.com/office/drawing/2014/main" id="{A7F71E07-DB58-92E8-BCD6-B17C29842266}"/>
               </a:ext>
             </a:extLst>
           </p:cNvPr>
@@ -5751,7 +6050,7 @@
           </a:prstGeom>
           <a:ln w="19050">
             <a:solidFill>
-              <a:srgbClr val="5F6368"/>
+              <a:srgbClr val="4A6480"/>
             </a:solidFill>
             <a:tailEnd type="triangle"/>
           </a:ln>
@@ -5776,7 +6075,7 @@
           <p:cNvPr id="13" name="Rectangle: Rounded Corners 12">
             <a:extLst>
               <a:ext uri="{FF2B5EF4-FFF2-40B4-BE49-F238E27FC236}">
-                <a16:creationId xmlns:a16="http://schemas.microsoft.com/office/drawing/2014/main" id="{7AF6CFDE-5C73-AF6C-6D13-D72F444DA77E}"/>
+                <a16:creationId xmlns:a16="http://schemas.microsoft.com/office/drawing/2014/main" id="{EB6AD73B-A9E0-437D-60E1-8602DD3777A3}"/>
               </a:ext>
             </a:extLst>
           </p:cNvPr>
@@ -5792,11 +6091,11 @@
             <a:avLst/>
           </a:prstGeom>
           <a:solidFill>
-            <a:srgbClr val="E6F4EA"/>
+            <a:srgbClr val="FAF3DD"/>
           </a:solidFill>
           <a:ln w="9525">
             <a:solidFill>
-              <a:srgbClr val="BDE5C8"/>
+              <a:srgbClr val="DAB86F"/>
             </a:solidFill>
           </a:ln>
         </p:spPr>
@@ -5824,7 +6123,7 @@
             <a:r>
               <a:rPr lang="en-US" sz="1100" b="1">
                 <a:solidFill>
-                  <a:srgbClr val="1765CC"/>
+                  <a:srgbClr val="102A43"/>
                 </a:solidFill>
                 <a:latin typeface="Calibri" panose="020F0502020204030204" pitchFamily="34" charset="0"/>
               </a:rPr>
@@ -5836,7 +6135,7 @@
             <a:r>
               <a:rPr lang="en-US" sz="1100" b="1">
                 <a:solidFill>
-                  <a:srgbClr val="1765CC"/>
+                  <a:srgbClr val="102A43"/>
                 </a:solidFill>
                 <a:latin typeface="Calibri" panose="020F0502020204030204" pitchFamily="34" charset="0"/>
               </a:rPr>
@@ -5850,7 +6149,7 @@
           <p:cNvPr id="14" name="Rectangle: Rounded Corners 13">
             <a:extLst>
               <a:ext uri="{FF2B5EF4-FFF2-40B4-BE49-F238E27FC236}">
-                <a16:creationId xmlns:a16="http://schemas.microsoft.com/office/drawing/2014/main" id="{98C21588-3554-EE29-05F5-2852B8C0D10C}"/>
+                <a16:creationId xmlns:a16="http://schemas.microsoft.com/office/drawing/2014/main" id="{F1292360-2995-0159-9F6E-76B662604D80}"/>
               </a:ext>
             </a:extLst>
           </p:cNvPr>
@@ -5866,11 +6165,11 @@
             <a:avLst/>
           </a:prstGeom>
           <a:solidFill>
-            <a:srgbClr val="E6F4EA"/>
+            <a:srgbClr val="FAF3DD"/>
           </a:solidFill>
           <a:ln w="9525">
             <a:solidFill>
-              <a:srgbClr val="BDE5C8"/>
+              <a:srgbClr val="DAB86F"/>
             </a:solidFill>
           </a:ln>
         </p:spPr>
@@ -5898,7 +6197,7 @@
             <a:r>
               <a:rPr lang="en-US" sz="1100" b="1">
                 <a:solidFill>
-                  <a:srgbClr val="1765CC"/>
+                  <a:srgbClr val="102A43"/>
                 </a:solidFill>
                 <a:latin typeface="Calibri" panose="020F0502020204030204" pitchFamily="34" charset="0"/>
               </a:rPr>
@@ -5910,7 +6209,7 @@
             <a:r>
               <a:rPr lang="en-US" sz="1100" b="1">
                 <a:solidFill>
-                  <a:srgbClr val="1765CC"/>
+                  <a:srgbClr val="102A43"/>
                 </a:solidFill>
                 <a:latin typeface="Calibri" panose="020F0502020204030204" pitchFamily="34" charset="0"/>
               </a:rPr>
@@ -5924,7 +6223,7 @@
           <p:cNvPr id="15" name="Rectangle: Rounded Corners 14">
             <a:extLst>
               <a:ext uri="{FF2B5EF4-FFF2-40B4-BE49-F238E27FC236}">
-                <a16:creationId xmlns:a16="http://schemas.microsoft.com/office/drawing/2014/main" id="{8B2461DA-5BBF-FD7B-A31E-13A0F93D2969}"/>
+                <a16:creationId xmlns:a16="http://schemas.microsoft.com/office/drawing/2014/main" id="{7D219D2D-36EF-9869-F98D-6CD76C47DCC3}"/>
               </a:ext>
             </a:extLst>
           </p:cNvPr>
@@ -5940,11 +6239,11 @@
             <a:avLst/>
           </a:prstGeom>
           <a:solidFill>
-            <a:srgbClr val="E6F4EA"/>
+            <a:srgbClr val="FAF3DD"/>
           </a:solidFill>
           <a:ln w="9525">
             <a:solidFill>
-              <a:srgbClr val="BDE5C8"/>
+              <a:srgbClr val="DAB86F"/>
             </a:solidFill>
           </a:ln>
         </p:spPr>
@@ -5972,7 +6271,7 @@
             <a:r>
               <a:rPr lang="en-US" sz="1100" b="1">
                 <a:solidFill>
-                  <a:srgbClr val="1765CC"/>
+                  <a:srgbClr val="102A43"/>
                 </a:solidFill>
                 <a:latin typeface="Calibri" panose="020F0502020204030204" pitchFamily="34" charset="0"/>
               </a:rPr>
@@ -5984,7 +6283,7 @@
             <a:r>
               <a:rPr lang="en-US" sz="1100" b="1">
                 <a:solidFill>
-                  <a:srgbClr val="1765CC"/>
+                  <a:srgbClr val="102A43"/>
                 </a:solidFill>
                 <a:latin typeface="Calibri" panose="020F0502020204030204" pitchFamily="34" charset="0"/>
               </a:rPr>
@@ -5998,7 +6297,7 @@
           <p:cNvPr id="16" name="Rectangle: Rounded Corners 15">
             <a:extLst>
               <a:ext uri="{FF2B5EF4-FFF2-40B4-BE49-F238E27FC236}">
-                <a16:creationId xmlns:a16="http://schemas.microsoft.com/office/drawing/2014/main" id="{DD6CF232-67ED-06F8-3CDF-2FC975CABBCD}"/>
+                <a16:creationId xmlns:a16="http://schemas.microsoft.com/office/drawing/2014/main" id="{9FC71164-E0C8-B153-A627-4328AF001712}"/>
               </a:ext>
             </a:extLst>
           </p:cNvPr>
@@ -6014,11 +6313,11 @@
             <a:avLst/>
           </a:prstGeom>
           <a:solidFill>
-            <a:srgbClr val="E6F4EA"/>
+            <a:srgbClr val="FAF3DD"/>
           </a:solidFill>
           <a:ln w="9525">
             <a:solidFill>
-              <a:srgbClr val="BDE5C8"/>
+              <a:srgbClr val="DAB86F"/>
             </a:solidFill>
           </a:ln>
         </p:spPr>
@@ -6046,7 +6345,7 @@
             <a:r>
               <a:rPr lang="en-US" sz="1100" b="1">
                 <a:solidFill>
-                  <a:srgbClr val="1765CC"/>
+                  <a:srgbClr val="102A43"/>
                 </a:solidFill>
                 <a:latin typeface="Calibri" panose="020F0502020204030204" pitchFamily="34" charset="0"/>
               </a:rPr>
@@ -6058,7 +6357,7 @@
             <a:r>
               <a:rPr lang="en-US" sz="1100" b="1">
                 <a:solidFill>
-                  <a:srgbClr val="1765CC"/>
+                  <a:srgbClr val="102A43"/>
                 </a:solidFill>
                 <a:latin typeface="Calibri" panose="020F0502020204030204" pitchFamily="34" charset="0"/>
               </a:rPr>
@@ -6072,7 +6371,7 @@
           <p:cNvPr id="17" name="Straight Arrow Connector 16">
             <a:extLst>
               <a:ext uri="{FF2B5EF4-FFF2-40B4-BE49-F238E27FC236}">
-                <a16:creationId xmlns:a16="http://schemas.microsoft.com/office/drawing/2014/main" id="{971BCA18-8912-D861-CF8B-69EFC2F5073D}"/>
+                <a16:creationId xmlns:a16="http://schemas.microsoft.com/office/drawing/2014/main" id="{074E1C21-CDEA-7717-29A1-E3BA0374A85C}"/>
               </a:ext>
             </a:extLst>
           </p:cNvPr>
@@ -6089,7 +6388,7 @@
           </a:prstGeom>
           <a:ln w="19050">
             <a:solidFill>
-              <a:srgbClr val="5F6368"/>
+              <a:srgbClr val="4A6480"/>
             </a:solidFill>
             <a:tailEnd type="triangle"/>
           </a:ln>
@@ -6114,7 +6413,7 @@
           <p:cNvPr id="18" name="Rectangle: Rounded Corners 17">
             <a:extLst>
               <a:ext uri="{FF2B5EF4-FFF2-40B4-BE49-F238E27FC236}">
-                <a16:creationId xmlns:a16="http://schemas.microsoft.com/office/drawing/2014/main" id="{B40E9DDA-8286-9E81-A3A6-2D722B6CB92F}"/>
+                <a16:creationId xmlns:a16="http://schemas.microsoft.com/office/drawing/2014/main" id="{B5966B17-8B8F-CE38-7844-8B6A79D88C11}"/>
               </a:ext>
             </a:extLst>
           </p:cNvPr>
@@ -6130,11 +6429,11 @@
             <a:avLst/>
           </a:prstGeom>
           <a:solidFill>
-            <a:srgbClr val="FCE8E6"/>
+            <a:srgbClr val="E6EDF3"/>
           </a:solidFill>
           <a:ln w="9525">
             <a:solidFill>
-              <a:srgbClr val="FAC7BD"/>
+              <a:srgbClr val="C8D5DE"/>
             </a:solidFill>
           </a:ln>
         </p:spPr>
@@ -6162,7 +6461,7 @@
             <a:r>
               <a:rPr lang="en-US" sz="1100" b="1">
                 <a:solidFill>
-                  <a:srgbClr val="1765CC"/>
+                  <a:srgbClr val="102A43"/>
                 </a:solidFill>
                 <a:latin typeface="Calibri" panose="020F0502020204030204" pitchFamily="34" charset="0"/>
               </a:rPr>
@@ -6174,7 +6473,7 @@
             <a:r>
               <a:rPr lang="en-US" sz="1100" b="1">
                 <a:solidFill>
-                  <a:srgbClr val="1765CC"/>
+                  <a:srgbClr val="102A43"/>
                 </a:solidFill>
                 <a:latin typeface="Calibri" panose="020F0502020204030204" pitchFamily="34" charset="0"/>
               </a:rPr>
@@ -6188,7 +6487,7 @@
           <p:cNvPr id="19" name="Straight Arrow Connector 18">
             <a:extLst>
               <a:ext uri="{FF2B5EF4-FFF2-40B4-BE49-F238E27FC236}">
-                <a16:creationId xmlns:a16="http://schemas.microsoft.com/office/drawing/2014/main" id="{ADDE99FA-9F33-A2F9-13F2-32C9D7372F8A}"/>
+                <a16:creationId xmlns:a16="http://schemas.microsoft.com/office/drawing/2014/main" id="{362D9E72-68B8-25F8-DCBE-0912B4C6B9A1}"/>
               </a:ext>
             </a:extLst>
           </p:cNvPr>
@@ -6205,7 +6504,7 @@
           </a:prstGeom>
           <a:ln w="19050">
             <a:solidFill>
-              <a:srgbClr val="5F6368"/>
+              <a:srgbClr val="4A6480"/>
             </a:solidFill>
             <a:tailEnd type="triangle"/>
           </a:ln>
@@ -6230,7 +6529,7 @@
           <p:cNvPr id="20" name="Rectangle: Rounded Corners 19">
             <a:extLst>
               <a:ext uri="{FF2B5EF4-FFF2-40B4-BE49-F238E27FC236}">
-                <a16:creationId xmlns:a16="http://schemas.microsoft.com/office/drawing/2014/main" id="{021879C8-EFF6-7C88-9AD6-F5AC2871E01F}"/>
+                <a16:creationId xmlns:a16="http://schemas.microsoft.com/office/drawing/2014/main" id="{6F2B666F-CE10-865F-C4D7-4A80EE30C76C}"/>
               </a:ext>
             </a:extLst>
           </p:cNvPr>
@@ -6246,11 +6545,11 @@
             <a:avLst/>
           </a:prstGeom>
           <a:solidFill>
-            <a:srgbClr val="EAE2FE"/>
+            <a:srgbClr val="EAF1F8"/>
           </a:solidFill>
           <a:ln w="9525">
             <a:solidFill>
-              <a:srgbClr val="C8C8FA"/>
+              <a:srgbClr val="C8D8E8"/>
             </a:solidFill>
           </a:ln>
         </p:spPr>
@@ -6278,7 +6577,7 @@
             <a:r>
               <a:rPr lang="en-US" sz="1100" b="1">
                 <a:solidFill>
-                  <a:srgbClr val="1A73E8"/>
+                  <a:srgbClr val="1F3A5F"/>
                 </a:solidFill>
                 <a:latin typeface="Calibri" panose="020F0502020204030204" pitchFamily="34" charset="0"/>
               </a:rPr>
@@ -6290,7 +6589,7 @@
             <a:r>
               <a:rPr lang="en-US" sz="1100" b="1">
                 <a:solidFill>
-                  <a:srgbClr val="1A73E8"/>
+                  <a:srgbClr val="1F3A5F"/>
                 </a:solidFill>
                 <a:latin typeface="Calibri" panose="020F0502020204030204" pitchFamily="34" charset="0"/>
               </a:rPr>
@@ -6302,7 +6601,7 @@
     </p:spTree>
     <p:extLst>
       <p:ext uri="{BB962C8B-B14F-4D97-AF65-F5344CB8AC3E}">
-        <p14:creationId xmlns:p14="http://schemas.microsoft.com/office/powerpoint/2010/main" val="1143159312"/>
+        <p14:creationId xmlns:p14="http://schemas.microsoft.com/office/powerpoint/2010/main" val="3985720046"/>
       </p:ext>
     </p:extLst>
   </p:cSld>
@@ -6334,7 +6633,7 @@
           <p:cNvPr id="2" name="Title 1">
             <a:extLst>
               <a:ext uri="{FF2B5EF4-FFF2-40B4-BE49-F238E27FC236}">
-                <a16:creationId xmlns:a16="http://schemas.microsoft.com/office/drawing/2014/main" id="{DBC6EF15-6A56-2ED9-35AD-EBBCB51201B3}"/>
+                <a16:creationId xmlns:a16="http://schemas.microsoft.com/office/drawing/2014/main" id="{EC5F0E1C-8A6A-C68F-2655-3E3FF3BDFE8C}"/>
               </a:ext>
             </a:extLst>
           </p:cNvPr>
@@ -6364,7 +6663,7 @@
           <p:cNvPr id="3" name="Text Placeholder 2">
             <a:extLst>
               <a:ext uri="{FF2B5EF4-FFF2-40B4-BE49-F238E27FC236}">
-                <a16:creationId xmlns:a16="http://schemas.microsoft.com/office/drawing/2014/main" id="{36FFA5C9-326B-7517-5621-0C7B287448FF}"/>
+                <a16:creationId xmlns:a16="http://schemas.microsoft.com/office/drawing/2014/main" id="{561AA307-163D-114F-6FC9-F45D22F6301E}"/>
               </a:ext>
             </a:extLst>
           </p:cNvPr>
@@ -6450,7 +6749,7 @@
     </p:spTree>
     <p:extLst>
       <p:ext uri="{BB962C8B-B14F-4D97-AF65-F5344CB8AC3E}">
-        <p14:creationId xmlns:p14="http://schemas.microsoft.com/office/powerpoint/2010/main" val="3712383927"/>
+        <p14:creationId xmlns:p14="http://schemas.microsoft.com/office/powerpoint/2010/main" val="3720242863"/>
       </p:ext>
     </p:extLst>
   </p:cSld>
@@ -6482,7 +6781,7 @@
           <p:cNvPr id="2" name="Title 1">
             <a:extLst>
               <a:ext uri="{FF2B5EF4-FFF2-40B4-BE49-F238E27FC236}">
-                <a16:creationId xmlns:a16="http://schemas.microsoft.com/office/drawing/2014/main" id="{D8B19DEA-85F9-A134-C7D5-5DC9BEABE07C}"/>
+                <a16:creationId xmlns:a16="http://schemas.microsoft.com/office/drawing/2014/main" id="{356A7816-BF34-DCFC-D606-9A7392B39BE1}"/>
               </a:ext>
             </a:extLst>
           </p:cNvPr>
@@ -6512,7 +6811,7 @@
           <p:cNvPr id="3" name="Table 2">
             <a:extLst>
               <a:ext uri="{FF2B5EF4-FFF2-40B4-BE49-F238E27FC236}">
-                <a16:creationId xmlns:a16="http://schemas.microsoft.com/office/drawing/2014/main" id="{7BA6C0EA-4818-A27E-9B34-9F478D9BEEEC}"/>
+                <a16:creationId xmlns:a16="http://schemas.microsoft.com/office/drawing/2014/main" id="{F5374C98-B451-4AA2-9657-FE2047DEE41D}"/>
               </a:ext>
             </a:extLst>
           </p:cNvPr>
@@ -6522,7 +6821,7 @@
           <p:nvPr>
             <p:extLst>
               <p:ext uri="{D42A27DB-BD31-4B8C-83A1-F6EECF244321}">
-                <p14:modId xmlns:p14="http://schemas.microsoft.com/office/powerpoint/2010/main" val="422049789"/>
+                <p14:modId xmlns:p14="http://schemas.microsoft.com/office/powerpoint/2010/main" val="1279002998"/>
               </p:ext>
             </p:extLst>
           </p:nvPr>
@@ -6541,21 +6840,21 @@
                 <a:gridCol w="2159000">
                   <a:extLst>
                     <a:ext uri="{9D8B030D-6E8A-4147-A177-3AD203B41FA5}">
-                      <a16:colId xmlns:a16="http://schemas.microsoft.com/office/drawing/2014/main" val="2454653519"/>
+                      <a16:colId xmlns:a16="http://schemas.microsoft.com/office/drawing/2014/main" val="2795509212"/>
                     </a:ext>
                   </a:extLst>
                 </a:gridCol>
                 <a:gridCol w="5969000">
                   <a:extLst>
                     <a:ext uri="{9D8B030D-6E8A-4147-A177-3AD203B41FA5}">
-                      <a16:colId xmlns:a16="http://schemas.microsoft.com/office/drawing/2014/main" val="2229850854"/>
+                      <a16:colId xmlns:a16="http://schemas.microsoft.com/office/drawing/2014/main" val="3991510656"/>
                     </a:ext>
                   </a:extLst>
                 </a:gridCol>
                 <a:gridCol w="3048000">
                   <a:extLst>
                     <a:ext uri="{9D8B030D-6E8A-4147-A177-3AD203B41FA5}">
-                      <a16:colId xmlns:a16="http://schemas.microsoft.com/office/drawing/2014/main" val="458055944"/>
+                      <a16:colId xmlns:a16="http://schemas.microsoft.com/office/drawing/2014/main" val="3779695251"/>
                     </a:ext>
                   </a:extLst>
                 </a:gridCol>
@@ -6602,7 +6901,7 @@
                 </a:tc>
                 <a:extLst>
                   <a:ext uri="{0D108BD9-81ED-4DB2-BD59-A6C34878D82A}">
-                    <a16:rowId xmlns:a16="http://schemas.microsoft.com/office/drawing/2014/main" val="2630642255"/>
+                    <a16:rowId xmlns:a16="http://schemas.microsoft.com/office/drawing/2014/main" val="765493789"/>
                   </a:ext>
                 </a:extLst>
               </a:tr>
@@ -6648,7 +6947,7 @@
                 </a:tc>
                 <a:extLst>
                   <a:ext uri="{0D108BD9-81ED-4DB2-BD59-A6C34878D82A}">
-                    <a16:rowId xmlns:a16="http://schemas.microsoft.com/office/drawing/2014/main" val="1057874061"/>
+                    <a16:rowId xmlns:a16="http://schemas.microsoft.com/office/drawing/2014/main" val="3239374324"/>
                   </a:ext>
                 </a:extLst>
               </a:tr>
@@ -6694,7 +6993,7 @@
                 </a:tc>
                 <a:extLst>
                   <a:ext uri="{0D108BD9-81ED-4DB2-BD59-A6C34878D82A}">
-                    <a16:rowId xmlns:a16="http://schemas.microsoft.com/office/drawing/2014/main" val="1873374323"/>
+                    <a16:rowId xmlns:a16="http://schemas.microsoft.com/office/drawing/2014/main" val="2634904952"/>
                   </a:ext>
                 </a:extLst>
               </a:tr>
@@ -6740,7 +7039,7 @@
                 </a:tc>
                 <a:extLst>
                   <a:ext uri="{0D108BD9-81ED-4DB2-BD59-A6C34878D82A}">
-                    <a16:rowId xmlns:a16="http://schemas.microsoft.com/office/drawing/2014/main" val="2096433407"/>
+                    <a16:rowId xmlns:a16="http://schemas.microsoft.com/office/drawing/2014/main" val="3063148662"/>
                   </a:ext>
                 </a:extLst>
               </a:tr>
@@ -6786,7 +7085,7 @@
                 </a:tc>
                 <a:extLst>
                   <a:ext uri="{0D108BD9-81ED-4DB2-BD59-A6C34878D82A}">
-                    <a16:rowId xmlns:a16="http://schemas.microsoft.com/office/drawing/2014/main" val="190373588"/>
+                    <a16:rowId xmlns:a16="http://schemas.microsoft.com/office/drawing/2014/main" val="801786509"/>
                   </a:ext>
                 </a:extLst>
               </a:tr>
@@ -6832,7 +7131,7 @@
                 </a:tc>
                 <a:extLst>
                   <a:ext uri="{0D108BD9-81ED-4DB2-BD59-A6C34878D82A}">
-                    <a16:rowId xmlns:a16="http://schemas.microsoft.com/office/drawing/2014/main" val="401839784"/>
+                    <a16:rowId xmlns:a16="http://schemas.microsoft.com/office/drawing/2014/main" val="2919296804"/>
                   </a:ext>
                 </a:extLst>
               </a:tr>
@@ -6843,7 +7142,7 @@
     </p:spTree>
     <p:extLst>
       <p:ext uri="{BB962C8B-B14F-4D97-AF65-F5344CB8AC3E}">
-        <p14:creationId xmlns:p14="http://schemas.microsoft.com/office/powerpoint/2010/main" val="4139741971"/>
+        <p14:creationId xmlns:p14="http://schemas.microsoft.com/office/powerpoint/2010/main" val="103461054"/>
       </p:ext>
     </p:extLst>
   </p:cSld>
@@ -6875,7 +7174,7 @@
           <p:cNvPr id="2" name="Title 1">
             <a:extLst>
               <a:ext uri="{FF2B5EF4-FFF2-40B4-BE49-F238E27FC236}">
-                <a16:creationId xmlns:a16="http://schemas.microsoft.com/office/drawing/2014/main" id="{E01C4DDC-0DB1-1F7E-8125-D1B9BB059CB7}"/>
+                <a16:creationId xmlns:a16="http://schemas.microsoft.com/office/drawing/2014/main" id="{EDA69C42-5090-F908-DF22-F73580CC5EA4}"/>
               </a:ext>
             </a:extLst>
           </p:cNvPr>
@@ -6905,7 +7204,7 @@
           <p:cNvPr id="3" name="Text Placeholder 2">
             <a:extLst>
               <a:ext uri="{FF2B5EF4-FFF2-40B4-BE49-F238E27FC236}">
-                <a16:creationId xmlns:a16="http://schemas.microsoft.com/office/drawing/2014/main" id="{CB2F24E0-88FB-36BA-AD1C-8569BED864D5}"/>
+                <a16:creationId xmlns:a16="http://schemas.microsoft.com/office/drawing/2014/main" id="{78222569-1269-DA4E-8065-B43F8C4B5C3F}"/>
               </a:ext>
             </a:extLst>
           </p:cNvPr>
@@ -7007,7 +7306,7 @@
     </p:spTree>
     <p:extLst>
       <p:ext uri="{BB962C8B-B14F-4D97-AF65-F5344CB8AC3E}">
-        <p14:creationId xmlns:p14="http://schemas.microsoft.com/office/powerpoint/2010/main" val="3791012730"/>
+        <p14:creationId xmlns:p14="http://schemas.microsoft.com/office/powerpoint/2010/main" val="3107219128"/>
       </p:ext>
     </p:extLst>
   </p:cSld>
@@ -7018,9 +7317,9 @@
 </file>
 
 <file path=ppt/theme/theme1.xml><?xml version="1.0" encoding="utf-8"?>
-<a:theme xmlns:a="http://schemas.openxmlformats.org/drawingml/2006/main" name="Office Theme">
+<a:theme xmlns:a="http://schemas.openxmlformats.org/drawingml/2006/main" name="Gallery">
   <a:themeElements>
-    <a:clrScheme name="Office">
+    <a:clrScheme name="Gallery">
       <a:dk1>
         <a:sysClr val="windowText" lastClr="000000"/>
       </a:dk1>
@@ -7028,39 +7327,39 @@
         <a:sysClr val="window" lastClr="FFFFFF"/>
       </a:lt1>
       <a:dk2>
-        <a:srgbClr val="0E2841"/>
+        <a:srgbClr val="454545"/>
       </a:dk2>
       <a:lt2>
-        <a:srgbClr val="E8E8E8"/>
+        <a:srgbClr val="DFDBD5"/>
       </a:lt2>
       <a:accent1>
-        <a:srgbClr val="156082"/>
+        <a:srgbClr val="B71E42"/>
       </a:accent1>
       <a:accent2>
-        <a:srgbClr val="E97132"/>
+        <a:srgbClr val="DE478E"/>
       </a:accent2>
       <a:accent3>
-        <a:srgbClr val="196B24"/>
+        <a:srgbClr val="BC72F0"/>
       </a:accent3>
       <a:accent4>
-        <a:srgbClr val="0F9ED5"/>
+        <a:srgbClr val="795FAF"/>
       </a:accent4>
       <a:accent5>
-        <a:srgbClr val="A02B93"/>
+        <a:srgbClr val="586EA6"/>
       </a:accent5>
       <a:accent6>
-        <a:srgbClr val="4EA72E"/>
+        <a:srgbClr val="6892A0"/>
       </a:accent6>
       <a:hlink>
-        <a:srgbClr val="467886"/>
+        <a:srgbClr val="FA2B5C"/>
       </a:hlink>
       <a:folHlink>
-        <a:srgbClr val="96607D"/>
+        <a:srgbClr val="BC658E"/>
       </a:folHlink>
     </a:clrScheme>
-    <a:fontScheme name="Office">
+    <a:fontScheme name="Gallery">
       <a:majorFont>
-        <a:latin typeface="Aptos Display" panose="02110004020202020204"/>
+        <a:latin typeface="Gill Sans MT" panose="020B0502020104020203"/>
         <a:ea typeface=""/>
         <a:cs typeface=""/>
         <a:font script="Jpan" typeface="游ゴシック Light"/>
@@ -7093,26 +7392,9 @@
         <a:font script="Viet" typeface="Times New Roman"/>
         <a:font script="Uigh" typeface="Microsoft Uighur"/>
         <a:font script="Geor" typeface="Sylfaen"/>
-        <a:font script="Armn" typeface="Arial"/>
-        <a:font script="Bugi" typeface="Leelawadee UI"/>
-        <a:font script="Bopo" typeface="Microsoft JhengHei"/>
-        <a:font script="Java" typeface="Javanese Text"/>
-        <a:font script="Lisu" typeface="Segoe UI"/>
-        <a:font script="Mymr" typeface="Myanmar Text"/>
-        <a:font script="Nkoo" typeface="Ebrima"/>
-        <a:font script="Olck" typeface="Nirmala UI"/>
-        <a:font script="Osma" typeface="Ebrima"/>
-        <a:font script="Phag" typeface="Phagspa"/>
-        <a:font script="Syrn" typeface="Estrangelo Edessa"/>
-        <a:font script="Syrj" typeface="Estrangelo Edessa"/>
-        <a:font script="Syre" typeface="Estrangelo Edessa"/>
-        <a:font script="Sora" typeface="Nirmala UI"/>
-        <a:font script="Tale" typeface="Microsoft Tai Le"/>
-        <a:font script="Talu" typeface="Microsoft New Tai Lue"/>
-        <a:font script="Tfng" typeface="Ebrima"/>
       </a:majorFont>
       <a:minorFont>
-        <a:latin typeface="Aptos" panose="02110004020202020204"/>
+        <a:latin typeface="Gill Sans MT" panose="020B0502020104020203"/>
         <a:ea typeface=""/>
         <a:cs typeface=""/>
         <a:font script="Jpan" typeface="游ゴシック"/>
@@ -7145,26 +7427,9 @@
         <a:font script="Viet" typeface="Arial"/>
         <a:font script="Uigh" typeface="Microsoft Uighur"/>
         <a:font script="Geor" typeface="Sylfaen"/>
-        <a:font script="Armn" typeface="Arial"/>
-        <a:font script="Bugi" typeface="Leelawadee UI"/>
-        <a:font script="Bopo" typeface="Microsoft JhengHei"/>
-        <a:font script="Java" typeface="Javanese Text"/>
-        <a:font script="Lisu" typeface="Segoe UI"/>
-        <a:font script="Mymr" typeface="Myanmar Text"/>
-        <a:font script="Nkoo" typeface="Ebrima"/>
-        <a:font script="Olck" typeface="Nirmala UI"/>
-        <a:font script="Osma" typeface="Ebrima"/>
-        <a:font script="Phag" typeface="Phagspa"/>
-        <a:font script="Syrn" typeface="Estrangelo Edessa"/>
-        <a:font script="Syrj" typeface="Estrangelo Edessa"/>
-        <a:font script="Syre" typeface="Estrangelo Edessa"/>
-        <a:font script="Sora" typeface="Nirmala UI"/>
-        <a:font script="Tale" typeface="Microsoft Tai Le"/>
-        <a:font script="Talu" typeface="Microsoft New Tai Lue"/>
-        <a:font script="Tfng" typeface="Ebrima"/>
       </a:minorFont>
     </a:fontScheme>
-    <a:fmtScheme name="Office">
+    <a:fmtScheme name="Gallery">
       <a:fillStyleLst>
         <a:solidFill>
           <a:schemeClr val="phClr"/>
@@ -7173,23 +7438,18 @@
           <a:gsLst>
             <a:gs pos="0">
               <a:schemeClr val="phClr">
+                <a:tint val="54000"/>
+                <a:alpha val="100000"/>
+                <a:satMod val="105000"/>
                 <a:lumMod val="110000"/>
-                <a:satMod val="105000"/>
-                <a:tint val="67000"/>
-              </a:schemeClr>
-            </a:gs>
-            <a:gs pos="50000">
-              <a:schemeClr val="phClr">
-                <a:lumMod val="105000"/>
-                <a:satMod val="103000"/>
-                <a:tint val="73000"/>
               </a:schemeClr>
             </a:gs>
             <a:gs pos="100000">
               <a:schemeClr val="phClr">
-                <a:lumMod val="105000"/>
+                <a:tint val="78000"/>
+                <a:alpha val="92000"/>
                 <a:satMod val="109000"/>
-                <a:tint val="81000"/>
+                <a:lumMod val="100000"/>
               </a:schemeClr>
             </a:gs>
           </a:gsLst>
@@ -7199,23 +7459,23 @@
           <a:gsLst>
             <a:gs pos="0">
               <a:schemeClr val="phClr">
-                <a:satMod val="103000"/>
-                <a:lumMod val="102000"/>
-                <a:tint val="94000"/>
+                <a:tint val="98000"/>
+                <a:satMod val="110000"/>
+                <a:lumMod val="104000"/>
               </a:schemeClr>
             </a:gs>
-            <a:gs pos="50000">
+            <a:gs pos="69000">
               <a:schemeClr val="phClr">
-                <a:satMod val="110000"/>
-                <a:lumMod val="100000"/>
-                <a:shade val="100000"/>
+                <a:shade val="88000"/>
+                <a:satMod val="130000"/>
+                <a:lumMod val="92000"/>
               </a:schemeClr>
             </a:gs>
             <a:gs pos="100000">
               <a:schemeClr val="phClr">
-                <a:lumMod val="99000"/>
-                <a:satMod val="120000"/>
                 <a:shade val="78000"/>
+                <a:satMod val="130000"/>
+                <a:lumMod val="92000"/>
               </a:schemeClr>
             </a:gs>
           </a:gsLst>
@@ -7223,26 +7483,23 @@
         </a:gradFill>
       </a:fillStyleLst>
       <a:lnStyleLst>
-        <a:ln w="12700" cap="flat" cmpd="sng" algn="ctr">
+        <a:ln w="9525" cap="flat" cmpd="sng" algn="ctr">
           <a:solidFill>
             <a:schemeClr val="phClr"/>
           </a:solidFill>
           <a:prstDash val="solid"/>
-          <a:miter lim="800000"/>
         </a:ln>
-        <a:ln w="19050" cap="flat" cmpd="sng" algn="ctr">
+        <a:ln w="15875" cap="flat" cmpd="sng" algn="ctr">
           <a:solidFill>
             <a:schemeClr val="phClr"/>
           </a:solidFill>
           <a:prstDash val="solid"/>
-          <a:miter lim="800000"/>
         </a:ln>
-        <a:ln w="25400" cap="flat" cmpd="sng" algn="ctr">
+        <a:ln w="22225" cap="flat" cmpd="sng" algn="ctr">
           <a:solidFill>
             <a:schemeClr val="phClr"/>
           </a:solidFill>
           <a:prstDash val="solid"/>
-          <a:miter lim="800000"/>
         </a:ln>
       </a:lnStyleLst>
       <a:effectStyleLst>
@@ -7254,12 +7511,23 @@
         </a:effectStyle>
         <a:effectStyle>
           <a:effectLst>
-            <a:outerShdw blurRad="57150" dist="19050" dir="5400000" algn="ctr" rotWithShape="0">
+            <a:outerShdw blurRad="50800" dist="50800" dir="5400000" sx="96000" sy="96000" rotWithShape="0">
               <a:srgbClr val="000000">
-                <a:alpha val="63000"/>
+                <a:alpha val="48000"/>
               </a:srgbClr>
             </a:outerShdw>
           </a:effectLst>
+          <a:scene3d>
+            <a:camera prst="orthographicFront">
+              <a:rot lat="0" lon="0" rev="0"/>
+            </a:camera>
+            <a:lightRig rig="balanced" dir="t">
+              <a:rot lat="0" lon="0" rev="1080000"/>
+            </a:lightRig>
+          </a:scene3d>
+          <a:sp3d>
+            <a:bevelT w="38100" h="12700" prst="softRound"/>
+          </a:sp3d>
         </a:effectStyle>
       </a:effectStyleLst>
       <a:bgFillStyleLst>
@@ -7267,66 +7535,35 @@
           <a:schemeClr val="phClr"/>
         </a:solidFill>
         <a:solidFill>
-          <a:schemeClr val="phClr">
-            <a:tint val="95000"/>
-            <a:satMod val="170000"/>
-          </a:schemeClr>
+          <a:schemeClr val="phClr"/>
         </a:solidFill>
         <a:gradFill rotWithShape="1">
           <a:gsLst>
             <a:gs pos="0">
               <a:schemeClr val="phClr">
-                <a:tint val="93000"/>
-                <a:satMod val="150000"/>
-                <a:shade val="98000"/>
-                <a:lumMod val="102000"/>
-              </a:schemeClr>
-            </a:gs>
-            <a:gs pos="50000">
-              <a:schemeClr val="phClr">
-                <a:tint val="98000"/>
-                <a:satMod val="130000"/>
-                <a:shade val="90000"/>
-                <a:lumMod val="103000"/>
+                <a:tint val="94000"/>
+                <a:satMod val="80000"/>
+                <a:lumMod val="106000"/>
               </a:schemeClr>
             </a:gs>
             <a:gs pos="100000">
               <a:schemeClr val="phClr">
-                <a:shade val="63000"/>
-                <a:satMod val="120000"/>
+                <a:shade val="80000"/>
               </a:schemeClr>
             </a:gs>
           </a:gsLst>
-          <a:lin ang="5400000" scaled="0"/>
+          <a:path path="circle">
+            <a:fillToRect l="43000" r="43000" b="100000"/>
+          </a:path>
         </a:gradFill>
       </a:bgFillStyleLst>
     </a:fmtScheme>
   </a:themeElements>
-  <a:objectDefaults>
-    <a:lnDef>
-      <a:spPr/>
-      <a:bodyPr/>
-      <a:lstStyle/>
-      <a:style>
-        <a:lnRef idx="2">
-          <a:schemeClr val="accent1"/>
-        </a:lnRef>
-        <a:fillRef idx="0">
-          <a:schemeClr val="accent1"/>
-        </a:fillRef>
-        <a:effectRef idx="1">
-          <a:schemeClr val="accent1"/>
-        </a:effectRef>
-        <a:fontRef idx="minor">
-          <a:schemeClr val="tx1"/>
-        </a:fontRef>
-      </a:style>
-    </a:lnDef>
-  </a:objectDefaults>
+  <a:objectDefaults/>
   <a:extraClrSchemeLst/>
   <a:extLst>
     <a:ext uri="{05A4C25C-085E-4340-85A3-A5531E510DB2}">
-      <thm15:themeFamily xmlns:thm15="http://schemas.microsoft.com/office/thememl/2012/main" name="Office Theme" id="{2E142A2C-CD16-42D6-873A-C26D2A0506FA}" vid="{1BDDFF52-6CD6-40A5-AB3C-68EB2F1E4D0A}"/>
+      <thm15:themeFamily xmlns:thm15="http://schemas.microsoft.com/office/thememl/2012/main" name="Gallery" id="{BBFCD31E-59A1-489D-B089-A3EAD7CAE12E}" vid="{F5E91637-A7B6-4E27-B710-77DA7014EE1E}"/>
     </a:ext>
   </a:extLst>
 </a:theme>

--- a/docs/deck/Landshield-Deck.pptx
+++ b/docs/deck/Landshield-Deck.pptx
@@ -255,7 +255,7 @@
           <a:bodyPr/>
           <a:lstStyle/>
           <a:p>
-            <a:fld id="{C823E295-28DF-4E71-9F53-D45207DE2860}" type="datetimeFigureOut">
+            <a:fld id="{18FE2997-B109-4CE4-AFB1-78F134803C95}" type="datetimeFigureOut">
               <a:rPr lang="en-US" smtClean="0"/>
               <a:t>5/20/2026</a:t>
             </a:fld>
@@ -307,7 +307,7 @@
           <a:bodyPr/>
           <a:lstStyle/>
           <a:p>
-            <a:fld id="{41970ED4-46CD-4B2B-B2B3-745DA35D2A58}" type="slidenum">
+            <a:fld id="{6B5A31E5-CCDF-45E1-B52C-D30857F2ECD5}" type="slidenum">
               <a:rPr lang="en-US" smtClean="0"/>
               <a:t>‹#›</a:t>
             </a:fld>
@@ -349,7 +349,7 @@
     </p:spTree>
     <p:extLst>
       <p:ext uri="{BB962C8B-B14F-4D97-AF65-F5344CB8AC3E}">
-        <p14:creationId xmlns:p14="http://schemas.microsoft.com/office/powerpoint/2010/main" val="1155698506"/>
+        <p14:creationId xmlns:p14="http://schemas.microsoft.com/office/powerpoint/2010/main" val="2270718321"/>
       </p:ext>
     </p:extLst>
   </p:cSld>
@@ -466,7 +466,7 @@
           <a:bodyPr/>
           <a:lstStyle/>
           <a:p>
-            <a:fld id="{C823E295-28DF-4E71-9F53-D45207DE2860}" type="datetimeFigureOut">
+            <a:fld id="{18FE2997-B109-4CE4-AFB1-78F134803C95}" type="datetimeFigureOut">
               <a:rPr lang="en-US" smtClean="0"/>
               <a:t>5/20/2026</a:t>
             </a:fld>
@@ -508,7 +508,7 @@
           <a:bodyPr/>
           <a:lstStyle/>
           <a:p>
-            <a:fld id="{41970ED4-46CD-4B2B-B2B3-745DA35D2A58}" type="slidenum">
+            <a:fld id="{6B5A31E5-CCDF-45E1-B52C-D30857F2ECD5}" type="slidenum">
               <a:rPr lang="en-US" smtClean="0"/>
               <a:t>‹#›</a:t>
             </a:fld>
@@ -550,7 +550,7 @@
     </p:spTree>
     <p:extLst>
       <p:ext uri="{BB962C8B-B14F-4D97-AF65-F5344CB8AC3E}">
-        <p14:creationId xmlns:p14="http://schemas.microsoft.com/office/powerpoint/2010/main" val="1684051850"/>
+        <p14:creationId xmlns:p14="http://schemas.microsoft.com/office/powerpoint/2010/main" val="163759245"/>
       </p:ext>
     </p:extLst>
   </p:cSld>
@@ -681,7 +681,7 @@
           <a:bodyPr/>
           <a:lstStyle/>
           <a:p>
-            <a:fld id="{C823E295-28DF-4E71-9F53-D45207DE2860}" type="datetimeFigureOut">
+            <a:fld id="{18FE2997-B109-4CE4-AFB1-78F134803C95}" type="datetimeFigureOut">
               <a:rPr lang="en-US" smtClean="0"/>
               <a:t>5/20/2026</a:t>
             </a:fld>
@@ -723,7 +723,7 @@
           <a:bodyPr/>
           <a:lstStyle/>
           <a:p>
-            <a:fld id="{41970ED4-46CD-4B2B-B2B3-745DA35D2A58}" type="slidenum">
+            <a:fld id="{6B5A31E5-CCDF-45E1-B52C-D30857F2ECD5}" type="slidenum">
               <a:rPr lang="en-US" smtClean="0"/>
               <a:t>‹#›</a:t>
             </a:fld>
@@ -765,7 +765,7 @@
     </p:spTree>
     <p:extLst>
       <p:ext uri="{BB962C8B-B14F-4D97-AF65-F5344CB8AC3E}">
-        <p14:creationId xmlns:p14="http://schemas.microsoft.com/office/powerpoint/2010/main" val="4181230017"/>
+        <p14:creationId xmlns:p14="http://schemas.microsoft.com/office/powerpoint/2010/main" val="2188572846"/>
       </p:ext>
     </p:extLst>
   </p:cSld>
@@ -797,7 +797,7 @@
           <p:cNvPr id="2" name="Title 1">
             <a:extLst>
               <a:ext uri="{FF2B5EF4-FFF2-40B4-BE49-F238E27FC236}">
-                <a16:creationId xmlns:a16="http://schemas.microsoft.com/office/drawing/2014/main" id="{D646E1F5-79C2-1397-5AC3-9CA0DC2E35BF}"/>
+                <a16:creationId xmlns:a16="http://schemas.microsoft.com/office/drawing/2014/main" id="{15BEBC4C-E21F-D08F-A0C3-2763263447EF}"/>
               </a:ext>
             </a:extLst>
           </p:cNvPr>
@@ -825,7 +825,7 @@
           <p:cNvPr id="3" name="Text Placeholder 2">
             <a:extLst>
               <a:ext uri="{FF2B5EF4-FFF2-40B4-BE49-F238E27FC236}">
-                <a16:creationId xmlns:a16="http://schemas.microsoft.com/office/drawing/2014/main" id="{8DD004FB-1EC6-CCAB-5BA5-4E6DE2ED634C}"/>
+                <a16:creationId xmlns:a16="http://schemas.microsoft.com/office/drawing/2014/main" id="{5E286217-A709-1F9D-3776-D1A287124DC4}"/>
               </a:ext>
             </a:extLst>
           </p:cNvPr>
@@ -882,7 +882,7 @@
           <p:cNvPr id="4" name="Date Placeholder 3">
             <a:extLst>
               <a:ext uri="{FF2B5EF4-FFF2-40B4-BE49-F238E27FC236}">
-                <a16:creationId xmlns:a16="http://schemas.microsoft.com/office/drawing/2014/main" id="{695EF50D-7F40-AD55-33CB-22CCFD12872E}"/>
+                <a16:creationId xmlns:a16="http://schemas.microsoft.com/office/drawing/2014/main" id="{9B71CD7F-BBE9-2B64-6197-2B8CA5FC4C80}"/>
               </a:ext>
             </a:extLst>
           </p:cNvPr>
@@ -898,7 +898,7 @@
           <a:bodyPr/>
           <a:lstStyle/>
           <a:p>
-            <a:fld id="{C823E295-28DF-4E71-9F53-D45207DE2860}" type="datetimeFigureOut">
+            <a:fld id="{18FE2997-B109-4CE4-AFB1-78F134803C95}" type="datetimeFigureOut">
               <a:rPr lang="en-US" smtClean="0"/>
               <a:t>5/20/2026</a:t>
             </a:fld>
@@ -911,7 +911,7 @@
           <p:cNvPr id="5" name="Footer Placeholder 4">
             <a:extLst>
               <a:ext uri="{FF2B5EF4-FFF2-40B4-BE49-F238E27FC236}">
-                <a16:creationId xmlns:a16="http://schemas.microsoft.com/office/drawing/2014/main" id="{FA4BC1E9-62CB-4DC0-86AE-749DC3196E81}"/>
+                <a16:creationId xmlns:a16="http://schemas.microsoft.com/office/drawing/2014/main" id="{964E7AAD-3F30-EC84-F39D-4D32F080AC6C}"/>
               </a:ext>
             </a:extLst>
           </p:cNvPr>
@@ -936,7 +936,7 @@
           <p:cNvPr id="6" name="Slide Number Placeholder 5">
             <a:extLst>
               <a:ext uri="{FF2B5EF4-FFF2-40B4-BE49-F238E27FC236}">
-                <a16:creationId xmlns:a16="http://schemas.microsoft.com/office/drawing/2014/main" id="{9A5B9062-3D47-5E9D-549A-54AFC2E9C4E0}"/>
+                <a16:creationId xmlns:a16="http://schemas.microsoft.com/office/drawing/2014/main" id="{2F683B99-C521-C5CC-0E62-91FCE28EEAD4}"/>
               </a:ext>
             </a:extLst>
           </p:cNvPr>
@@ -952,7 +952,7 @@
           <a:bodyPr/>
           <a:lstStyle/>
           <a:p>
-            <a:fld id="{41970ED4-46CD-4B2B-B2B3-745DA35D2A58}" type="slidenum">
+            <a:fld id="{6B5A31E5-CCDF-45E1-B52C-D30857F2ECD5}" type="slidenum">
               <a:rPr lang="en-US" smtClean="0"/>
               <a:t>‹#›</a:t>
             </a:fld>
@@ -963,7 +963,7 @@
     </p:spTree>
     <p:extLst>
       <p:ext uri="{BB962C8B-B14F-4D97-AF65-F5344CB8AC3E}">
-        <p14:creationId xmlns:p14="http://schemas.microsoft.com/office/powerpoint/2010/main" val="1771616902"/>
+        <p14:creationId xmlns:p14="http://schemas.microsoft.com/office/powerpoint/2010/main" val="1480224987"/>
       </p:ext>
     </p:extLst>
   </p:cSld>
@@ -1080,7 +1080,7 @@
           <a:bodyPr/>
           <a:lstStyle/>
           <a:p>
-            <a:fld id="{C823E295-28DF-4E71-9F53-D45207DE2860}" type="datetimeFigureOut">
+            <a:fld id="{18FE2997-B109-4CE4-AFB1-78F134803C95}" type="datetimeFigureOut">
               <a:rPr lang="en-US" smtClean="0"/>
               <a:t>5/20/2026</a:t>
             </a:fld>
@@ -1122,7 +1122,7 @@
           <a:bodyPr/>
           <a:lstStyle/>
           <a:p>
-            <a:fld id="{41970ED4-46CD-4B2B-B2B3-745DA35D2A58}" type="slidenum">
+            <a:fld id="{6B5A31E5-CCDF-45E1-B52C-D30857F2ECD5}" type="slidenum">
               <a:rPr lang="en-US" smtClean="0"/>
               <a:t>‹#›</a:t>
             </a:fld>
@@ -1164,7 +1164,7 @@
     </p:spTree>
     <p:extLst>
       <p:ext uri="{BB962C8B-B14F-4D97-AF65-F5344CB8AC3E}">
-        <p14:creationId xmlns:p14="http://schemas.microsoft.com/office/powerpoint/2010/main" val="652335682"/>
+        <p14:creationId xmlns:p14="http://schemas.microsoft.com/office/powerpoint/2010/main" val="786959177"/>
       </p:ext>
     </p:extLst>
   </p:cSld>
@@ -1359,7 +1359,7 @@
           <a:bodyPr/>
           <a:lstStyle/>
           <a:p>
-            <a:fld id="{C823E295-28DF-4E71-9F53-D45207DE2860}" type="datetimeFigureOut">
+            <a:fld id="{18FE2997-B109-4CE4-AFB1-78F134803C95}" type="datetimeFigureOut">
               <a:rPr lang="en-US" smtClean="0"/>
               <a:t>5/20/2026</a:t>
             </a:fld>
@@ -1401,7 +1401,7 @@
           <a:bodyPr/>
           <a:lstStyle/>
           <a:p>
-            <a:fld id="{41970ED4-46CD-4B2B-B2B3-745DA35D2A58}" type="slidenum">
+            <a:fld id="{6B5A31E5-CCDF-45E1-B52C-D30857F2ECD5}" type="slidenum">
               <a:rPr lang="en-US" smtClean="0"/>
               <a:t>‹#›</a:t>
             </a:fld>
@@ -1443,7 +1443,7 @@
     </p:spTree>
     <p:extLst>
       <p:ext uri="{BB962C8B-B14F-4D97-AF65-F5344CB8AC3E}">
-        <p14:creationId xmlns:p14="http://schemas.microsoft.com/office/powerpoint/2010/main" val="4238145174"/>
+        <p14:creationId xmlns:p14="http://schemas.microsoft.com/office/powerpoint/2010/main" val="563974237"/>
       </p:ext>
     </p:extLst>
   </p:cSld>
@@ -1627,7 +1627,7 @@
           <a:bodyPr/>
           <a:lstStyle/>
           <a:p>
-            <a:fld id="{C823E295-28DF-4E71-9F53-D45207DE2860}" type="datetimeFigureOut">
+            <a:fld id="{18FE2997-B109-4CE4-AFB1-78F134803C95}" type="datetimeFigureOut">
               <a:rPr lang="en-US" smtClean="0"/>
               <a:t>5/20/2026</a:t>
             </a:fld>
@@ -1669,7 +1669,7 @@
           <a:bodyPr/>
           <a:lstStyle/>
           <a:p>
-            <a:fld id="{41970ED4-46CD-4B2B-B2B3-745DA35D2A58}" type="slidenum">
+            <a:fld id="{6B5A31E5-CCDF-45E1-B52C-D30857F2ECD5}" type="slidenum">
               <a:rPr lang="en-US" smtClean="0"/>
               <a:t>‹#›</a:t>
             </a:fld>
@@ -1711,7 +1711,7 @@
     </p:spTree>
     <p:extLst>
       <p:ext uri="{BB962C8B-B14F-4D97-AF65-F5344CB8AC3E}">
-        <p14:creationId xmlns:p14="http://schemas.microsoft.com/office/powerpoint/2010/main" val="2068119275"/>
+        <p14:creationId xmlns:p14="http://schemas.microsoft.com/office/powerpoint/2010/main" val="1531012738"/>
       </p:ext>
     </p:extLst>
   </p:cSld>
@@ -2043,7 +2043,7 @@
           <a:bodyPr/>
           <a:lstStyle/>
           <a:p>
-            <a:fld id="{C823E295-28DF-4E71-9F53-D45207DE2860}" type="datetimeFigureOut">
+            <a:fld id="{18FE2997-B109-4CE4-AFB1-78F134803C95}" type="datetimeFigureOut">
               <a:rPr lang="en-US" smtClean="0"/>
               <a:t>5/20/2026</a:t>
             </a:fld>
@@ -2085,7 +2085,7 @@
           <a:bodyPr/>
           <a:lstStyle/>
           <a:p>
-            <a:fld id="{41970ED4-46CD-4B2B-B2B3-745DA35D2A58}" type="slidenum">
+            <a:fld id="{6B5A31E5-CCDF-45E1-B52C-D30857F2ECD5}" type="slidenum">
               <a:rPr lang="en-US" smtClean="0"/>
               <a:t>‹#›</a:t>
             </a:fld>
@@ -2127,7 +2127,7 @@
     </p:spTree>
     <p:extLst>
       <p:ext uri="{BB962C8B-B14F-4D97-AF65-F5344CB8AC3E}">
-        <p14:creationId xmlns:p14="http://schemas.microsoft.com/office/powerpoint/2010/main" val="2245088258"/>
+        <p14:creationId xmlns:p14="http://schemas.microsoft.com/office/powerpoint/2010/main" val="1394469677"/>
       </p:ext>
     </p:extLst>
   </p:cSld>
@@ -2192,7 +2192,7 @@
           <a:bodyPr/>
           <a:lstStyle/>
           <a:p>
-            <a:fld id="{C823E295-28DF-4E71-9F53-D45207DE2860}" type="datetimeFigureOut">
+            <a:fld id="{18FE2997-B109-4CE4-AFB1-78F134803C95}" type="datetimeFigureOut">
               <a:rPr lang="en-US" smtClean="0"/>
               <a:t>5/20/2026</a:t>
             </a:fld>
@@ -2234,7 +2234,7 @@
           <a:bodyPr/>
           <a:lstStyle/>
           <a:p>
-            <a:fld id="{41970ED4-46CD-4B2B-B2B3-745DA35D2A58}" type="slidenum">
+            <a:fld id="{6B5A31E5-CCDF-45E1-B52C-D30857F2ECD5}" type="slidenum">
               <a:rPr lang="en-US" smtClean="0"/>
               <a:t>‹#›</a:t>
             </a:fld>
@@ -2276,7 +2276,7 @@
     </p:spTree>
     <p:extLst>
       <p:ext uri="{BB962C8B-B14F-4D97-AF65-F5344CB8AC3E}">
-        <p14:creationId xmlns:p14="http://schemas.microsoft.com/office/powerpoint/2010/main" val="1601169459"/>
+        <p14:creationId xmlns:p14="http://schemas.microsoft.com/office/powerpoint/2010/main" val="2938249905"/>
       </p:ext>
     </p:extLst>
   </p:cSld>
@@ -2318,7 +2318,7 @@
           <a:bodyPr/>
           <a:lstStyle/>
           <a:p>
-            <a:fld id="{C823E295-28DF-4E71-9F53-D45207DE2860}" type="datetimeFigureOut">
+            <a:fld id="{18FE2997-B109-4CE4-AFB1-78F134803C95}" type="datetimeFigureOut">
               <a:rPr lang="en-US" smtClean="0"/>
               <a:t>5/20/2026</a:t>
             </a:fld>
@@ -2360,7 +2360,7 @@
           <a:bodyPr/>
           <a:lstStyle/>
           <a:p>
-            <a:fld id="{41970ED4-46CD-4B2B-B2B3-745DA35D2A58}" type="slidenum">
+            <a:fld id="{6B5A31E5-CCDF-45E1-B52C-D30857F2ECD5}" type="slidenum">
               <a:rPr lang="en-US" smtClean="0"/>
               <a:t>‹#›</a:t>
             </a:fld>
@@ -2371,7 +2371,7 @@
     </p:spTree>
     <p:extLst>
       <p:ext uri="{BB962C8B-B14F-4D97-AF65-F5344CB8AC3E}">
-        <p14:creationId xmlns:p14="http://schemas.microsoft.com/office/powerpoint/2010/main" val="1890152302"/>
+        <p14:creationId xmlns:p14="http://schemas.microsoft.com/office/powerpoint/2010/main" val="4021662404"/>
       </p:ext>
     </p:extLst>
   </p:cSld>
@@ -2569,7 +2569,7 @@
           <a:bodyPr/>
           <a:lstStyle/>
           <a:p>
-            <a:fld id="{C823E295-28DF-4E71-9F53-D45207DE2860}" type="datetimeFigureOut">
+            <a:fld id="{18FE2997-B109-4CE4-AFB1-78F134803C95}" type="datetimeFigureOut">
               <a:rPr lang="en-US" smtClean="0"/>
               <a:t>5/20/2026</a:t>
             </a:fld>
@@ -2611,7 +2611,7 @@
           <a:bodyPr/>
           <a:lstStyle/>
           <a:p>
-            <a:fld id="{41970ED4-46CD-4B2B-B2B3-745DA35D2A58}" type="slidenum">
+            <a:fld id="{6B5A31E5-CCDF-45E1-B52C-D30857F2ECD5}" type="slidenum">
               <a:rPr lang="en-US" smtClean="0"/>
               <a:t>‹#›</a:t>
             </a:fld>
@@ -2653,7 +2653,7 @@
     </p:spTree>
     <p:extLst>
       <p:ext uri="{BB962C8B-B14F-4D97-AF65-F5344CB8AC3E}">
-        <p14:creationId xmlns:p14="http://schemas.microsoft.com/office/powerpoint/2010/main" val="3011493387"/>
+        <p14:creationId xmlns:p14="http://schemas.microsoft.com/office/powerpoint/2010/main" val="1006427419"/>
       </p:ext>
     </p:extLst>
   </p:cSld>
@@ -3014,7 +3014,7 @@
             </a:lvl1pPr>
           </a:lstStyle>
           <a:p>
-            <a:fld id="{C823E295-28DF-4E71-9F53-D45207DE2860}" type="datetimeFigureOut">
+            <a:fld id="{18FE2997-B109-4CE4-AFB1-78F134803C95}" type="datetimeFigureOut">
               <a:rPr lang="en-US" smtClean="0"/>
               <a:t>5/20/2026</a:t>
             </a:fld>
@@ -3061,7 +3061,7 @@
           <a:bodyPr/>
           <a:lstStyle/>
           <a:p>
-            <a:fld id="{41970ED4-46CD-4B2B-B2B3-745DA35D2A58}" type="slidenum">
+            <a:fld id="{6B5A31E5-CCDF-45E1-B52C-D30857F2ECD5}" type="slidenum">
               <a:rPr lang="en-US" smtClean="0"/>
               <a:t>‹#›</a:t>
             </a:fld>
@@ -3103,7 +3103,7 @@
     </p:spTree>
     <p:extLst>
       <p:ext uri="{BB962C8B-B14F-4D97-AF65-F5344CB8AC3E}">
-        <p14:creationId xmlns:p14="http://schemas.microsoft.com/office/powerpoint/2010/main" val="3991664244"/>
+        <p14:creationId xmlns:p14="http://schemas.microsoft.com/office/powerpoint/2010/main" val="2638352884"/>
       </p:ext>
     </p:extLst>
   </p:cSld>
@@ -3341,7 +3341,7 @@
             </a:lvl1pPr>
           </a:lstStyle>
           <a:p>
-            <a:fld id="{C823E295-28DF-4E71-9F53-D45207DE2860}" type="datetimeFigureOut">
+            <a:fld id="{18FE2997-B109-4CE4-AFB1-78F134803C95}" type="datetimeFigureOut">
               <a:rPr lang="en-US" smtClean="0"/>
               <a:t>5/20/2026</a:t>
             </a:fld>
@@ -3417,7 +3417,7 @@
             </a:lvl1pPr>
           </a:lstStyle>
           <a:p>
-            <a:fld id="{41970ED4-46CD-4B2B-B2B3-745DA35D2A58}" type="slidenum">
+            <a:fld id="{6B5A31E5-CCDF-45E1-B52C-D30857F2ECD5}" type="slidenum">
               <a:rPr lang="en-US" smtClean="0"/>
               <a:t>‹#›</a:t>
             </a:fld>
@@ -3465,7 +3465,7 @@
     </p:spTree>
     <p:extLst>
       <p:ext uri="{BB962C8B-B14F-4D97-AF65-F5344CB8AC3E}">
-        <p14:creationId xmlns:p14="http://schemas.microsoft.com/office/powerpoint/2010/main" val="3836137012"/>
+        <p14:creationId xmlns:p14="http://schemas.microsoft.com/office/powerpoint/2010/main" val="3380819172"/>
       </p:ext>
     </p:extLst>
   </p:cSld>
@@ -3835,7 +3835,7 @@
           <p:cNvPr id="2" name="Title 1">
             <a:extLst>
               <a:ext uri="{FF2B5EF4-FFF2-40B4-BE49-F238E27FC236}">
-                <a16:creationId xmlns:a16="http://schemas.microsoft.com/office/drawing/2014/main" id="{73280129-A7F3-4127-6A2D-84B3DF842B65}"/>
+                <a16:creationId xmlns:a16="http://schemas.microsoft.com/office/drawing/2014/main" id="{B9017AC9-517C-58C0-438C-E0AD5E0D3994}"/>
               </a:ext>
             </a:extLst>
           </p:cNvPr>
@@ -3865,7 +3865,7 @@
           <p:cNvPr id="3" name="Subtitle 2">
             <a:extLst>
               <a:ext uri="{FF2B5EF4-FFF2-40B4-BE49-F238E27FC236}">
-                <a16:creationId xmlns:a16="http://schemas.microsoft.com/office/drawing/2014/main" id="{B6E4CEC4-8417-3B34-D251-AE71F5713B63}"/>
+                <a16:creationId xmlns:a16="http://schemas.microsoft.com/office/drawing/2014/main" id="{7F6BE1BF-09E0-FDF2-51B0-FF401654FDC3}"/>
               </a:ext>
             </a:extLst>
           </p:cNvPr>
@@ -3901,7 +3901,7 @@
     </p:spTree>
     <p:extLst>
       <p:ext uri="{BB962C8B-B14F-4D97-AF65-F5344CB8AC3E}">
-        <p14:creationId xmlns:p14="http://schemas.microsoft.com/office/powerpoint/2010/main" val="168121721"/>
+        <p14:creationId xmlns:p14="http://schemas.microsoft.com/office/powerpoint/2010/main" val="3251387238"/>
       </p:ext>
     </p:extLst>
   </p:cSld>
@@ -3933,7 +3933,7 @@
           <p:cNvPr id="2" name="Title 1">
             <a:extLst>
               <a:ext uri="{FF2B5EF4-FFF2-40B4-BE49-F238E27FC236}">
-                <a16:creationId xmlns:a16="http://schemas.microsoft.com/office/drawing/2014/main" id="{88AC46CF-605A-5B1E-1405-717D207C4A81}"/>
+                <a16:creationId xmlns:a16="http://schemas.microsoft.com/office/drawing/2014/main" id="{35F5BCF7-009E-390D-BA5F-07C10926F001}"/>
               </a:ext>
             </a:extLst>
           </p:cNvPr>
@@ -3963,7 +3963,7 @@
           <p:cNvPr id="3" name="Text Placeholder 2">
             <a:extLst>
               <a:ext uri="{FF2B5EF4-FFF2-40B4-BE49-F238E27FC236}">
-                <a16:creationId xmlns:a16="http://schemas.microsoft.com/office/drawing/2014/main" id="{F44AF5ED-8046-B8B5-E045-66F151B6D0FF}"/>
+                <a16:creationId xmlns:a16="http://schemas.microsoft.com/office/drawing/2014/main" id="{274F3E30-5402-CB47-9FF4-C5547AE0E042}"/>
               </a:ext>
             </a:extLst>
           </p:cNvPr>
@@ -3977,87 +3977,87 @@
         <p:spPr/>
         <p:txBody>
           <a:bodyPr>
-            <a:normAutofit fontScale="70000" lnSpcReduction="20000"/>
+            <a:normAutofit/>
           </a:bodyPr>
           <a:lstStyle/>
           <a:p>
             <a:r>
-              <a:rPr lang="en-US">
-                <a:latin typeface="Calibri" panose="020F0502020204030204" pitchFamily="34" charset="0"/>
-              </a:rPr>
-              <a:t>Vertex AI Gemini 2.5 - multimodal reasoning for parsing, legal analysis, fraud detection, report synthesis</a:t>
-            </a:r>
-          </a:p>
-          <a:p>
-            <a:r>
-              <a:rPr lang="en-US">
-                <a:latin typeface="Calibri" panose="020F0502020204030204" pitchFamily="34" charset="0"/>
-              </a:rPr>
-              <a:t>Cloud Run - serverless container hosting for FastAPI backend and Next.js frontend; auto-scales per request</a:t>
-            </a:r>
-          </a:p>
-          <a:p>
-            <a:r>
-              <a:rPr lang="en-US">
-                <a:latin typeface="Calibri" panose="020F0502020204030204" pitchFamily="34" charset="0"/>
-              </a:rPr>
-              <a:t>Cloud Storage - signed-URL storage for uploaded land documents</a:t>
-            </a:r>
-          </a:p>
-          <a:p>
-            <a:r>
-              <a:rPr lang="en-US">
-                <a:latin typeface="Calibri" panose="020F0502020204030204" pitchFamily="34" charset="0"/>
-              </a:rPr>
-              <a:t>Firestore - document database for analysis state, bundles, findings, audit trail</a:t>
-            </a:r>
-          </a:p>
-          <a:p>
-            <a:r>
-              <a:rPr lang="en-US">
-                <a:latin typeface="Calibri" panose="020F0502020204030204" pitchFamily="34" charset="0"/>
-              </a:rPr>
-              <a:t>Firebase Authentication - email/password and Google sign-in with secure tokens to the backend</a:t>
-            </a:r>
-          </a:p>
-          <a:p>
-            <a:r>
-              <a:rPr lang="en-US">
-                <a:latin typeface="Calibri" panose="020F0502020204030204" pitchFamily="34" charset="0"/>
-              </a:rPr>
-              <a:t>Cloud Build - GitHub push triggers Docker build, image push, Cloud Run deploy</a:t>
-            </a:r>
-          </a:p>
-          <a:p>
-            <a:r>
-              <a:rPr lang="en-US">
-                <a:latin typeface="Calibri" panose="020F0502020204030204" pitchFamily="34" charset="0"/>
-              </a:rPr>
-              <a:t>Artifact Registry - container image storage for backend and frontend</a:t>
-            </a:r>
-          </a:p>
-          <a:p>
-            <a:r>
-              <a:rPr lang="en-US">
-                <a:latin typeface="Calibri" panose="020F0502020204030204" pitchFamily="34" charset="0"/>
-              </a:rPr>
-              <a:t>Secret Manager - Gemini API keys and Firebase admin credentials at rest</a:t>
-            </a:r>
-          </a:p>
-          <a:p>
-            <a:r>
-              <a:rPr lang="en-US">
-                <a:latin typeface="Calibri" panose="020F0502020204030204" pitchFamily="34" charset="0"/>
-              </a:rPr>
-              <a:t>Cloud Logging &amp; Monitoring - centralised structured logs, latency metrics, error alerting</a:t>
-            </a:r>
-          </a:p>
-          <a:p>
-            <a:r>
-              <a:rPr lang="en-US">
-                <a:latin typeface="Calibri" panose="020F0502020204030204" pitchFamily="34" charset="0"/>
-              </a:rPr>
-              <a:t>IAM - least-privilege service accounts for Cloud Run, Firestore, and GCS</a:t>
+              <a:rPr lang="en-US" sz="1800">
+                <a:latin typeface="Calibri" panose="020F0502020204030204" pitchFamily="34" charset="0"/>
+              </a:rPr>
+              <a:t>Vertex AI Gemini 2.5 - the AI brain that powers every agent</a:t>
+            </a:r>
+          </a:p>
+          <a:p>
+            <a:r>
+              <a:rPr lang="en-US" sz="1800">
+                <a:latin typeface="Calibri" panose="020F0502020204030204" pitchFamily="34" charset="0"/>
+              </a:rPr>
+              <a:t>Cloud Run - serverless hosting for the backend and the frontend</a:t>
+            </a:r>
+          </a:p>
+          <a:p>
+            <a:r>
+              <a:rPr lang="en-US" sz="1800">
+                <a:latin typeface="Calibri" panose="020F0502020204030204" pitchFamily="34" charset="0"/>
+              </a:rPr>
+              <a:t>Cloud Storage - keeps the uploaded land documents</a:t>
+            </a:r>
+          </a:p>
+          <a:p>
+            <a:r>
+              <a:rPr lang="en-US" sz="1800">
+                <a:latin typeface="Calibri" panose="020F0502020204030204" pitchFamily="34" charset="0"/>
+              </a:rPr>
+              <a:t>Firestore - stores analysis results and audit history</a:t>
+            </a:r>
+          </a:p>
+          <a:p>
+            <a:r>
+              <a:rPr lang="en-US" sz="1800">
+                <a:latin typeface="Calibri" panose="020F0502020204030204" pitchFamily="34" charset="0"/>
+              </a:rPr>
+              <a:t>Firebase Authentication - secure login for every user</a:t>
+            </a:r>
+          </a:p>
+          <a:p>
+            <a:r>
+              <a:rPr lang="en-US" sz="1800">
+                <a:latin typeface="Calibri" panose="020F0502020204030204" pitchFamily="34" charset="0"/>
+              </a:rPr>
+              <a:t>Cloud Build - automatic build and deploy on every git push</a:t>
+            </a:r>
+          </a:p>
+          <a:p>
+            <a:r>
+              <a:rPr lang="en-US" sz="1800">
+                <a:latin typeface="Calibri" panose="020F0502020204030204" pitchFamily="34" charset="0"/>
+              </a:rPr>
+              <a:t>Artifact Registry - stores our Docker images</a:t>
+            </a:r>
+          </a:p>
+          <a:p>
+            <a:r>
+              <a:rPr lang="en-US" sz="1800">
+                <a:latin typeface="Calibri" panose="020F0502020204030204" pitchFamily="34" charset="0"/>
+              </a:rPr>
+              <a:t>Secret Manager - keeps API keys and credentials safe</a:t>
+            </a:r>
+          </a:p>
+          <a:p>
+            <a:r>
+              <a:rPr lang="en-US" sz="1800">
+                <a:latin typeface="Calibri" panose="020F0502020204030204" pitchFamily="34" charset="0"/>
+              </a:rPr>
+              <a:t>Cloud Logging and Monitoring - shows how the app is performing</a:t>
+            </a:r>
+          </a:p>
+          <a:p>
+            <a:r>
+              <a:rPr lang="en-US" sz="1800">
+                <a:latin typeface="Calibri" panose="020F0502020204030204" pitchFamily="34" charset="0"/>
+              </a:rPr>
+              <a:t>IAM - controls what each service is allowed to do</a:t>
             </a:r>
           </a:p>
         </p:txBody>
@@ -4065,7 +4065,7 @@
     </p:spTree>
     <p:extLst>
       <p:ext uri="{BB962C8B-B14F-4D97-AF65-F5344CB8AC3E}">
-        <p14:creationId xmlns:p14="http://schemas.microsoft.com/office/powerpoint/2010/main" val="2056414596"/>
+        <p14:creationId xmlns:p14="http://schemas.microsoft.com/office/powerpoint/2010/main" val="1205382556"/>
       </p:ext>
     </p:extLst>
   </p:cSld>
@@ -4097,7 +4097,7 @@
           <p:cNvPr id="2" name="Title 1">
             <a:extLst>
               <a:ext uri="{FF2B5EF4-FFF2-40B4-BE49-F238E27FC236}">
-                <a16:creationId xmlns:a16="http://schemas.microsoft.com/office/drawing/2014/main" id="{26B9160E-548B-9B03-C0F2-ED881EF1079C}"/>
+                <a16:creationId xmlns:a16="http://schemas.microsoft.com/office/drawing/2014/main" id="{39B8B67F-FBD3-4184-B8DE-06C843E82180}"/>
               </a:ext>
             </a:extLst>
           </p:cNvPr>
@@ -4127,7 +4127,7 @@
           <p:cNvPr id="3" name="Text Placeholder 2">
             <a:extLst>
               <a:ext uri="{FF2B5EF4-FFF2-40B4-BE49-F238E27FC236}">
-                <a16:creationId xmlns:a16="http://schemas.microsoft.com/office/drawing/2014/main" id="{DB220687-932F-1C37-E6FF-90927195D4C1}"/>
+                <a16:creationId xmlns:a16="http://schemas.microsoft.com/office/drawing/2014/main" id="{79F156E7-94BC-66B0-167B-2ED973D1A670}"/>
               </a:ext>
             </a:extLst>
           </p:cNvPr>
@@ -4149,7 +4149,7 @@
               <a:rPr lang="en-US" sz="1800">
                 <a:latin typeface="Calibri" panose="020F0502020204030204" pitchFamily="34" charset="0"/>
               </a:rPr>
-              <a:t>Problem observed: Indian land transactions involve 8-10 documents per deal; buyers cannot verify them alone</a:t>
+              <a:t>Land deals in India use 8 to 10 documents - most buyers cannot verify them on their own</a:t>
             </a:r>
           </a:p>
           <a:p>
@@ -4157,7 +4157,7 @@
               <a:rPr lang="en-US" sz="1800">
                 <a:latin typeface="Calibri" panose="020F0502020204030204" pitchFamily="34" charset="0"/>
               </a:rPr>
-              <a:t>Lawyers are expensive and slow; fraud patterns (Roshni Act, tribal land, benami) are hard to spot manually</a:t>
+              <a:t>Lawyers help, but are slow and expensive - and fraud patterns are hard to spot manually</a:t>
             </a:r>
           </a:p>
           <a:p>
@@ -4165,7 +4165,7 @@
               <a:rPr lang="en-US" sz="1800">
                 <a:latin typeface="Calibri" panose="020F0502020204030204" pitchFamily="34" charset="0"/>
               </a:rPr>
-              <a:t>Why an AI agent: Gemini 2.5 reads multi-page PDFs natively and extracts structured fields with high accuracy</a:t>
+              <a:t>Gemini can read multi-page PDFs directly, which removes the need for any separate OCR step</a:t>
             </a:r>
           </a:p>
           <a:p>
@@ -4173,7 +4173,7 @@
               <a:rPr lang="en-US" sz="1800">
                 <a:latin typeface="Calibri" panose="020F0502020204030204" pitchFamily="34" charset="0"/>
               </a:rPr>
-              <a:t>A multi-agent layout runs parser, legal, fraud, and report agents in parallel with focused prompts</a:t>
+              <a:t>Splitting the job across small focused agents gave us better accuracy than one giant prompt</a:t>
             </a:r>
           </a:p>
           <a:p>
@@ -4181,7 +4181,7 @@
               <a:rPr lang="en-US" sz="1800">
                 <a:latin typeface="Calibri" panose="020F0502020204030204" pitchFamily="34" charset="0"/>
               </a:rPr>
-              <a:t>Findings are consolidated and graded, so the user gets a lawyer-style summary, not raw text</a:t>
+              <a:t>Running the agents in parallel keeps the user experience fast</a:t>
             </a:r>
           </a:p>
           <a:p>
@@ -4189,7 +4189,7 @@
               <a:rPr lang="en-US" sz="1800">
                 <a:latin typeface="Calibri" panose="020F0502020204030204" pitchFamily="34" charset="0"/>
               </a:rPr>
-              <a:t>Why Google Cloud: Vertex AI Gemini gives best-in-class multimodal reasoning without managing models ourselves</a:t>
+              <a:t>Google Cloud gives us everything in one place - AI, hosting, storage, login and security</a:t>
             </a:r>
           </a:p>
           <a:p>
@@ -4197,15 +4197,7 @@
               <a:rPr lang="en-US" sz="1800">
                 <a:latin typeface="Calibri" panose="020F0502020204030204" pitchFamily="34" charset="0"/>
               </a:rPr>
-              <a:t>Cloud Run + Firestore scales from one document to thousands without infra work</a:t>
-            </a:r>
-          </a:p>
-          <a:p>
-            <a:r>
-              <a:rPr lang="en-US" sz="1800">
-                <a:latin typeface="Calibri" panose="020F0502020204030204" pitchFamily="34" charset="0"/>
-              </a:rPr>
-              <a:t>Firebase Auth + IAM gives a clean security boundary for sensitive land data</a:t>
+              <a:t>End result: a non-expert buyer gets a clear answer in under a minute, not weeks</a:t>
             </a:r>
           </a:p>
         </p:txBody>
@@ -4213,7 +4205,7 @@
     </p:spTree>
     <p:extLst>
       <p:ext uri="{BB962C8B-B14F-4D97-AF65-F5344CB8AC3E}">
-        <p14:creationId xmlns:p14="http://schemas.microsoft.com/office/powerpoint/2010/main" val="2951519474"/>
+        <p14:creationId xmlns:p14="http://schemas.microsoft.com/office/powerpoint/2010/main" val="2211322784"/>
       </p:ext>
     </p:extLst>
   </p:cSld>
@@ -4245,7 +4237,7 @@
           <p:cNvPr id="2" name="Title 1">
             <a:extLst>
               <a:ext uri="{FF2B5EF4-FFF2-40B4-BE49-F238E27FC236}">
-                <a16:creationId xmlns:a16="http://schemas.microsoft.com/office/drawing/2014/main" id="{A6620D0E-ED1D-DA09-5128-9FE6564C8F19}"/>
+                <a16:creationId xmlns:a16="http://schemas.microsoft.com/office/drawing/2014/main" id="{5F7C0590-F077-414D-7AD5-464644BED50D}"/>
               </a:ext>
             </a:extLst>
           </p:cNvPr>
@@ -4275,7 +4267,7 @@
           <p:cNvPr id="3" name="Subtitle 2">
             <a:extLst>
               <a:ext uri="{FF2B5EF4-FFF2-40B4-BE49-F238E27FC236}">
-                <a16:creationId xmlns:a16="http://schemas.microsoft.com/office/drawing/2014/main" id="{BF06D22F-AB46-628C-4B6F-F4A8A601643C}"/>
+                <a16:creationId xmlns:a16="http://schemas.microsoft.com/office/drawing/2014/main" id="{24D08EFD-4430-5B7C-360F-7B5B061A6DE7}"/>
               </a:ext>
             </a:extLst>
           </p:cNvPr>
@@ -4303,7 +4295,7 @@
     </p:spTree>
     <p:extLst>
       <p:ext uri="{BB962C8B-B14F-4D97-AF65-F5344CB8AC3E}">
-        <p14:creationId xmlns:p14="http://schemas.microsoft.com/office/powerpoint/2010/main" val="800917708"/>
+        <p14:creationId xmlns:p14="http://schemas.microsoft.com/office/powerpoint/2010/main" val="4090857286"/>
       </p:ext>
     </p:extLst>
   </p:cSld>
@@ -4335,7 +4327,7 @@
           <p:cNvPr id="2" name="Title 1">
             <a:extLst>
               <a:ext uri="{FF2B5EF4-FFF2-40B4-BE49-F238E27FC236}">
-                <a16:creationId xmlns:a16="http://schemas.microsoft.com/office/drawing/2014/main" id="{FD9167F9-C11D-515A-460E-8F2147221331}"/>
+                <a16:creationId xmlns:a16="http://schemas.microsoft.com/office/drawing/2014/main" id="{579F97A2-78F7-1512-CD72-25F23D72C39B}"/>
               </a:ext>
             </a:extLst>
           </p:cNvPr>
@@ -4365,7 +4357,7 @@
           <p:cNvPr id="3" name="Text Placeholder 2">
             <a:extLst>
               <a:ext uri="{FF2B5EF4-FFF2-40B4-BE49-F238E27FC236}">
-                <a16:creationId xmlns:a16="http://schemas.microsoft.com/office/drawing/2014/main" id="{DE7B7420-A57B-1A32-29CD-A44CA36B3D66}"/>
+                <a16:creationId xmlns:a16="http://schemas.microsoft.com/office/drawing/2014/main" id="{9E460256-12E8-A170-6640-20E504B83EE1}"/>
               </a:ext>
             </a:extLst>
           </p:cNvPr>
@@ -4379,7 +4371,7 @@
         <p:spPr/>
         <p:txBody>
           <a:bodyPr>
-            <a:normAutofit lnSpcReduction="10000"/>
+            <a:normAutofit/>
           </a:bodyPr>
           <a:lstStyle/>
           <a:p>
@@ -4387,7 +4379,7 @@
               <a:rPr lang="en-US" sz="1800">
                 <a:latin typeface="Calibri" panose="020F0502020204030204" pitchFamily="34" charset="0"/>
               </a:rPr>
-              <a:t>Team: Landshield - Member: Abhishek Partap S - DU: AI Altitude</a:t>
+              <a:t>Team Landshield - Abhishek Partap S - DU: AI Altitude</a:t>
             </a:r>
           </a:p>
           <a:p>
@@ -4395,7 +4387,7 @@
               <a:rPr lang="en-US" sz="1800">
                 <a:latin typeface="Calibri" panose="020F0502020204030204" pitchFamily="34" charset="0"/>
               </a:rPr>
-              <a:t>Use case: AI-powered land document verification for Indian buyers</a:t>
+              <a:t>Domain: Real Estate and Legal Tech - verifying land documents for Indian buyers</a:t>
             </a:r>
           </a:p>
           <a:p>
@@ -4403,7 +4395,7 @@
               <a:rPr lang="en-US" sz="1800">
                 <a:latin typeface="Calibri" panose="020F0502020204030204" pitchFamily="34" charset="0"/>
               </a:rPr>
-              <a:t>Domain: Real Estate / Legal Tech - Sub-domain: Document verification, fraud detection, due-diligence assistance</a:t>
+              <a:t>Problem: buying land in India needs 8 to 10 documents - one wrong paper and the buyer loses everything</a:t>
             </a:r>
           </a:p>
           <a:p>
@@ -4411,7 +4403,7 @@
               <a:rPr lang="en-US" sz="1800">
                 <a:latin typeface="Calibri" panose="020F0502020204030204" pitchFamily="34" charset="0"/>
               </a:rPr>
-              <a:t>What it does: Ingests a bundle of land documents (sale deed, EC, mutation, tax receipt, building plan), extracts structured data, validates against Indian land law (TPA, Roshni Act, tribal-land rules, RERA), flags fraud indicators, and produces a lawyer-style report graded by severity</a:t>
+              <a:t>Solution: an AI assistant that reads the full bundle - sale deed, EC, mutation, tax receipt, building plan</a:t>
             </a:r>
           </a:p>
           <a:p>
@@ -4419,7 +4411,15 @@
               <a:rPr lang="en-US" sz="1800">
                 <a:latin typeface="Calibri" panose="020F0502020204030204" pitchFamily="34" charset="0"/>
               </a:rPr>
-              <a:t>Outcome: Buyer gets a clear go / clarify / stop verdict in seconds instead of weeks of manual due diligence</a:t>
+              <a:t>It checks the documents against Indian land law and flags fraud signs in plain language</a:t>
+            </a:r>
+          </a:p>
+          <a:p>
+            <a:r>
+              <a:rPr lang="en-US" sz="1800">
+                <a:latin typeface="Calibri" panose="020F0502020204030204" pitchFamily="34" charset="0"/>
+              </a:rPr>
+              <a:t>Outcome: the buyer gets a clear Go, Clarify or Stop answer in under a minute, not weeks</a:t>
             </a:r>
           </a:p>
         </p:txBody>
@@ -4427,7 +4427,7 @@
     </p:spTree>
     <p:extLst>
       <p:ext uri="{BB962C8B-B14F-4D97-AF65-F5344CB8AC3E}">
-        <p14:creationId xmlns:p14="http://schemas.microsoft.com/office/powerpoint/2010/main" val="3802166759"/>
+        <p14:creationId xmlns:p14="http://schemas.microsoft.com/office/powerpoint/2010/main" val="1917626762"/>
       </p:ext>
     </p:extLst>
   </p:cSld>
@@ -4459,7 +4459,7 @@
           <p:cNvPr id="2" name="Title 1">
             <a:extLst>
               <a:ext uri="{FF2B5EF4-FFF2-40B4-BE49-F238E27FC236}">
-                <a16:creationId xmlns:a16="http://schemas.microsoft.com/office/drawing/2014/main" id="{22EA5A2B-DF2E-A2D5-74CB-D7A399C062B1}"/>
+                <a16:creationId xmlns:a16="http://schemas.microsoft.com/office/drawing/2014/main" id="{167E825B-F72E-3005-A28C-2E59E740BCAE}"/>
               </a:ext>
             </a:extLst>
           </p:cNvPr>
@@ -4489,7 +4489,7 @@
           <p:cNvPr id="3" name="Text Placeholder 2">
             <a:extLst>
               <a:ext uri="{FF2B5EF4-FFF2-40B4-BE49-F238E27FC236}">
-                <a16:creationId xmlns:a16="http://schemas.microsoft.com/office/drawing/2014/main" id="{D4E79055-AB7E-B5F9-5708-5318A398C894}"/>
+                <a16:creationId xmlns:a16="http://schemas.microsoft.com/office/drawing/2014/main" id="{5C99AF65-3BF3-8B7E-39D8-8BEA070BDA87}"/>
               </a:ext>
             </a:extLst>
           </p:cNvPr>
@@ -4503,7 +4503,7 @@
         <p:spPr/>
         <p:txBody>
           <a:bodyPr>
-            <a:normAutofit fontScale="70000" lnSpcReduction="20000"/>
+            <a:normAutofit fontScale="85000" lnSpcReduction="10000"/>
           </a:bodyPr>
           <a:lstStyle/>
           <a:p>
@@ -4511,7 +4511,7 @@
               <a:rPr lang="en-US">
                 <a:latin typeface="Calibri" panose="020F0502020204030204" pitchFamily="34" charset="0"/>
               </a:rPr>
-              <a:t>Orchestrator (FastAPI on Cloud Run): receives the bundle, fans out parallel agent calls, streams progress via SSE, persists to Firestore</a:t>
+              <a:t>Orchestrator: a backend that takes the documents and runs the four AI agents in order</a:t>
             </a:r>
           </a:p>
           <a:p>
@@ -4519,7 +4519,7 @@
               <a:rPr lang="en-US">
                 <a:latin typeface="Calibri" panose="020F0502020204030204" pitchFamily="34" charset="0"/>
               </a:rPr>
-              <a:t>Parser Agent (Gemini): reads PDFs natively, extracts parties, area, stamp duty, registration details, chain of title, dates</a:t>
+              <a:t>Parser Agent: reads each PDF and pulls out names, area, dates, stamp duty and registration details</a:t>
             </a:r>
           </a:p>
           <a:p>
@@ -4527,7 +4527,7 @@
               <a:rPr lang="en-US">
                 <a:latin typeface="Calibri" panose="020F0502020204030204" pitchFamily="34" charset="0"/>
               </a:rPr>
-              <a:t>Legal Rules Agent (Gemini): maps extracted data against Indian land law - registration, stamp duty, state restrictions, RERA</a:t>
+              <a:t>Legal Agent: checks if the documents follow Indian land law and flags any non-compliance</a:t>
             </a:r>
           </a:p>
           <a:p>
@@ -4535,7 +4535,7 @@
               <a:rPr lang="en-US">
                 <a:latin typeface="Calibri" panose="020F0502020204030204" pitchFamily="34" charset="0"/>
               </a:rPr>
-              <a:t>Fraud Detection Agent (Gemini): flags name mismatches, chain-of-title gaps, undervaluation, fake registration patterns</a:t>
+              <a:t>Fraud Agent: looks for red flags like name mismatches, broken ownership chains and undervaluation</a:t>
             </a:r>
           </a:p>
           <a:p>
@@ -4543,7 +4543,7 @@
               <a:rPr lang="en-US">
                 <a:latin typeface="Calibri" panose="020F0502020204030204" pitchFamily="34" charset="0"/>
               </a:rPr>
-              <a:t>Report Agent (Gemini): consolidates findings into a lawyer-style summary with severity grading and recommendations</a:t>
+              <a:t>Report Agent: combines all findings into a short summary with a severity grade and next steps</a:t>
             </a:r>
           </a:p>
           <a:p>
@@ -4551,7 +4551,7 @@
               <a:rPr lang="en-US">
                 <a:latin typeface="Calibri" panose="020F0502020204030204" pitchFamily="34" charset="0"/>
               </a:rPr>
-              <a:t>Storage: GCS for source PDFs (signed URLs), Firestore for analysis state and audit log</a:t>
+              <a:t>Frontend: a simple web app that shows live progress and the final report, secured by Firebase login</a:t>
             </a:r>
           </a:p>
           <a:p>
@@ -4559,7 +4559,7 @@
               <a:rPr lang="en-US">
                 <a:latin typeface="Calibri" panose="020F0502020204030204" pitchFamily="34" charset="0"/>
               </a:rPr>
-              <a:t>Frontend (Next.js on Cloud Run): dashboard, upload, real-time progress, report viewer - Firebase Auth gates access</a:t>
+              <a:t>Storage: documents in Cloud Storage, results and audit trail in Firestore</a:t>
             </a:r>
           </a:p>
           <a:p>
@@ -4567,7 +4567,7 @@
               <a:rPr lang="en-US">
                 <a:latin typeface="Calibri" panose="020F0502020204030204" pitchFamily="34" charset="0"/>
               </a:rPr>
-              <a:t>Observability: Cloud Logging + Monitoring - structured logs, agent latency, model cost, alerts</a:t>
+              <a:t>Everything is monitored: logs, latency and errors are tracked in Google Cloud Monitoring</a:t>
             </a:r>
           </a:p>
         </p:txBody>
@@ -4575,7 +4575,7 @@
     </p:spTree>
     <p:extLst>
       <p:ext uri="{BB962C8B-B14F-4D97-AF65-F5344CB8AC3E}">
-        <p14:creationId xmlns:p14="http://schemas.microsoft.com/office/powerpoint/2010/main" val="1730191215"/>
+        <p14:creationId xmlns:p14="http://schemas.microsoft.com/office/powerpoint/2010/main" val="112257012"/>
       </p:ext>
     </p:extLst>
   </p:cSld>
@@ -4607,7 +4607,7 @@
           <p:cNvPr id="2" name="Title 1">
             <a:extLst>
               <a:ext uri="{FF2B5EF4-FFF2-40B4-BE49-F238E27FC236}">
-                <a16:creationId xmlns:a16="http://schemas.microsoft.com/office/drawing/2014/main" id="{5212977E-9183-30CE-987A-4555196586F7}"/>
+                <a16:creationId xmlns:a16="http://schemas.microsoft.com/office/drawing/2014/main" id="{A12ACFB7-70DA-1DCD-360C-5CBCF48C2498}"/>
               </a:ext>
             </a:extLst>
           </p:cNvPr>
@@ -4637,7 +4637,7 @@
           <p:cNvPr id="3" name="Rectangle: Rounded Corners 2">
             <a:extLst>
               <a:ext uri="{FF2B5EF4-FFF2-40B4-BE49-F238E27FC236}">
-                <a16:creationId xmlns:a16="http://schemas.microsoft.com/office/drawing/2014/main" id="{C0B1B94F-7591-FB51-EAEB-121FA56712FF}"/>
+                <a16:creationId xmlns:a16="http://schemas.microsoft.com/office/drawing/2014/main" id="{E6CD40AB-5B64-0C44-75B4-E17F164FE59B}"/>
               </a:ext>
             </a:extLst>
           </p:cNvPr>
@@ -4699,7 +4699,7 @@
                 </a:solidFill>
                 <a:latin typeface="Calibri" panose="020F0502020204030204" pitchFamily="34" charset="0"/>
               </a:rPr>
-              <a:t>Next.js frontend on Cloud Run - Firebase Auth - dashboard - upload - real-time progress - report viewer</a:t>
+              <a:t>Next.js web app on Cloud Run - login, upload, live progress, final report</a:t>
             </a:r>
           </a:p>
         </p:txBody>
@@ -4709,7 +4709,7 @@
           <p:cNvPr id="4" name="Rectangle: Rounded Corners 3">
             <a:extLst>
               <a:ext uri="{FF2B5EF4-FFF2-40B4-BE49-F238E27FC236}">
-                <a16:creationId xmlns:a16="http://schemas.microsoft.com/office/drawing/2014/main" id="{5191654B-A031-CF93-A274-42970767BACB}"/>
+                <a16:creationId xmlns:a16="http://schemas.microsoft.com/office/drawing/2014/main" id="{2A0C2F08-399A-39AA-D5B0-911C70858CAF}"/>
               </a:ext>
             </a:extLst>
           </p:cNvPr>
@@ -4771,7 +4771,7 @@
                 </a:solidFill>
                 <a:latin typeface="Calibri" panose="020F0502020204030204" pitchFamily="34" charset="0"/>
               </a:rPr>
-              <a:t>FastAPI orchestrator on Cloud Run - SSE streaming - fans out parallel agent calls - persists state to Firestore</a:t>
+              <a:t>FastAPI backend on Cloud Run - runs the agents, streams progress, saves results</a:t>
             </a:r>
           </a:p>
         </p:txBody>
@@ -4781,7 +4781,7 @@
           <p:cNvPr id="5" name="Rectangle: Rounded Corners 4">
             <a:extLst>
               <a:ext uri="{FF2B5EF4-FFF2-40B4-BE49-F238E27FC236}">
-                <a16:creationId xmlns:a16="http://schemas.microsoft.com/office/drawing/2014/main" id="{9BA010C3-84CE-59EA-A908-C26A8F0FC4C5}"/>
+                <a16:creationId xmlns:a16="http://schemas.microsoft.com/office/drawing/2014/main" id="{C10A160D-A6FA-D493-4CF6-AB6FEE4A975F}"/>
               </a:ext>
             </a:extLst>
           </p:cNvPr>
@@ -4842,7 +4842,7 @@
           <p:cNvPr id="6" name="Rectangle: Rounded Corners 5">
             <a:extLst>
               <a:ext uri="{FF2B5EF4-FFF2-40B4-BE49-F238E27FC236}">
-                <a16:creationId xmlns:a16="http://schemas.microsoft.com/office/drawing/2014/main" id="{44FFE5E5-A2C4-197F-5E4B-BDA1D1A2E5C8}"/>
+                <a16:creationId xmlns:a16="http://schemas.microsoft.com/office/drawing/2014/main" id="{F37E7E6D-0178-600E-8921-E109CE594CDF}"/>
               </a:ext>
             </a:extLst>
           </p:cNvPr>
@@ -4916,7 +4916,7 @@
           <p:cNvPr id="7" name="Rectangle: Rounded Corners 6">
             <a:extLst>
               <a:ext uri="{FF2B5EF4-FFF2-40B4-BE49-F238E27FC236}">
-                <a16:creationId xmlns:a16="http://schemas.microsoft.com/office/drawing/2014/main" id="{EF76CF58-B15F-B8BF-8DDC-C4EC812862E4}"/>
+                <a16:creationId xmlns:a16="http://schemas.microsoft.com/office/drawing/2014/main" id="{91FAB30E-D6A5-50D1-3402-EABD47436EF2}"/>
               </a:ext>
             </a:extLst>
           </p:cNvPr>
@@ -4990,7 +4990,7 @@
           <p:cNvPr id="8" name="Rectangle: Rounded Corners 7">
             <a:extLst>
               <a:ext uri="{FF2B5EF4-FFF2-40B4-BE49-F238E27FC236}">
-                <a16:creationId xmlns:a16="http://schemas.microsoft.com/office/drawing/2014/main" id="{0331C2DA-28C1-882B-7BE1-6BD6E6E657FB}"/>
+                <a16:creationId xmlns:a16="http://schemas.microsoft.com/office/drawing/2014/main" id="{A659EFAF-C565-C93E-AA21-CE7B224C303E}"/>
               </a:ext>
             </a:extLst>
           </p:cNvPr>
@@ -5064,7 +5064,7 @@
           <p:cNvPr id="9" name="Rectangle: Rounded Corners 8">
             <a:extLst>
               <a:ext uri="{FF2B5EF4-FFF2-40B4-BE49-F238E27FC236}">
-                <a16:creationId xmlns:a16="http://schemas.microsoft.com/office/drawing/2014/main" id="{9DC632A2-D704-0F4A-1C30-46F0EE4A01E3}"/>
+                <a16:creationId xmlns:a16="http://schemas.microsoft.com/office/drawing/2014/main" id="{0E06A8F4-A78B-3F5C-7964-17A9152A47A0}"/>
               </a:ext>
             </a:extLst>
           </p:cNvPr>
@@ -5138,7 +5138,7 @@
           <p:cNvPr id="10" name="Rectangle: Rounded Corners 9">
             <a:extLst>
               <a:ext uri="{FF2B5EF4-FFF2-40B4-BE49-F238E27FC236}">
-                <a16:creationId xmlns:a16="http://schemas.microsoft.com/office/drawing/2014/main" id="{08D1A91E-AC68-81DE-366F-3DDD81DB5F20}"/>
+                <a16:creationId xmlns:a16="http://schemas.microsoft.com/office/drawing/2014/main" id="{63FE0091-EBAC-6A46-F1E6-FC85D2D91068}"/>
               </a:ext>
             </a:extLst>
           </p:cNvPr>
@@ -5200,7 +5200,7 @@
                 </a:solidFill>
                 <a:latin typeface="Calibri" panose="020F0502020204030204" pitchFamily="34" charset="0"/>
               </a:rPr>
-              <a:t>GCS (PDFs, signed URLs) - Firestore (findings, audit log)</a:t>
+              <a:t>Cloud Storage for PDFs - Firestore for results and audit log</a:t>
             </a:r>
           </a:p>
         </p:txBody>
@@ -5210,7 +5210,7 @@
           <p:cNvPr id="11" name="Rectangle: Rounded Corners 10">
             <a:extLst>
               <a:ext uri="{FF2B5EF4-FFF2-40B4-BE49-F238E27FC236}">
-                <a16:creationId xmlns:a16="http://schemas.microsoft.com/office/drawing/2014/main" id="{71B587ED-6818-D6C6-01A5-AA85C2229F76}"/>
+                <a16:creationId xmlns:a16="http://schemas.microsoft.com/office/drawing/2014/main" id="{1BAA3400-EDBD-28F8-4BD8-9DCDEB51DBBA}"/>
               </a:ext>
             </a:extLst>
           </p:cNvPr>
@@ -5261,7 +5261,7 @@
                 </a:solidFill>
                 <a:latin typeface="Calibri" panose="020F0502020204030204" pitchFamily="34" charset="0"/>
               </a:rPr>
-              <a:t>CROSS-CUTTING</a:t>
+              <a:t>SECURITY and OPERATIONS</a:t>
             </a:r>
           </a:p>
           <a:p>
@@ -5272,7 +5272,7 @@
                 </a:solidFill>
                 <a:latin typeface="Calibri" panose="020F0502020204030204" pitchFamily="34" charset="0"/>
               </a:rPr>
-              <a:t>Cloud Logging - Monitoring - IAM - Secret Manager - Artifact Registry</a:t>
+              <a:t>Logging, Monitoring, IAM, Secret Manager, Artifact Registry</a:t>
             </a:r>
           </a:p>
         </p:txBody>
@@ -5280,7 +5280,7 @@
     </p:spTree>
     <p:extLst>
       <p:ext uri="{BB962C8B-B14F-4D97-AF65-F5344CB8AC3E}">
-        <p14:creationId xmlns:p14="http://schemas.microsoft.com/office/powerpoint/2010/main" val="3385334765"/>
+        <p14:creationId xmlns:p14="http://schemas.microsoft.com/office/powerpoint/2010/main" val="3265047314"/>
       </p:ext>
     </p:extLst>
   </p:cSld>
@@ -5312,7 +5312,7 @@
           <p:cNvPr id="2" name="Title 1">
             <a:extLst>
               <a:ext uri="{FF2B5EF4-FFF2-40B4-BE49-F238E27FC236}">
-                <a16:creationId xmlns:a16="http://schemas.microsoft.com/office/drawing/2014/main" id="{C46EF0DB-4810-CC5D-F50D-2D205C7210A2}"/>
+                <a16:creationId xmlns:a16="http://schemas.microsoft.com/office/drawing/2014/main" id="{5658168E-9A6F-2B24-6A17-F8647DD69BF1}"/>
               </a:ext>
             </a:extLst>
           </p:cNvPr>
@@ -5342,7 +5342,7 @@
           <p:cNvPr id="3" name="Text Placeholder 2">
             <a:extLst>
               <a:ext uri="{FF2B5EF4-FFF2-40B4-BE49-F238E27FC236}">
-                <a16:creationId xmlns:a16="http://schemas.microsoft.com/office/drawing/2014/main" id="{F6E5D678-AAF4-B438-2301-939B4765BDC8}"/>
+                <a16:creationId xmlns:a16="http://schemas.microsoft.com/office/drawing/2014/main" id="{C63184A2-96B5-5AAE-BB02-B83B4842C71A}"/>
               </a:ext>
             </a:extLst>
           </p:cNvPr>
@@ -5356,79 +5356,71 @@
         <p:spPr/>
         <p:txBody>
           <a:bodyPr>
-            <a:normAutofit fontScale="85000" lnSpcReduction="20000"/>
+            <a:normAutofit lnSpcReduction="10000"/>
           </a:bodyPr>
           <a:lstStyle/>
           <a:p>
             <a:r>
-              <a:rPr lang="en-US">
-                <a:latin typeface="Calibri" panose="020F0502020204030204" pitchFamily="34" charset="0"/>
-              </a:rPr>
-              <a:t>User uploads a bundle of land documents and selects state + land type</a:t>
-            </a:r>
-          </a:p>
-          <a:p>
-            <a:r>
-              <a:rPr lang="en-US">
-                <a:latin typeface="Calibri" panose="020F0502020204030204" pitchFamily="34" charset="0"/>
-              </a:rPr>
-              <a:t>Frontend pushes files to backend; backend stores them in GCS and creates a Firestore record</a:t>
-            </a:r>
-          </a:p>
-          <a:p>
-            <a:r>
-              <a:rPr lang="en-US">
-                <a:latin typeface="Calibri" panose="020F0502020204030204" pitchFamily="34" charset="0"/>
-              </a:rPr>
-              <a:t>Orchestrator triggers Parser Agent; Gemini reads each PDF and extracts structured fields</a:t>
-            </a:r>
-          </a:p>
-          <a:p>
-            <a:r>
-              <a:rPr lang="en-US">
-                <a:latin typeface="Calibri" panose="020F0502020204030204" pitchFamily="34" charset="0"/>
-              </a:rPr>
-              <a:t>Legal Rules Agent and Fraud Detection Agent run in parallel on the extracted data</a:t>
-            </a:r>
-          </a:p>
-          <a:p>
-            <a:r>
-              <a:rPr lang="en-US">
-                <a:latin typeface="Calibri" panose="020F0502020204030204" pitchFamily="34" charset="0"/>
-              </a:rPr>
-              <a:t>Findings are normalised, deduplicated, consolidated, and graded by severity</a:t>
-            </a:r>
-          </a:p>
-          <a:p>
-            <a:r>
-              <a:rPr lang="en-US">
-                <a:latin typeface="Calibri" panose="020F0502020204030204" pitchFamily="34" charset="0"/>
-              </a:rPr>
-              <a:t>Report Agent generates a lawyer-style summary with severity counts and recommended actions</a:t>
-            </a:r>
-          </a:p>
-          <a:p>
-            <a:r>
-              <a:rPr lang="en-US">
-                <a:latin typeface="Calibri" panose="020F0502020204030204" pitchFamily="34" charset="0"/>
-              </a:rPr>
-              <a:t>Backend persists the report to Firestore and streams progress to the frontend via SSE</a:t>
-            </a:r>
-          </a:p>
-          <a:p>
-            <a:r>
-              <a:rPr lang="en-US">
-                <a:latin typeface="Calibri" panose="020F0502020204030204" pitchFamily="34" charset="0"/>
-              </a:rPr>
-              <a:t>User views the report: property facts, findings, checklist, parties, document inventory</a:t>
-            </a:r>
-          </a:p>
-          <a:p>
-            <a:r>
-              <a:rPr lang="en-US">
-                <a:latin typeface="Calibri" panose="020F0502020204030204" pitchFamily="34" charset="0"/>
-              </a:rPr>
-              <a:t>Cloud Logging and Monitoring capture latency, errors, and cost throughout</a:t>
+              <a:rPr lang="en-US" sz="1800">
+                <a:latin typeface="Calibri" panose="020F0502020204030204" pitchFamily="34" charset="0"/>
+              </a:rPr>
+              <a:t>User logs in, picks the state and land type, and uploads the document bundle</a:t>
+            </a:r>
+          </a:p>
+          <a:p>
+            <a:r>
+              <a:rPr lang="en-US" sz="1800">
+                <a:latin typeface="Calibri" panose="020F0502020204030204" pitchFamily="34" charset="0"/>
+              </a:rPr>
+              <a:t>Files are saved to Cloud Storage and a new analysis record is created in Firestore</a:t>
+            </a:r>
+          </a:p>
+          <a:p>
+            <a:r>
+              <a:rPr lang="en-US" sz="1800">
+                <a:latin typeface="Calibri" panose="020F0502020204030204" pitchFamily="34" charset="0"/>
+              </a:rPr>
+              <a:t>Parser Agent reads each PDF and extracts the key facts</a:t>
+            </a:r>
+          </a:p>
+          <a:p>
+            <a:r>
+              <a:rPr lang="en-US" sz="1800">
+                <a:latin typeface="Calibri" panose="020F0502020204030204" pitchFamily="34" charset="0"/>
+              </a:rPr>
+              <a:t>Legal Agent and Fraud Agent run at the same time on those facts</a:t>
+            </a:r>
+          </a:p>
+          <a:p>
+            <a:r>
+              <a:rPr lang="en-US" sz="1800">
+                <a:latin typeface="Calibri" panose="020F0502020204030204" pitchFamily="34" charset="0"/>
+              </a:rPr>
+              <a:t>Findings are deduplicated and graded as Low, Medium, High or Critical</a:t>
+            </a:r>
+          </a:p>
+          <a:p>
+            <a:r>
+              <a:rPr lang="en-US" sz="1800">
+                <a:latin typeface="Calibri" panose="020F0502020204030204" pitchFamily="34" charset="0"/>
+              </a:rPr>
+              <a:t>Report Agent writes a short summary with clear next steps</a:t>
+            </a:r>
+          </a:p>
+          <a:p>
+            <a:r>
+              <a:rPr lang="en-US" sz="1800">
+                <a:latin typeface="Calibri" panose="020F0502020204030204" pitchFamily="34" charset="0"/>
+              </a:rPr>
+              <a:t>Backend streams progress live; frontend shows the final report</a:t>
+            </a:r>
+          </a:p>
+          <a:p>
+            <a:r>
+              <a:rPr lang="en-US" sz="1800">
+                <a:latin typeface="Calibri" panose="020F0502020204030204" pitchFamily="34" charset="0"/>
+              </a:rPr>
+              <a:t>Every step is logged and monitored in Google Cloud</a:t>
             </a:r>
           </a:p>
         </p:txBody>
@@ -5436,7 +5428,7 @@
     </p:spTree>
     <p:extLst>
       <p:ext uri="{BB962C8B-B14F-4D97-AF65-F5344CB8AC3E}">
-        <p14:creationId xmlns:p14="http://schemas.microsoft.com/office/powerpoint/2010/main" val="3059556973"/>
+        <p14:creationId xmlns:p14="http://schemas.microsoft.com/office/powerpoint/2010/main" val="3528867751"/>
       </p:ext>
     </p:extLst>
   </p:cSld>
@@ -5468,7 +5460,7 @@
           <p:cNvPr id="2" name="Title 1">
             <a:extLst>
               <a:ext uri="{FF2B5EF4-FFF2-40B4-BE49-F238E27FC236}">
-                <a16:creationId xmlns:a16="http://schemas.microsoft.com/office/drawing/2014/main" id="{A8F4907F-3C46-AF81-9FD8-291E7A77E9FC}"/>
+                <a16:creationId xmlns:a16="http://schemas.microsoft.com/office/drawing/2014/main" id="{EA000DBD-1325-1D11-FFB0-76F5A4645AE1}"/>
               </a:ext>
             </a:extLst>
           </p:cNvPr>
@@ -5498,7 +5490,7 @@
           <p:cNvPr id="3" name="Rectangle: Rounded Corners 2">
             <a:extLst>
               <a:ext uri="{FF2B5EF4-FFF2-40B4-BE49-F238E27FC236}">
-                <a16:creationId xmlns:a16="http://schemas.microsoft.com/office/drawing/2014/main" id="{B89C9E20-4D07-3896-7A37-B2C847087538}"/>
+                <a16:creationId xmlns:a16="http://schemas.microsoft.com/office/drawing/2014/main" id="{6E7067C4-25E0-15E5-A7D6-C3D22053718F}"/>
               </a:ext>
             </a:extLst>
           </p:cNvPr>
@@ -5555,12 +5547,15 @@
           </a:p>
           <a:p>
             <a:pPr algn="ctr"/>
-            <a:endParaRPr lang="en-US" sz="1100" b="1">
-              <a:solidFill>
-                <a:srgbClr val="1F3A5F"/>
-              </a:solidFill>
-              <a:latin typeface="Calibri" panose="020F0502020204030204" pitchFamily="34" charset="0"/>
-            </a:endParaRPr>
+            <a:r>
+              <a:rPr lang="en-US" sz="1100" b="1">
+                <a:solidFill>
+                  <a:srgbClr val="1F3A5F"/>
+                </a:solidFill>
+                <a:latin typeface="Calibri" panose="020F0502020204030204" pitchFamily="34" charset="0"/>
+              </a:rPr>
+              <a:t>Browser</a:t>
+            </a:r>
           </a:p>
         </p:txBody>
       </p:sp>
@@ -5569,7 +5564,7 @@
           <p:cNvPr id="4" name="Rectangle: Rounded Corners 3">
             <a:extLst>
               <a:ext uri="{FF2B5EF4-FFF2-40B4-BE49-F238E27FC236}">
-                <a16:creationId xmlns:a16="http://schemas.microsoft.com/office/drawing/2014/main" id="{D65264C1-02B1-6125-DA54-4AB33E126A04}"/>
+                <a16:creationId xmlns:a16="http://schemas.microsoft.com/office/drawing/2014/main" id="{B0C7447C-B28C-ED91-6859-FD7553678200}"/>
               </a:ext>
             </a:extLst>
           </p:cNvPr>
@@ -5621,7 +5616,7 @@
                 </a:solidFill>
                 <a:latin typeface="Calibri" panose="020F0502020204030204" pitchFamily="34" charset="0"/>
               </a:rPr>
-              <a:t>Next.js</a:t>
+              <a:t>Frontend</a:t>
             </a:r>
           </a:p>
           <a:p>
@@ -5633,7 +5628,7 @@
                 </a:solidFill>
                 <a:latin typeface="Calibri" panose="020F0502020204030204" pitchFamily="34" charset="0"/>
               </a:rPr>
-              <a:t>Frontend / Cloud Run</a:t>
+              <a:t>Next.js on Cloud Run</a:t>
             </a:r>
           </a:p>
         </p:txBody>
@@ -5643,7 +5638,7 @@
           <p:cNvPr id="5" name="Rectangle: Rounded Corners 4">
             <a:extLst>
               <a:ext uri="{FF2B5EF4-FFF2-40B4-BE49-F238E27FC236}">
-                <a16:creationId xmlns:a16="http://schemas.microsoft.com/office/drawing/2014/main" id="{73F930C6-EE54-4E91-E136-2CCBD5A1BF06}"/>
+                <a16:creationId xmlns:a16="http://schemas.microsoft.com/office/drawing/2014/main" id="{68A3CF10-786C-BB3E-DE94-D3DAB8C2D92B}"/>
               </a:ext>
             </a:extLst>
           </p:cNvPr>
@@ -5695,7 +5690,7 @@
                 </a:solidFill>
                 <a:latin typeface="Calibri" panose="020F0502020204030204" pitchFamily="34" charset="0"/>
               </a:rPr>
-              <a:t>Orchestrator</a:t>
+              <a:t>Backend</a:t>
             </a:r>
           </a:p>
           <a:p>
@@ -5707,7 +5702,7 @@
                 </a:solidFill>
                 <a:latin typeface="Calibri" panose="020F0502020204030204" pitchFamily="34" charset="0"/>
               </a:rPr>
-              <a:t>FastAPI / Cloud Run</a:t>
+              <a:t>FastAPI on Cloud Run</a:t>
             </a:r>
           </a:p>
         </p:txBody>
@@ -5717,7 +5712,7 @@
           <p:cNvPr id="6" name="Rectangle: Rounded Corners 5">
             <a:extLst>
               <a:ext uri="{FF2B5EF4-FFF2-40B4-BE49-F238E27FC236}">
-                <a16:creationId xmlns:a16="http://schemas.microsoft.com/office/drawing/2014/main" id="{503ACC94-1DAC-485A-DF6E-AAF53B6D7BF5}"/>
+                <a16:creationId xmlns:a16="http://schemas.microsoft.com/office/drawing/2014/main" id="{DE675D81-7009-C592-9737-03262BC4CB87}"/>
               </a:ext>
             </a:extLst>
           </p:cNvPr>
@@ -5769,7 +5764,7 @@
                 </a:solidFill>
                 <a:latin typeface="Calibri" panose="020F0502020204030204" pitchFamily="34" charset="0"/>
               </a:rPr>
-              <a:t>GCS</a:t>
+              <a:t>Documents</a:t>
             </a:r>
           </a:p>
           <a:p>
@@ -5781,7 +5776,7 @@
                 </a:solidFill>
                 <a:latin typeface="Calibri" panose="020F0502020204030204" pitchFamily="34" charset="0"/>
               </a:rPr>
-              <a:t>PDFs (signed URL)</a:t>
+              <a:t>Cloud Storage</a:t>
             </a:r>
           </a:p>
         </p:txBody>
@@ -5791,7 +5786,7 @@
           <p:cNvPr id="7" name="Rectangle: Rounded Corners 6">
             <a:extLst>
               <a:ext uri="{FF2B5EF4-FFF2-40B4-BE49-F238E27FC236}">
-                <a16:creationId xmlns:a16="http://schemas.microsoft.com/office/drawing/2014/main" id="{C55725B8-A8CB-4A57-041D-71ED927CC504}"/>
+                <a16:creationId xmlns:a16="http://schemas.microsoft.com/office/drawing/2014/main" id="{079E90C0-4D68-535B-5CFC-C745710AC187}"/>
               </a:ext>
             </a:extLst>
           </p:cNvPr>
@@ -5843,7 +5838,7 @@
                 </a:solidFill>
                 <a:latin typeface="Calibri" panose="020F0502020204030204" pitchFamily="34" charset="0"/>
               </a:rPr>
-              <a:t>Firestore</a:t>
+              <a:t>Results</a:t>
             </a:r>
           </a:p>
           <a:p>
@@ -5855,7 +5850,7 @@
                 </a:solidFill>
                 <a:latin typeface="Calibri" panose="020F0502020204030204" pitchFamily="34" charset="0"/>
               </a:rPr>
-              <a:t>Findings + audit</a:t>
+              <a:t>Firestore</a:t>
             </a:r>
           </a:p>
         </p:txBody>
@@ -5865,7 +5860,7 @@
           <p:cNvPr id="8" name="Straight Arrow Connector 7">
             <a:extLst>
               <a:ext uri="{FF2B5EF4-FFF2-40B4-BE49-F238E27FC236}">
-                <a16:creationId xmlns:a16="http://schemas.microsoft.com/office/drawing/2014/main" id="{F6BED2DC-2B89-05A2-6613-C5B4656817A1}"/>
+                <a16:creationId xmlns:a16="http://schemas.microsoft.com/office/drawing/2014/main" id="{2273594E-22A1-FF2D-5F4F-1FE1F9728925}"/>
               </a:ext>
             </a:extLst>
           </p:cNvPr>
@@ -5907,7 +5902,7 @@
           <p:cNvPr id="9" name="Straight Arrow Connector 8">
             <a:extLst>
               <a:ext uri="{FF2B5EF4-FFF2-40B4-BE49-F238E27FC236}">
-                <a16:creationId xmlns:a16="http://schemas.microsoft.com/office/drawing/2014/main" id="{9BD5118F-D376-28B7-27FF-73CC1F031350}"/>
+                <a16:creationId xmlns:a16="http://schemas.microsoft.com/office/drawing/2014/main" id="{A0E800C4-BDCC-0306-2EFC-F27390E48B31}"/>
               </a:ext>
             </a:extLst>
           </p:cNvPr>
@@ -5949,7 +5944,7 @@
           <p:cNvPr id="10" name="Straight Arrow Connector 9">
             <a:extLst>
               <a:ext uri="{FF2B5EF4-FFF2-40B4-BE49-F238E27FC236}">
-                <a16:creationId xmlns:a16="http://schemas.microsoft.com/office/drawing/2014/main" id="{C2603237-C7E7-0BD3-ADBA-0A00EBB80199}"/>
+                <a16:creationId xmlns:a16="http://schemas.microsoft.com/office/drawing/2014/main" id="{BDD165C0-ECDD-65B6-5F10-820921425FE2}"/>
               </a:ext>
             </a:extLst>
           </p:cNvPr>
@@ -5991,7 +5986,7 @@
           <p:cNvPr id="11" name="Straight Arrow Connector 10">
             <a:extLst>
               <a:ext uri="{FF2B5EF4-FFF2-40B4-BE49-F238E27FC236}">
-                <a16:creationId xmlns:a16="http://schemas.microsoft.com/office/drawing/2014/main" id="{1C611FDD-5319-E823-F116-9B4E65133932}"/>
+                <a16:creationId xmlns:a16="http://schemas.microsoft.com/office/drawing/2014/main" id="{AC310957-AB02-6DF4-4EEA-C812003A284E}"/>
               </a:ext>
             </a:extLst>
           </p:cNvPr>
@@ -6033,7 +6028,7 @@
           <p:cNvPr id="12" name="Straight Arrow Connector 11">
             <a:extLst>
               <a:ext uri="{FF2B5EF4-FFF2-40B4-BE49-F238E27FC236}">
-                <a16:creationId xmlns:a16="http://schemas.microsoft.com/office/drawing/2014/main" id="{A7F71E07-DB58-92E8-BCD6-B17C29842266}"/>
+                <a16:creationId xmlns:a16="http://schemas.microsoft.com/office/drawing/2014/main" id="{E773EF23-00BF-1C64-D9BF-1E36EBB9CDB9}"/>
               </a:ext>
             </a:extLst>
           </p:cNvPr>
@@ -6075,7 +6070,7 @@
           <p:cNvPr id="13" name="Rectangle: Rounded Corners 12">
             <a:extLst>
               <a:ext uri="{FF2B5EF4-FFF2-40B4-BE49-F238E27FC236}">
-                <a16:creationId xmlns:a16="http://schemas.microsoft.com/office/drawing/2014/main" id="{EB6AD73B-A9E0-437D-60E1-8602DD3777A3}"/>
+                <a16:creationId xmlns:a16="http://schemas.microsoft.com/office/drawing/2014/main" id="{85F2E8D6-A8EE-BF10-2C3F-8F59349D8F39}"/>
               </a:ext>
             </a:extLst>
           </p:cNvPr>
@@ -6149,7 +6144,7 @@
           <p:cNvPr id="14" name="Rectangle: Rounded Corners 13">
             <a:extLst>
               <a:ext uri="{FF2B5EF4-FFF2-40B4-BE49-F238E27FC236}">
-                <a16:creationId xmlns:a16="http://schemas.microsoft.com/office/drawing/2014/main" id="{F1292360-2995-0159-9F6E-76B662604D80}"/>
+                <a16:creationId xmlns:a16="http://schemas.microsoft.com/office/drawing/2014/main" id="{D2C2DB3F-1A44-0CAC-ED22-3905145B7BE9}"/>
               </a:ext>
             </a:extLst>
           </p:cNvPr>
@@ -6223,7 +6218,7 @@
           <p:cNvPr id="15" name="Rectangle: Rounded Corners 14">
             <a:extLst>
               <a:ext uri="{FF2B5EF4-FFF2-40B4-BE49-F238E27FC236}">
-                <a16:creationId xmlns:a16="http://schemas.microsoft.com/office/drawing/2014/main" id="{7D219D2D-36EF-9869-F98D-6CD76C47DCC3}"/>
+                <a16:creationId xmlns:a16="http://schemas.microsoft.com/office/drawing/2014/main" id="{1A277A21-9B74-254D-F648-CD7C1B8D526F}"/>
               </a:ext>
             </a:extLst>
           </p:cNvPr>
@@ -6297,7 +6292,7 @@
           <p:cNvPr id="16" name="Rectangle: Rounded Corners 15">
             <a:extLst>
               <a:ext uri="{FF2B5EF4-FFF2-40B4-BE49-F238E27FC236}">
-                <a16:creationId xmlns:a16="http://schemas.microsoft.com/office/drawing/2014/main" id="{9FC71164-E0C8-B153-A627-4328AF001712}"/>
+                <a16:creationId xmlns:a16="http://schemas.microsoft.com/office/drawing/2014/main" id="{EDA2943D-369C-7219-35A8-73771D957F14}"/>
               </a:ext>
             </a:extLst>
           </p:cNvPr>
@@ -6371,7 +6366,7 @@
           <p:cNvPr id="17" name="Straight Arrow Connector 16">
             <a:extLst>
               <a:ext uri="{FF2B5EF4-FFF2-40B4-BE49-F238E27FC236}">
-                <a16:creationId xmlns:a16="http://schemas.microsoft.com/office/drawing/2014/main" id="{074E1C21-CDEA-7717-29A1-E3BA0374A85C}"/>
+                <a16:creationId xmlns:a16="http://schemas.microsoft.com/office/drawing/2014/main" id="{4EC4C490-5A75-899E-35C5-92A20CA591D2}"/>
               </a:ext>
             </a:extLst>
           </p:cNvPr>
@@ -6413,7 +6408,7 @@
           <p:cNvPr id="18" name="Rectangle: Rounded Corners 17">
             <a:extLst>
               <a:ext uri="{FF2B5EF4-FFF2-40B4-BE49-F238E27FC236}">
-                <a16:creationId xmlns:a16="http://schemas.microsoft.com/office/drawing/2014/main" id="{B5966B17-8B8F-CE38-7844-8B6A79D88C11}"/>
+                <a16:creationId xmlns:a16="http://schemas.microsoft.com/office/drawing/2014/main" id="{770FA9F0-3283-F6F4-5F78-B34C5B46C580}"/>
               </a:ext>
             </a:extLst>
           </p:cNvPr>
@@ -6465,7 +6460,7 @@
                 </a:solidFill>
                 <a:latin typeface="Calibri" panose="020F0502020204030204" pitchFamily="34" charset="0"/>
               </a:rPr>
-              <a:t>Consolidation + Severity Grading</a:t>
+              <a:t>Combine and grade findings</a:t>
             </a:r>
           </a:p>
           <a:p>
@@ -6477,7 +6472,7 @@
                 </a:solidFill>
                 <a:latin typeface="Calibri" panose="020F0502020204030204" pitchFamily="34" charset="0"/>
               </a:rPr>
-              <a:t>dedupe - combine related - grade low/medium/high/critical</a:t>
+              <a:t>deduplicate - severity: Low, Medium, High, Critical</a:t>
             </a:r>
           </a:p>
         </p:txBody>
@@ -6487,7 +6482,7 @@
           <p:cNvPr id="19" name="Straight Arrow Connector 18">
             <a:extLst>
               <a:ext uri="{FF2B5EF4-FFF2-40B4-BE49-F238E27FC236}">
-                <a16:creationId xmlns:a16="http://schemas.microsoft.com/office/drawing/2014/main" id="{362D9E72-68B8-25F8-DCBE-0912B4C6B9A1}"/>
+                <a16:creationId xmlns:a16="http://schemas.microsoft.com/office/drawing/2014/main" id="{09623FC3-58FC-21D9-13CB-512FF3F8D683}"/>
               </a:ext>
             </a:extLst>
           </p:cNvPr>
@@ -6529,7 +6524,7 @@
           <p:cNvPr id="20" name="Rectangle: Rounded Corners 19">
             <a:extLst>
               <a:ext uri="{FF2B5EF4-FFF2-40B4-BE49-F238E27FC236}">
-                <a16:creationId xmlns:a16="http://schemas.microsoft.com/office/drawing/2014/main" id="{6F2B666F-CE10-865F-C4D7-4A80EE30C76C}"/>
+                <a16:creationId xmlns:a16="http://schemas.microsoft.com/office/drawing/2014/main" id="{3C5EABC6-8997-527F-A1C9-7B2AB614D5D1}"/>
               </a:ext>
             </a:extLst>
           </p:cNvPr>
@@ -6581,7 +6576,7 @@
                 </a:solidFill>
                 <a:latin typeface="Calibri" panose="020F0502020204030204" pitchFamily="34" charset="0"/>
               </a:rPr>
-              <a:t>Final Report streamed to Frontend (SSE)</a:t>
+              <a:t>Final report streamed live to the user</a:t>
             </a:r>
           </a:p>
           <a:p>
@@ -6601,7 +6596,7 @@
     </p:spTree>
     <p:extLst>
       <p:ext uri="{BB962C8B-B14F-4D97-AF65-F5344CB8AC3E}">
-        <p14:creationId xmlns:p14="http://schemas.microsoft.com/office/powerpoint/2010/main" val="3985720046"/>
+        <p14:creationId xmlns:p14="http://schemas.microsoft.com/office/powerpoint/2010/main" val="795564527"/>
       </p:ext>
     </p:extLst>
   </p:cSld>
@@ -6633,7 +6628,7 @@
           <p:cNvPr id="2" name="Title 1">
             <a:extLst>
               <a:ext uri="{FF2B5EF4-FFF2-40B4-BE49-F238E27FC236}">
-                <a16:creationId xmlns:a16="http://schemas.microsoft.com/office/drawing/2014/main" id="{EC5F0E1C-8A6A-C68F-2655-3E3FF3BDFE8C}"/>
+                <a16:creationId xmlns:a16="http://schemas.microsoft.com/office/drawing/2014/main" id="{E81C650E-CF1D-C580-05D8-777DDFA5E126}"/>
               </a:ext>
             </a:extLst>
           </p:cNvPr>
@@ -6663,7 +6658,7 @@
           <p:cNvPr id="3" name="Text Placeholder 2">
             <a:extLst>
               <a:ext uri="{FF2B5EF4-FFF2-40B4-BE49-F238E27FC236}">
-                <a16:creationId xmlns:a16="http://schemas.microsoft.com/office/drawing/2014/main" id="{561AA307-163D-114F-6FC9-F45D22F6301E}"/>
+                <a16:creationId xmlns:a16="http://schemas.microsoft.com/office/drawing/2014/main" id="{A92DEB98-966B-7884-19F3-E3B35EE5334F}"/>
               </a:ext>
             </a:extLst>
           </p:cNvPr>
@@ -6677,7 +6672,7 @@
         <p:spPr/>
         <p:txBody>
           <a:bodyPr>
-            <a:normAutofit/>
+            <a:normAutofit lnSpcReduction="10000"/>
           </a:bodyPr>
           <a:lstStyle/>
           <a:p>
@@ -6685,7 +6680,7 @@
               <a:rPr lang="en-US" sz="1800">
                 <a:latin typeface="Calibri" panose="020F0502020204030204" pitchFamily="34" charset="0"/>
               </a:rPr>
-              <a:t>Orchestrator (controller): primary entry point - validates the bundle and coordinates the rest</a:t>
+              <a:t>One orchestrator coordinates everything - each agent has only one job</a:t>
             </a:r>
           </a:p>
           <a:p>
@@ -6693,7 +6688,7 @@
               <a:rPr lang="en-US" sz="1800">
                 <a:latin typeface="Calibri" panose="020F0502020204030204" pitchFamily="34" charset="0"/>
               </a:rPr>
-              <a:t>Fan-out: Parser first, then Legal + Fraud in parallel, then Report - progress streamed via SSE</a:t>
+              <a:t>Parser runs first; Legal and Fraud run in parallel; Report runs last</a:t>
             </a:r>
           </a:p>
           <a:p>
@@ -6701,7 +6696,7 @@
               <a:rPr lang="en-US" sz="1800">
                 <a:latin typeface="Calibri" panose="020F0502020204030204" pitchFamily="34" charset="0"/>
               </a:rPr>
-              <a:t>Each specialised Gemini agent has its own focused system prompt and JSON output schema</a:t>
+              <a:t>Every agent uses Gemini 2.5 Flash with its own focused prompt</a:t>
             </a:r>
           </a:p>
           <a:p>
@@ -6709,7 +6704,7 @@
               <a:rPr lang="en-US" sz="1800">
                 <a:latin typeface="Calibri" panose="020F0502020204030204" pitchFamily="34" charset="0"/>
               </a:rPr>
-              <a:t>Parser is multimodal (reads PDFs natively); the rest consume structured JSON</a:t>
+              <a:t>Agents talk to each other through a shared JSON schema</a:t>
             </a:r>
           </a:p>
           <a:p>
@@ -6717,7 +6712,7 @@
               <a:rPr lang="en-US" sz="1800">
                 <a:latin typeface="Calibri" panose="020F0502020204030204" pitchFamily="34" charset="0"/>
               </a:rPr>
-              <a:t>Stateless agents exchange JSON, allowing easy retry and parallelism</a:t>
+              <a:t>Parser reads the PDFs directly - no separate OCR step needed</a:t>
             </a:r>
           </a:p>
           <a:p>
@@ -6725,7 +6720,7 @@
               <a:rPr lang="en-US" sz="1800">
                 <a:latin typeface="Calibri" panose="020F0502020204030204" pitchFamily="34" charset="0"/>
               </a:rPr>
-              <a:t>In-process Python calls today (sub-second latency, lower cost)</a:t>
+              <a:t>Stateless design means any single agent can be retried without redoing the rest</a:t>
             </a:r>
           </a:p>
           <a:p>
@@ -6733,7 +6728,7 @@
               <a:rPr lang="en-US" sz="1800">
                 <a:latin typeface="Calibri" panose="020F0502020204030204" pitchFamily="34" charset="0"/>
               </a:rPr>
-              <a:t>Designed so any agent can be promoted to its own Cloud Run service via HTTP/JSON</a:t>
+              <a:t>Today they run together for speed and lower cost</a:t>
             </a:r>
           </a:p>
           <a:p>
@@ -6741,7 +6736,7 @@
               <a:rPr lang="en-US" sz="1800">
                 <a:latin typeface="Calibri" panose="020F0502020204030204" pitchFamily="34" charset="0"/>
               </a:rPr>
-              <a:t>A shared ExtractedData schema keeps contracts stable across agents</a:t>
+              <a:t>Any one of them can later be split into its own Cloud Run service if we need to scale it</a:t>
             </a:r>
           </a:p>
         </p:txBody>
@@ -6749,7 +6744,7 @@
     </p:spTree>
     <p:extLst>
       <p:ext uri="{BB962C8B-B14F-4D97-AF65-F5344CB8AC3E}">
-        <p14:creationId xmlns:p14="http://schemas.microsoft.com/office/powerpoint/2010/main" val="3720242863"/>
+        <p14:creationId xmlns:p14="http://schemas.microsoft.com/office/powerpoint/2010/main" val="2874459464"/>
       </p:ext>
     </p:extLst>
   </p:cSld>
@@ -6781,7 +6776,7 @@
           <p:cNvPr id="2" name="Title 1">
             <a:extLst>
               <a:ext uri="{FF2B5EF4-FFF2-40B4-BE49-F238E27FC236}">
-                <a16:creationId xmlns:a16="http://schemas.microsoft.com/office/drawing/2014/main" id="{356A7816-BF34-DCFC-D606-9A7392B39BE1}"/>
+                <a16:creationId xmlns:a16="http://schemas.microsoft.com/office/drawing/2014/main" id="{EAAC9771-4E41-97EC-7795-1C2CAD22457F}"/>
               </a:ext>
             </a:extLst>
           </p:cNvPr>
@@ -6811,7 +6806,7 @@
           <p:cNvPr id="3" name="Table 2">
             <a:extLst>
               <a:ext uri="{FF2B5EF4-FFF2-40B4-BE49-F238E27FC236}">
-                <a16:creationId xmlns:a16="http://schemas.microsoft.com/office/drawing/2014/main" id="{F5374C98-B451-4AA2-9657-FE2047DEE41D}"/>
+                <a16:creationId xmlns:a16="http://schemas.microsoft.com/office/drawing/2014/main" id="{0FB84DA3-4D6B-F44F-B641-81B118FF75E5}"/>
               </a:ext>
             </a:extLst>
           </p:cNvPr>
@@ -6821,7 +6816,7 @@
           <p:nvPr>
             <p:extLst>
               <p:ext uri="{D42A27DB-BD31-4B8C-83A1-F6EECF244321}">
-                <p14:modId xmlns:p14="http://schemas.microsoft.com/office/powerpoint/2010/main" val="1279002998"/>
+                <p14:modId xmlns:p14="http://schemas.microsoft.com/office/powerpoint/2010/main" val="1800138905"/>
               </p:ext>
             </p:extLst>
           </p:nvPr>
@@ -6840,21 +6835,21 @@
                 <a:gridCol w="2159000">
                   <a:extLst>
                     <a:ext uri="{9D8B030D-6E8A-4147-A177-3AD203B41FA5}">
-                      <a16:colId xmlns:a16="http://schemas.microsoft.com/office/drawing/2014/main" val="2795509212"/>
+                      <a16:colId xmlns:a16="http://schemas.microsoft.com/office/drawing/2014/main" val="1606083994"/>
                     </a:ext>
                   </a:extLst>
                 </a:gridCol>
                 <a:gridCol w="5969000">
                   <a:extLst>
                     <a:ext uri="{9D8B030D-6E8A-4147-A177-3AD203B41FA5}">
-                      <a16:colId xmlns:a16="http://schemas.microsoft.com/office/drawing/2014/main" val="3991510656"/>
+                      <a16:colId xmlns:a16="http://schemas.microsoft.com/office/drawing/2014/main" val="3413616763"/>
                     </a:ext>
                   </a:extLst>
                 </a:gridCol>
                 <a:gridCol w="3048000">
                   <a:extLst>
                     <a:ext uri="{9D8B030D-6E8A-4147-A177-3AD203B41FA5}">
-                      <a16:colId xmlns:a16="http://schemas.microsoft.com/office/drawing/2014/main" val="3779695251"/>
+                      <a16:colId xmlns:a16="http://schemas.microsoft.com/office/drawing/2014/main" val="2543403098"/>
                     </a:ext>
                   </a:extLst>
                 </a:gridCol>
@@ -6901,7 +6896,7 @@
                 </a:tc>
                 <a:extLst>
                   <a:ext uri="{0D108BD9-81ED-4DB2-BD59-A6C34878D82A}">
-                    <a16:rowId xmlns:a16="http://schemas.microsoft.com/office/drawing/2014/main" val="765493789"/>
+                    <a16:rowId xmlns:a16="http://schemas.microsoft.com/office/drawing/2014/main" val="2673849826"/>
                   </a:ext>
                 </a:extLst>
               </a:tr>
@@ -6926,7 +6921,7 @@
                     <a:p>
                       <a:r>
                         <a:rPr lang="en-US"/>
-                        <a:t>Receives the bundle, fans out parallel agent calls, streams progress, persists state.</a:t>
+                        <a:t>Takes the bundle, runs the agents, streams progress, saves results.</a:t>
                       </a:r>
                     </a:p>
                   </a:txBody>
@@ -6939,7 +6934,7 @@
                     <a:p>
                       <a:r>
                         <a:rPr lang="en-US"/>
-                        <a:t>FastAPI / Cloud Run + Firestore</a:t>
+                        <a:t>FastAPI on Cloud Run + Firestore</a:t>
                       </a:r>
                     </a:p>
                   </a:txBody>
@@ -6947,7 +6942,7 @@
                 </a:tc>
                 <a:extLst>
                   <a:ext uri="{0D108BD9-81ED-4DB2-BD59-A6C34878D82A}">
-                    <a16:rowId xmlns:a16="http://schemas.microsoft.com/office/drawing/2014/main" val="3239374324"/>
+                    <a16:rowId xmlns:a16="http://schemas.microsoft.com/office/drawing/2014/main" val="3490206408"/>
                   </a:ext>
                 </a:extLst>
               </a:tr>
@@ -6972,7 +6967,7 @@
                     <a:p>
                       <a:r>
                         <a:rPr lang="en-US"/>
-                        <a:t>Reads PDFs natively. Extracts parties, area, stamp duty, registration details, chain of title.</a:t>
+                        <a:t>Reads each PDF and pulls out parties, area, stamp duty, dates and registration details.</a:t>
                       </a:r>
                     </a:p>
                   </a:txBody>
@@ -6993,7 +6988,7 @@
                 </a:tc>
                 <a:extLst>
                   <a:ext uri="{0D108BD9-81ED-4DB2-BD59-A6C34878D82A}">
-                    <a16:rowId xmlns:a16="http://schemas.microsoft.com/office/drawing/2014/main" val="2634904952"/>
+                    <a16:rowId xmlns:a16="http://schemas.microsoft.com/office/drawing/2014/main" val="3380558906"/>
                   </a:ext>
                 </a:extLst>
               </a:tr>
@@ -7018,7 +7013,7 @@
                     <a:p>
                       <a:r>
                         <a:rPr lang="en-US"/>
-                        <a:t>Maps extracted data against Indian land law. Flags only concrete document-specific issues.</a:t>
+                        <a:t>Checks the documents against Indian land law and flags any non-compliance.</a:t>
                       </a:r>
                     </a:p>
                   </a:txBody>
@@ -7039,7 +7034,7 @@
                 </a:tc>
                 <a:extLst>
                   <a:ext uri="{0D108BD9-81ED-4DB2-BD59-A6C34878D82A}">
-                    <a16:rowId xmlns:a16="http://schemas.microsoft.com/office/drawing/2014/main" val="3063148662"/>
+                    <a16:rowId xmlns:a16="http://schemas.microsoft.com/office/drawing/2014/main" val="1231896642"/>
                   </a:ext>
                 </a:extLst>
               </a:tr>
@@ -7064,7 +7059,7 @@
                     <a:p>
                       <a:r>
                         <a:rPr lang="en-US"/>
-                        <a:t>Detects name mismatches, chain-of-title gaps, undervaluation. Consolidates related observations.</a:t>
+                        <a:t>Looks for red flags: name mismatches, broken ownership chain, missing signatures, undervaluation.</a:t>
                       </a:r>
                     </a:p>
                   </a:txBody>
@@ -7085,7 +7080,7 @@
                 </a:tc>
                 <a:extLst>
                   <a:ext uri="{0D108BD9-81ED-4DB2-BD59-A6C34878D82A}">
-                    <a16:rowId xmlns:a16="http://schemas.microsoft.com/office/drawing/2014/main" val="801786509"/>
+                    <a16:rowId xmlns:a16="http://schemas.microsoft.com/office/drawing/2014/main" val="1567642139"/>
                   </a:ext>
                 </a:extLst>
               </a:tr>
@@ -7110,7 +7105,7 @@
                     <a:p>
                       <a:r>
                         <a:rPr lang="en-US"/>
-                        <a:t>Synthesises findings into a lawyer-style summary, grades severity, and recommends next steps.</a:t>
+                        <a:t>Combines all findings into a short summary, grades severity, suggests next steps.</a:t>
                       </a:r>
                     </a:p>
                   </a:txBody>
@@ -7131,7 +7126,7 @@
                 </a:tc>
                 <a:extLst>
                   <a:ext uri="{0D108BD9-81ED-4DB2-BD59-A6C34878D82A}">
-                    <a16:rowId xmlns:a16="http://schemas.microsoft.com/office/drawing/2014/main" val="2919296804"/>
+                    <a16:rowId xmlns:a16="http://schemas.microsoft.com/office/drawing/2014/main" val="907606091"/>
                   </a:ext>
                 </a:extLst>
               </a:tr>
@@ -7142,7 +7137,7 @@
     </p:spTree>
     <p:extLst>
       <p:ext uri="{BB962C8B-B14F-4D97-AF65-F5344CB8AC3E}">
-        <p14:creationId xmlns:p14="http://schemas.microsoft.com/office/powerpoint/2010/main" val="103461054"/>
+        <p14:creationId xmlns:p14="http://schemas.microsoft.com/office/powerpoint/2010/main" val="3090997554"/>
       </p:ext>
     </p:extLst>
   </p:cSld>
@@ -7174,7 +7169,7 @@
           <p:cNvPr id="2" name="Title 1">
             <a:extLst>
               <a:ext uri="{FF2B5EF4-FFF2-40B4-BE49-F238E27FC236}">
-                <a16:creationId xmlns:a16="http://schemas.microsoft.com/office/drawing/2014/main" id="{EDA69C42-5090-F908-DF22-F73580CC5EA4}"/>
+                <a16:creationId xmlns:a16="http://schemas.microsoft.com/office/drawing/2014/main" id="{31CFF8AA-E0E1-8DBD-35ED-DB6446D4A488}"/>
               </a:ext>
             </a:extLst>
           </p:cNvPr>
@@ -7204,7 +7199,7 @@
           <p:cNvPr id="3" name="Text Placeholder 2">
             <a:extLst>
               <a:ext uri="{FF2B5EF4-FFF2-40B4-BE49-F238E27FC236}">
-                <a16:creationId xmlns:a16="http://schemas.microsoft.com/office/drawing/2014/main" id="{78222569-1269-DA4E-8065-B43F8C4B5C3F}"/>
+                <a16:creationId xmlns:a16="http://schemas.microsoft.com/office/drawing/2014/main" id="{12AC5EFC-DAEE-F4CF-500E-0D0165D6D959}"/>
               </a:ext>
             </a:extLst>
           </p:cNvPr>
@@ -7218,87 +7213,87 @@
         <p:spPr/>
         <p:txBody>
           <a:bodyPr>
-            <a:normAutofit fontScale="70000" lnSpcReduction="20000"/>
+            <a:normAutofit/>
           </a:bodyPr>
           <a:lstStyle/>
           <a:p>
             <a:r>
-              <a:rPr lang="en-US">
-                <a:latin typeface="Calibri" panose="020F0502020204030204" pitchFamily="34" charset="0"/>
-              </a:rPr>
-              <a:t>Frontend (Next.js): Dockerised, deployed to Cloud Run, CDN-cached static assets</a:t>
-            </a:r>
-          </a:p>
-          <a:p>
-            <a:r>
-              <a:rPr lang="en-US">
-                <a:latin typeface="Calibri" panose="020F0502020204030204" pitchFamily="34" charset="0"/>
-              </a:rPr>
-              <a:t>Backend (FastAPI): Dockerised, deployed to Cloud Run, auto-scales 0 -&gt; N, Gunicorn + Uvicorn workers</a:t>
-            </a:r>
-          </a:p>
-          <a:p>
-            <a:r>
-              <a:rPr lang="en-US">
-                <a:latin typeface="Calibri" panose="020F0502020204030204" pitchFamily="34" charset="0"/>
-              </a:rPr>
-              <a:t>CI/CD: GitHub push -&gt; Cloud Build -&gt; builds both images -&gt; Artifact Registry -&gt; deploys to Cloud Run</a:t>
-            </a:r>
-          </a:p>
-          <a:p>
-            <a:r>
-              <a:rPr lang="en-US">
-                <a:latin typeface="Calibri" panose="020F0502020204030204" pitchFamily="34" charset="0"/>
-              </a:rPr>
-              <a:t>Artifact Registry: stores backend + frontend Docker images, vulnerability scanning enabled</a:t>
-            </a:r>
-          </a:p>
-          <a:p>
-            <a:r>
-              <a:rPr lang="en-US">
-                <a:latin typeface="Calibri" panose="020F0502020204030204" pitchFamily="34" charset="0"/>
-              </a:rPr>
-              <a:t>Secret Manager: holds Gemini API keys and Firebase admin credentials; Cloud Run reads at startup</a:t>
-            </a:r>
-          </a:p>
-          <a:p>
-            <a:r>
-              <a:rPr lang="en-US">
-                <a:latin typeface="Calibri" panose="020F0502020204030204" pitchFamily="34" charset="0"/>
-              </a:rPr>
-              <a:t>Cloud Storage: bucket for uploaded documents, signed URLs with short TTL, lifecycle expiry</a:t>
-            </a:r>
-          </a:p>
-          <a:p>
-            <a:r>
-              <a:rPr lang="en-US">
-                <a:latin typeface="Calibri" panose="020F0502020204030204" pitchFamily="34" charset="0"/>
-              </a:rPr>
-              <a:t>Firestore: native-mode database, stores analysis records, findings, audit log</a:t>
-            </a:r>
-          </a:p>
-          <a:p>
-            <a:r>
-              <a:rPr lang="en-US">
-                <a:latin typeface="Calibri" panose="020F0502020204030204" pitchFamily="34" charset="0"/>
-              </a:rPr>
-              <a:t>IAM: dedicated service account per Cloud Run service, least-privilege on Firestore / GCS / Secret Manager</a:t>
-            </a:r>
-          </a:p>
-          <a:p>
-            <a:r>
-              <a:rPr lang="en-US">
-                <a:latin typeface="Calibri" panose="020F0502020204030204" pitchFamily="34" charset="0"/>
-              </a:rPr>
-              <a:t>Logging &amp; Monitoring: structured JSON logs, alerts on error rate and Gemini latency</a:t>
-            </a:r>
-          </a:p>
-          <a:p>
-            <a:r>
-              <a:rPr lang="en-US">
-                <a:latin typeface="Calibri" panose="020F0502020204030204" pitchFamily="34" charset="0"/>
-              </a:rPr>
-              <a:t>Firebase Auth: email/password and Google sign-in, ID tokens verified server-side per request</a:t>
+              <a:rPr lang="en-US" sz="1800">
+                <a:latin typeface="Calibri" panose="020F0502020204030204" pitchFamily="34" charset="0"/>
+              </a:rPr>
+              <a:t>Frontend and backend both run on Cloud Run as Docker containers</a:t>
+            </a:r>
+          </a:p>
+          <a:p>
+            <a:r>
+              <a:rPr lang="en-US" sz="1800">
+                <a:latin typeface="Calibri" panose="020F0502020204030204" pitchFamily="34" charset="0"/>
+              </a:rPr>
+              <a:t>Push to GitHub triggers Cloud Build to build the images and deploy automatically</a:t>
+            </a:r>
+          </a:p>
+          <a:p>
+            <a:r>
+              <a:rPr lang="en-US" sz="1800">
+                <a:latin typeface="Calibri" panose="020F0502020204030204" pitchFamily="34" charset="0"/>
+              </a:rPr>
+              <a:t>Docker images are stored in Artifact Registry with vulnerability scanning on</a:t>
+            </a:r>
+          </a:p>
+          <a:p>
+            <a:r>
+              <a:rPr lang="en-US" sz="1800">
+                <a:latin typeface="Calibri" panose="020F0502020204030204" pitchFamily="34" charset="0"/>
+              </a:rPr>
+              <a:t>Secrets (API keys, Firebase credentials) live in Secret Manager and are loaded at startup</a:t>
+            </a:r>
+          </a:p>
+          <a:p>
+            <a:r>
+              <a:rPr lang="en-US" sz="1800">
+                <a:latin typeface="Calibri" panose="020F0502020204030204" pitchFamily="34" charset="0"/>
+              </a:rPr>
+              <a:t>Uploaded documents go to Cloud Storage with short-lived signed URLs</a:t>
+            </a:r>
+          </a:p>
+          <a:p>
+            <a:r>
+              <a:rPr lang="en-US" sz="1800">
+                <a:latin typeface="Calibri" panose="020F0502020204030204" pitchFamily="34" charset="0"/>
+              </a:rPr>
+              <a:t>Analysis results and the audit log are stored in Firestore</a:t>
+            </a:r>
+          </a:p>
+          <a:p>
+            <a:r>
+              <a:rPr lang="en-US" sz="1800">
+                <a:latin typeface="Calibri" panose="020F0502020204030204" pitchFamily="34" charset="0"/>
+              </a:rPr>
+              <a:t>Cloud Run auto-scales from zero, so we only pay for what we use</a:t>
+            </a:r>
+          </a:p>
+          <a:p>
+            <a:r>
+              <a:rPr lang="en-US" sz="1800">
+                <a:latin typeface="Calibri" panose="020F0502020204030204" pitchFamily="34" charset="0"/>
+              </a:rPr>
+              <a:t>Each service has its own least-privilege IAM service account</a:t>
+            </a:r>
+          </a:p>
+          <a:p>
+            <a:r>
+              <a:rPr lang="en-US" sz="1800">
+                <a:latin typeface="Calibri" panose="020F0502020204030204" pitchFamily="34" charset="0"/>
+              </a:rPr>
+              <a:t>Logs and metrics are centralised in Cloud Logging and Monitoring with alerts</a:t>
+            </a:r>
+          </a:p>
+          <a:p>
+            <a:r>
+              <a:rPr lang="en-US" sz="1800">
+                <a:latin typeface="Calibri" panose="020F0502020204030204" pitchFamily="34" charset="0"/>
+              </a:rPr>
+              <a:t>Every request is protected by Firebase Authentication</a:t>
             </a:r>
           </a:p>
         </p:txBody>
@@ -7306,7 +7301,7 @@
     </p:spTree>
     <p:extLst>
       <p:ext uri="{BB962C8B-B14F-4D97-AF65-F5344CB8AC3E}">
-        <p14:creationId xmlns:p14="http://schemas.microsoft.com/office/powerpoint/2010/main" val="3107219128"/>
+        <p14:creationId xmlns:p14="http://schemas.microsoft.com/office/powerpoint/2010/main" val="759315424"/>
       </p:ext>
     </p:extLst>
   </p:cSld>
